--- a/demoscript/supplychainX402-two-slide-cn.pptx
+++ b/demoscript/supplychainX402-two-slide-cn.pptx
@@ -4673,9 +4673,137 @@
           </a:p>
         </p:txBody>
       </p:sp>
+      <p:sp>
+        <p:nvSpPr>
+          <p:cNvPr id="44" name="椭圆 43"/>
+          <p:cNvSpPr/>
+          <p:nvPr/>
+        </p:nvSpPr>
+        <p:spPr>
+          <a:xfrm>
+            <a:off x="9804400" y="-1676400"/>
+            <a:ext cx="4089400" cy="4089400"/>
+          </a:xfrm>
+          <a:prstGeom prst="ellipse">
+            <a:avLst/>
+          </a:prstGeom>
+          <a:solidFill>
+            <a:srgbClr val="3B82F6">
+              <a:alpha val="9000"/>
+            </a:srgbClr>
+          </a:solidFill>
+          <a:ln w="12700" cap="flat" cmpd="sng" algn="ctr">
+            <a:noFill/>
+            <a:prstDash val="solid"/>
+            <a:miter lim="800000"/>
+          </a:ln>
+          <a:extLst>
+            <a:ext uri="{91240B29-F687-4F45-9708-019B960494DF}">
+              <a14:hiddenLine xmlns:a14="http://schemas.microsoft.com/office/drawing/2010/main" w="12700" cap="flat" cmpd="sng" algn="ctr">
+                <a:solidFill>
+                  <a:schemeClr val="accent1">
+                    <a:lumMod val="75000"/>
+                  </a:schemeClr>
+                </a:solidFill>
+                <a:prstDash val="solid"/>
+                <a:miter lim="800000"/>
+                <a:headEnd/>
+                <a:tailEnd/>
+              </a14:hiddenLine>
+            </a:ext>
+          </a:extLst>
+        </p:spPr>
+        <p:style>
+          <a:lnRef idx="2">
+            <a:schemeClr val="accent1">
+              <a:lumMod val="75000"/>
+            </a:schemeClr>
+          </a:lnRef>
+          <a:fillRef idx="1">
+            <a:schemeClr val="accent1"/>
+          </a:fillRef>
+          <a:effectRef idx="0">
+            <a:srgbClr val="FFFFFF"/>
+          </a:effectRef>
+          <a:fontRef idx="minor">
+            <a:schemeClr val="lt1"/>
+          </a:fontRef>
+        </p:style>
+        <p:txBody>
+          <a:bodyPr rtlCol="0" anchor="ctr"/>
+          <a:p>
+            <a:pPr algn="ctr"/>
+            <a:endParaRPr lang="zh-CN" altLang="en-US"/>
+          </a:p>
+        </p:txBody>
+      </p:sp>
+      <p:sp>
+        <p:nvSpPr>
+          <p:cNvPr id="45" name="椭圆 44"/>
+          <p:cNvSpPr/>
+          <p:nvPr/>
+        </p:nvSpPr>
+        <p:spPr>
+          <a:xfrm>
+            <a:off x="-1498600" y="5194300"/>
+            <a:ext cx="2997200" cy="2997200"/>
+          </a:xfrm>
+          <a:prstGeom prst="ellipse">
+            <a:avLst/>
+          </a:prstGeom>
+          <a:solidFill>
+            <a:srgbClr val="24D5FF">
+              <a:alpha val="6000"/>
+            </a:srgbClr>
+          </a:solidFill>
+          <a:ln w="12700" cap="flat" cmpd="sng" algn="ctr">
+            <a:noFill/>
+            <a:prstDash val="solid"/>
+            <a:miter lim="800000"/>
+          </a:ln>
+          <a:extLst>
+            <a:ext uri="{91240B29-F687-4F45-9708-019B960494DF}">
+              <a14:hiddenLine xmlns:a14="http://schemas.microsoft.com/office/drawing/2010/main" w="12700" cap="flat" cmpd="sng" algn="ctr">
+                <a:solidFill>
+                  <a:schemeClr val="accent1">
+                    <a:lumMod val="75000"/>
+                  </a:schemeClr>
+                </a:solidFill>
+                <a:prstDash val="solid"/>
+                <a:miter lim="800000"/>
+                <a:headEnd/>
+                <a:tailEnd/>
+              </a14:hiddenLine>
+            </a:ext>
+          </a:extLst>
+        </p:spPr>
+        <p:style>
+          <a:lnRef idx="2">
+            <a:schemeClr val="accent1">
+              <a:lumMod val="75000"/>
+            </a:schemeClr>
+          </a:lnRef>
+          <a:fillRef idx="1">
+            <a:schemeClr val="accent1"/>
+          </a:fillRef>
+          <a:effectRef idx="0">
+            <a:srgbClr val="FFFFFF"/>
+          </a:effectRef>
+          <a:fontRef idx="minor">
+            <a:schemeClr val="lt1"/>
+          </a:fontRef>
+        </p:style>
+        <p:txBody>
+          <a:bodyPr rtlCol="0" anchor="ctr"/>
+          <a:p>
+            <a:pPr algn="ctr"/>
+            <a:endParaRPr lang="zh-CN" altLang="en-US"/>
+          </a:p>
+        </p:txBody>
+      </p:sp>
       <p:cxnSp>
         <p:nvCxnSpPr>
-          <p:cNvPr id="44" name="直接连接符 43"/>
+          <p:cNvPr id="46" name="直接连接符 45"/>
           <p:cNvCxnSpPr/>
           <p:nvPr/>
         </p:nvCxnSpPr>
@@ -4710,7 +4838,7 @@
       </p:cxnSp>
       <p:sp>
         <p:nvSpPr>
-          <p:cNvPr id="45" name="文本框 44"/>
+          <p:cNvPr id="47" name="文本框 46"/>
           <p:cNvSpPr txBox="1"/>
           <p:nvPr/>
         </p:nvSpPr>
@@ -4725,13 +4853,21 @@
           <a:noFill/>
         </p:spPr>
         <p:txBody>
-          <a:bodyPr wrap="square" lIns="0" tIns="0" rIns="0" rtlCol="0" anchor="t">
-            <a:normAutofit/>
+          <a:bodyPr wrap="square" lIns="0" tIns="0" rIns="0" rtlCol="0" anchor="ctr">
+            <a:noAutofit/>
           </a:bodyPr>
           <a:p>
-            <a:pPr algn="l"/>
-            <a:r>
-              <a:rPr lang="en-US" altLang="en-US" sz="940" b="1">
+            <a:pPr indent="0" algn="l">
+              <a:spcBef>
+                <a:spcPts val="0"/>
+              </a:spcBef>
+              <a:spcAft>
+                <a:spcPts val="0"/>
+              </a:spcAft>
+              <a:buNone/>
+            </a:pPr>
+            <a:r>
+              <a:rPr lang="en-US" altLang="en-US" sz="750" b="1">
                 <a:solidFill>
                   <a:srgbClr val="7894AF"/>
                 </a:solidFill>
@@ -4740,7 +4876,7 @@
               </a:rPr>
               <a:t>SUPPLYCHAINX402</a:t>
             </a:r>
-            <a:endParaRPr lang="en-US" altLang="en-US" sz="940" b="1">
+            <a:endParaRPr lang="en-US" altLang="en-US" sz="750" b="1">
               <a:solidFill>
                 <a:srgbClr val="7894AF"/>
               </a:solidFill>
@@ -4752,7 +4888,7 @@
       </p:sp>
       <p:sp>
         <p:nvSpPr>
-          <p:cNvPr id="46" name="文本框 45"/>
+          <p:cNvPr id="48" name="文本框 47"/>
           <p:cNvSpPr txBox="1"/>
           <p:nvPr/>
         </p:nvSpPr>
@@ -4767,13 +4903,21 @@
           <a:noFill/>
         </p:spPr>
         <p:txBody>
-          <a:bodyPr wrap="square" lIns="0" tIns="0" rIns="0" rtlCol="0" anchor="t">
-            <a:normAutofit/>
+          <a:bodyPr wrap="square" lIns="0" tIns="0" rIns="0" rtlCol="0" anchor="ctr">
+            <a:noAutofit/>
           </a:bodyPr>
           <a:p>
-            <a:pPr algn="r"/>
-            <a:r>
-              <a:rPr lang="en-US" altLang="en-US" sz="1070" b="1">
+            <a:pPr indent="0" algn="r">
+              <a:spcBef>
+                <a:spcPts val="0"/>
+              </a:spcBef>
+              <a:spcAft>
+                <a:spcPts val="0"/>
+              </a:spcAft>
+              <a:buNone/>
+            </a:pPr>
+            <a:r>
+              <a:rPr lang="en-US" altLang="en-US" sz="750" b="1">
                 <a:solidFill>
                   <a:srgbClr val="7894AF"/>
                 </a:solidFill>
@@ -4782,7 +4926,7 @@
               </a:rPr>
               <a:t>ATTESTFLOW · CC3 MVP</a:t>
             </a:r>
-            <a:endParaRPr lang="en-US" altLang="en-US" sz="1070" b="1">
+            <a:endParaRPr lang="en-US" altLang="en-US" sz="750" b="1">
               <a:solidFill>
                 <a:srgbClr val="7894AF"/>
               </a:solidFill>
@@ -4794,7 +4938,7 @@
       </p:sp>
       <p:sp>
         <p:nvSpPr>
-          <p:cNvPr id="47" name="文本框 46"/>
+          <p:cNvPr id="49" name="文本框 48"/>
           <p:cNvSpPr txBox="1"/>
           <p:nvPr/>
         </p:nvSpPr>
@@ -4809,13 +4953,21 @@
           <a:noFill/>
         </p:spPr>
         <p:txBody>
-          <a:bodyPr wrap="square" lIns="0" tIns="0" rIns="0" rtlCol="0" anchor="t">
-            <a:normAutofit/>
+          <a:bodyPr wrap="square" lIns="0" tIns="0" rIns="0" rtlCol="0" anchor="ctr">
+            <a:noAutofit/>
           </a:bodyPr>
           <a:p>
-            <a:pPr algn="r"/>
-            <a:r>
-              <a:rPr lang="en-US" altLang="en-US" sz="835">
+            <a:pPr indent="0" algn="r">
+              <a:spcBef>
+                <a:spcPts val="0"/>
+              </a:spcBef>
+              <a:spcAft>
+                <a:spcPts val="0"/>
+              </a:spcAft>
+              <a:buNone/>
+            </a:pPr>
+            <a:r>
+              <a:rPr lang="en-US" altLang="en-US" sz="750">
                 <a:solidFill>
                   <a:srgbClr val="7894AF"/>
                 </a:solidFill>
@@ -4824,7 +4976,7 @@
               </a:rPr>
               <a:t>1</a:t>
             </a:r>
-            <a:endParaRPr lang="en-US" altLang="en-US" sz="835">
+            <a:endParaRPr lang="en-US" altLang="en-US" sz="750">
               <a:solidFill>
                 <a:srgbClr val="7894AF"/>
               </a:solidFill>
@@ -4836,14 +4988,14 @@
       </p:sp>
       <p:sp>
         <p:nvSpPr>
-          <p:cNvPr id="48" name="文本框 47"/>
+          <p:cNvPr id="50" name="文本框 49"/>
           <p:cNvSpPr txBox="1"/>
           <p:nvPr/>
         </p:nvSpPr>
         <p:spPr>
           <a:xfrm>
             <a:off x="622300" y="355600"/>
-            <a:ext cx="4318000" cy="322580"/>
+            <a:ext cx="4318000" cy="360680"/>
           </a:xfrm>
           <a:prstGeom prst="rect">
             <a:avLst/>
@@ -4851,13 +5003,21 @@
           <a:noFill/>
         </p:spPr>
         <p:txBody>
-          <a:bodyPr wrap="square" lIns="0" tIns="0" rIns="0" rtlCol="0" anchor="t">
-            <a:normAutofit/>
+          <a:bodyPr wrap="square" lIns="38100" tIns="38100" rIns="38100" rtlCol="0" anchor="t">
+            <a:noAutofit/>
           </a:bodyPr>
           <a:p>
-            <a:pPr algn="l"/>
-            <a:r>
-              <a:rPr lang="en-US" altLang="en-US" sz="945" b="1" spc="150">
+            <a:pPr indent="0" algn="l">
+              <a:spcBef>
+                <a:spcPts val="0"/>
+              </a:spcBef>
+              <a:spcAft>
+                <a:spcPts val="0"/>
+              </a:spcAft>
+              <a:buNone/>
+            </a:pPr>
+            <a:r>
+              <a:rPr lang="en-US" altLang="en-US" sz="850" b="1" spc="150">
                 <a:solidFill>
                   <a:srgbClr val="24D5FF"/>
                 </a:solidFill>
@@ -4867,7 +5027,7 @@
               <a:t>01  /  </a:t>
             </a:r>
             <a:r>
-              <a:rPr lang="zh-CN" altLang="en-US" sz="945" b="1" spc="150">
+              <a:rPr lang="zh-CN" altLang="en-US" sz="850" b="1" spc="150">
                 <a:solidFill>
                   <a:srgbClr val="24D5FF"/>
                 </a:solidFill>
@@ -4876,7 +5036,7 @@
               </a:rPr>
               <a:t>供应链金融模式</a:t>
             </a:r>
-            <a:endParaRPr lang="zh-CN" altLang="en-US" sz="945" b="1" spc="150">
+            <a:endParaRPr lang="zh-CN" altLang="en-US" sz="850" b="1" spc="150">
               <a:solidFill>
                 <a:srgbClr val="24D5FF"/>
               </a:solidFill>
@@ -4888,14 +5048,14 @@
       </p:sp>
       <p:sp>
         <p:nvSpPr>
-          <p:cNvPr id="49" name="文本框 48"/>
+          <p:cNvPr id="51" name="文本框 50"/>
           <p:cNvSpPr txBox="1"/>
           <p:nvPr/>
         </p:nvSpPr>
         <p:spPr>
           <a:xfrm>
             <a:off x="609600" y="660400"/>
-            <a:ext cx="10972800" cy="322580"/>
+            <a:ext cx="10972800" cy="360680"/>
           </a:xfrm>
           <a:prstGeom prst="rect">
             <a:avLst/>
@@ -4903,13 +5063,21 @@
           <a:noFill/>
         </p:spPr>
         <p:txBody>
-          <a:bodyPr wrap="square" lIns="0" tIns="0" rIns="0" rtlCol="0" anchor="t">
+          <a:bodyPr wrap="square" lIns="38100" tIns="38100" rIns="38100" rtlCol="0" anchor="t">
             <a:noAutofit/>
           </a:bodyPr>
           <a:p>
-            <a:pPr algn="l"/>
-            <a:r>
-              <a:rPr lang="zh-CN" altLang="en-US" sz="2300" b="1">
+            <a:pPr indent="0" algn="l">
+              <a:spcBef>
+                <a:spcPts val="0"/>
+              </a:spcBef>
+              <a:spcAft>
+                <a:spcPts val="0"/>
+              </a:spcAft>
+              <a:buNone/>
+            </a:pPr>
+            <a:r>
+              <a:rPr lang="zh-CN" altLang="en-US" sz="2350" b="1">
                 <a:solidFill>
                   <a:srgbClr val="F4F8FC"/>
                 </a:solidFill>
@@ -4918,7 +5086,7 @@
               </a:rPr>
               <a:t>从真实贸易到到期兑付：一笔应收账款的融资闭环</a:t>
             </a:r>
-            <a:endParaRPr lang="zh-CN" altLang="en-US" sz="2300" b="1">
+            <a:endParaRPr lang="zh-CN" altLang="en-US" sz="2350" b="1">
               <a:solidFill>
                 <a:srgbClr val="F4F8FC"/>
               </a:solidFill>
@@ -4930,14 +5098,14 @@
       </p:sp>
       <p:sp>
         <p:nvSpPr>
-          <p:cNvPr id="50" name="文本框 49"/>
+          <p:cNvPr id="52" name="文本框 51"/>
           <p:cNvSpPr txBox="1"/>
           <p:nvPr/>
         </p:nvSpPr>
         <p:spPr>
           <a:xfrm>
             <a:off x="622300" y="1282700"/>
-            <a:ext cx="10795000" cy="322580"/>
+            <a:ext cx="10795000" cy="360680"/>
           </a:xfrm>
           <a:prstGeom prst="rect">
             <a:avLst/>
@@ -4945,13 +5113,21 @@
           <a:noFill/>
         </p:spPr>
         <p:txBody>
-          <a:bodyPr wrap="square" lIns="0" tIns="0" rIns="0" rtlCol="0" anchor="t">
-            <a:normAutofit/>
+          <a:bodyPr wrap="square" lIns="38100" tIns="38100" rIns="38100" rtlCol="0" anchor="t">
+            <a:noAutofit/>
           </a:bodyPr>
           <a:p>
-            <a:pPr algn="l"/>
-            <a:r>
-              <a:rPr lang="zh-CN" altLang="en-US" sz="1165">
+            <a:pPr indent="0" algn="l">
+              <a:spcBef>
+                <a:spcPts val="0"/>
+              </a:spcBef>
+              <a:spcAft>
+                <a:spcPts val="0"/>
+              </a:spcAft>
+              <a:buNone/>
+            </a:pPr>
+            <a:r>
+              <a:rPr lang="zh-CN" altLang="en-US" sz="1050">
                 <a:solidFill>
                   <a:srgbClr val="C7D7E8"/>
                 </a:solidFill>
@@ -4960,7 +5136,7 @@
               </a:rPr>
               <a:t>买方先确权，供应商凭买方信用获得无追索融资；到期由预签授权驱动稳定币结算。</a:t>
             </a:r>
-            <a:endParaRPr lang="zh-CN" altLang="en-US" sz="1165">
+            <a:endParaRPr lang="zh-CN" altLang="en-US" sz="1050">
               <a:solidFill>
                 <a:srgbClr val="C7D7E8"/>
               </a:solidFill>
@@ -4972,95 +5148,24 @@
       </p:sp>
       <p:cxnSp>
         <p:nvCxnSpPr>
-          <p:cNvPr id="51" name="直接连接符 50"/>
-          <p:cNvCxnSpPr/>
-          <p:nvPr/>
-        </p:nvCxnSpPr>
-        <p:spPr>
-          <a:xfrm>
-            <a:off x="711200" y="1676400"/>
-            <a:ext cx="10756900" cy="635"/>
-          </a:xfrm>
-          <a:prstGeom prst="line">
-            <a:avLst/>
-          </a:prstGeom>
-          <a:ln w="19050">
-            <a:solidFill>
-              <a:srgbClr val="3B82F6"/>
-            </a:solidFill>
-            <a:tailEnd type="triangle"/>
-          </a:ln>
-        </p:spPr>
-        <p:style>
-          <a:lnRef idx="2">
-            <a:schemeClr val="accent1"/>
-          </a:lnRef>
-          <a:fillRef idx="0">
-            <a:srgbClr val="FFFFFF"/>
-          </a:fillRef>
-          <a:effectRef idx="0">
-            <a:srgbClr val="FFFFFF"/>
-          </a:effectRef>
-          <a:fontRef idx="minor">
-            <a:schemeClr val="tx1"/>
-          </a:fontRef>
-        </p:style>
-      </p:cxnSp>
-      <p:cxnSp>
-        <p:nvCxnSpPr>
-          <p:cNvPr id="52" name="直接连接符 51"/>
-          <p:cNvCxnSpPr/>
-          <p:nvPr/>
-        </p:nvCxnSpPr>
-        <p:spPr>
-          <a:xfrm>
-            <a:off x="2082800" y="3035300"/>
-            <a:ext cx="368300" cy="635"/>
-          </a:xfrm>
-          <a:prstGeom prst="line">
-            <a:avLst/>
-          </a:prstGeom>
-          <a:ln w="13970">
-            <a:solidFill>
-              <a:srgbClr val="244666"/>
-            </a:solidFill>
-            <a:tailEnd type="triangle"/>
-          </a:ln>
-        </p:spPr>
-        <p:style>
-          <a:lnRef idx="2">
-            <a:schemeClr val="accent1"/>
-          </a:lnRef>
-          <a:fillRef idx="0">
-            <a:srgbClr val="FFFFFF"/>
-          </a:fillRef>
-          <a:effectRef idx="0">
-            <a:srgbClr val="FFFFFF"/>
-          </a:effectRef>
-          <a:fontRef idx="minor">
-            <a:schemeClr val="tx1"/>
-          </a:fontRef>
-        </p:style>
-      </p:cxnSp>
-      <p:cxnSp>
-        <p:nvCxnSpPr>
           <p:cNvPr id="53" name="直接连接符 52"/>
           <p:cNvCxnSpPr/>
           <p:nvPr/>
         </p:nvCxnSpPr>
         <p:spPr>
           <a:xfrm>
-            <a:off x="4013200" y="3035300"/>
-            <a:ext cx="368300" cy="635"/>
+            <a:off x="1320800" y="3035300"/>
+            <a:ext cx="9652000" cy="635"/>
           </a:xfrm>
           <a:prstGeom prst="line">
             <a:avLst/>
           </a:prstGeom>
-          <a:ln w="13970">
+          <a:ln w="22860">
             <a:solidFill>
-              <a:srgbClr val="244666"/>
+              <a:srgbClr val="244666">
+                <a:alpha val="66000"/>
+              </a:srgbClr>
             </a:solidFill>
-            <a:tailEnd type="triangle"/>
           </a:ln>
         </p:spPr>
         <p:style>
@@ -5086,15 +5191,17 @@
         </p:nvCxnSpPr>
         <p:spPr>
           <a:xfrm>
-            <a:off x="5943600" y="3035300"/>
+            <a:off x="2082800" y="3035300"/>
             <a:ext cx="368300" cy="635"/>
           </a:xfrm>
           <a:prstGeom prst="line">
             <a:avLst/>
           </a:prstGeom>
-          <a:ln w="13970">
+          <a:ln w="19050">
             <a:solidFill>
-              <a:srgbClr val="244666"/>
+              <a:srgbClr val="3B82F6">
+                <a:alpha val="88000"/>
+              </a:srgbClr>
             </a:solidFill>
             <a:tailEnd type="triangle"/>
           </a:ln>
@@ -5122,15 +5229,17 @@
         </p:nvCxnSpPr>
         <p:spPr>
           <a:xfrm>
-            <a:off x="7874000" y="3035300"/>
+            <a:off x="4013200" y="3035300"/>
             <a:ext cx="368300" cy="635"/>
           </a:xfrm>
           <a:prstGeom prst="line">
             <a:avLst/>
           </a:prstGeom>
-          <a:ln w="13970">
+          <a:ln w="19050">
             <a:solidFill>
-              <a:srgbClr val="244666"/>
+              <a:srgbClr val="3B82F6">
+                <a:alpha val="88000"/>
+              </a:srgbClr>
             </a:solidFill>
             <a:tailEnd type="triangle"/>
           </a:ln>
@@ -5158,15 +5267,17 @@
         </p:nvCxnSpPr>
         <p:spPr>
           <a:xfrm>
-            <a:off x="9804400" y="3035300"/>
+            <a:off x="5943600" y="3035300"/>
             <a:ext cx="368300" cy="635"/>
           </a:xfrm>
           <a:prstGeom prst="line">
             <a:avLst/>
           </a:prstGeom>
-          <a:ln w="13970">
+          <a:ln w="19050">
             <a:solidFill>
-              <a:srgbClr val="244666"/>
+              <a:srgbClr val="3B82F6">
+                <a:alpha val="88000"/>
+              </a:srgbClr>
             </a:solidFill>
             <a:tailEnd type="triangle"/>
           </a:ln>
@@ -5186,9 +5297,85 @@
           </a:fontRef>
         </p:style>
       </p:cxnSp>
-      <p:sp>
-        <p:nvSpPr>
-          <p:cNvPr id="57" name="圆角矩形 56"/>
+      <p:cxnSp>
+        <p:nvCxnSpPr>
+          <p:cNvPr id="57" name="直接连接符 56"/>
+          <p:cNvCxnSpPr/>
+          <p:nvPr/>
+        </p:nvCxnSpPr>
+        <p:spPr>
+          <a:xfrm>
+            <a:off x="7874000" y="3035300"/>
+            <a:ext cx="368300" cy="635"/>
+          </a:xfrm>
+          <a:prstGeom prst="line">
+            <a:avLst/>
+          </a:prstGeom>
+          <a:ln w="19050">
+            <a:solidFill>
+              <a:srgbClr val="3B82F6">
+                <a:alpha val="88000"/>
+              </a:srgbClr>
+            </a:solidFill>
+            <a:tailEnd type="triangle"/>
+          </a:ln>
+        </p:spPr>
+        <p:style>
+          <a:lnRef idx="2">
+            <a:schemeClr val="accent1"/>
+          </a:lnRef>
+          <a:fillRef idx="0">
+            <a:srgbClr val="FFFFFF"/>
+          </a:fillRef>
+          <a:effectRef idx="0">
+            <a:srgbClr val="FFFFFF"/>
+          </a:effectRef>
+          <a:fontRef idx="minor">
+            <a:schemeClr val="tx1"/>
+          </a:fontRef>
+        </p:style>
+      </p:cxnSp>
+      <p:cxnSp>
+        <p:nvCxnSpPr>
+          <p:cNvPr id="58" name="直接连接符 57"/>
+          <p:cNvCxnSpPr/>
+          <p:nvPr/>
+        </p:nvCxnSpPr>
+        <p:spPr>
+          <a:xfrm>
+            <a:off x="9804400" y="3035300"/>
+            <a:ext cx="368300" cy="635"/>
+          </a:xfrm>
+          <a:prstGeom prst="line">
+            <a:avLst/>
+          </a:prstGeom>
+          <a:ln w="19050">
+            <a:solidFill>
+              <a:srgbClr val="3B82F6">
+                <a:alpha val="88000"/>
+              </a:srgbClr>
+            </a:solidFill>
+            <a:tailEnd type="triangle"/>
+          </a:ln>
+        </p:spPr>
+        <p:style>
+          <a:lnRef idx="2">
+            <a:schemeClr val="accent1"/>
+          </a:lnRef>
+          <a:fillRef idx="0">
+            <a:srgbClr val="FFFFFF"/>
+          </a:fillRef>
+          <a:effectRef idx="0">
+            <a:srgbClr val="FFFFFF"/>
+          </a:effectRef>
+          <a:fontRef idx="minor">
+            <a:schemeClr val="tx1"/>
+          </a:fontRef>
+        </p:style>
+      </p:cxnSp>
+      <p:sp>
+        <p:nvSpPr>
+          <p:cNvPr id="59" name="圆角矩形 58"/>
           <p:cNvSpPr/>
           <p:nvPr/>
         </p:nvSpPr>
@@ -5205,8 +5392,8 @@
           </a:solidFill>
           <a:ln w="12700">
             <a:solidFill>
-              <a:srgbClr val="24D5FF">
-                <a:alpha val="55000"/>
+              <a:srgbClr val="244666">
+                <a:alpha val="88000"/>
               </a:srgbClr>
             </a:solidFill>
           </a:ln>
@@ -5237,7 +5424,7 @@
       </p:sp>
       <p:sp>
         <p:nvSpPr>
-          <p:cNvPr id="58" name="椭圆 57"/>
+          <p:cNvPr id="60" name="椭圆 59"/>
           <p:cNvSpPr/>
           <p:nvPr/>
         </p:nvSpPr>
@@ -5284,7 +5471,7 @@
       </p:sp>
       <p:sp>
         <p:nvSpPr>
-          <p:cNvPr id="59" name="文本框 58"/>
+          <p:cNvPr id="61" name="文本框 60"/>
           <p:cNvSpPr txBox="1"/>
           <p:nvPr/>
         </p:nvSpPr>
@@ -5299,13 +5486,21 @@
           <a:noFill/>
         </p:spPr>
         <p:txBody>
-          <a:bodyPr wrap="square" lIns="0" tIns="0" rIns="0" rtlCol="0" anchor="t">
-            <a:normAutofit/>
+          <a:bodyPr wrap="square" lIns="0" tIns="0" rIns="0" rtlCol="0" anchor="ctr">
+            <a:noAutofit/>
           </a:bodyPr>
           <a:p>
-            <a:pPr algn="ctr"/>
-            <a:r>
-              <a:rPr lang="en-US" altLang="en-US" sz="835" b="1">
+            <a:pPr indent="0" algn="ctr">
+              <a:spcBef>
+                <a:spcPts val="0"/>
+              </a:spcBef>
+              <a:spcAft>
+                <a:spcPts val="0"/>
+              </a:spcAft>
+              <a:buNone/>
+            </a:pPr>
+            <a:r>
+              <a:rPr lang="en-US" altLang="en-US" sz="750" b="1">
                 <a:solidFill>
                   <a:srgbClr val="071426"/>
                 </a:solidFill>
@@ -5314,7 +5509,7 @@
               </a:rPr>
               <a:t>01</a:t>
             </a:r>
-            <a:endParaRPr lang="en-US" altLang="en-US" sz="835" b="1">
+            <a:endParaRPr lang="en-US" altLang="en-US" sz="750" b="1">
               <a:solidFill>
                 <a:srgbClr val="071426"/>
               </a:solidFill>
@@ -5326,14 +5521,14 @@
       </p:sp>
       <p:sp>
         <p:nvSpPr>
-          <p:cNvPr id="60" name="圆角矩形 59"/>
+          <p:cNvPr id="62" name="圆角矩形 61"/>
           <p:cNvSpPr/>
           <p:nvPr/>
         </p:nvSpPr>
         <p:spPr>
           <a:xfrm>
             <a:off x="812800" y="2260600"/>
-            <a:ext cx="1016000" cy="279400"/>
+            <a:ext cx="1016000" cy="304800"/>
           </a:xfrm>
           <a:prstGeom prst="roundRect">
             <a:avLst/>
@@ -5344,7 +5539,7 @@
           <a:ln w="12700">
             <a:solidFill>
               <a:srgbClr val="24D5FF">
-                <a:alpha val="65000"/>
+                <a:alpha val="48000"/>
               </a:srgbClr>
             </a:solidFill>
           </a:ln>
@@ -5375,14 +5570,14 @@
       </p:sp>
       <p:sp>
         <p:nvSpPr>
-          <p:cNvPr id="61" name="文本框 60"/>
+          <p:cNvPr id="63" name="文本框 62"/>
           <p:cNvSpPr txBox="1"/>
           <p:nvPr/>
         </p:nvSpPr>
         <p:spPr>
           <a:xfrm>
-            <a:off x="876300" y="2324100"/>
-            <a:ext cx="889000" cy="322580"/>
+            <a:off x="876300" y="2298700"/>
+            <a:ext cx="889000" cy="335280"/>
           </a:xfrm>
           <a:prstGeom prst="rect">
             <a:avLst/>
@@ -5390,13 +5585,21 @@
           <a:noFill/>
         </p:spPr>
         <p:txBody>
-          <a:bodyPr wrap="square" lIns="0" tIns="0" rIns="0" rtlCol="0" anchor="t">
-            <a:normAutofit/>
+          <a:bodyPr wrap="square" lIns="12700" tIns="12700" rIns="12700" rtlCol="0" anchor="ctr">
+            <a:noAutofit/>
           </a:bodyPr>
           <a:p>
-            <a:pPr algn="ctr"/>
-            <a:r>
-              <a:rPr lang="zh-CN" altLang="en-US" sz="820" b="1">
+            <a:pPr indent="0" algn="ctr">
+              <a:spcBef>
+                <a:spcPts val="0"/>
+              </a:spcBef>
+              <a:spcAft>
+                <a:spcPts val="0"/>
+              </a:spcAft>
+              <a:buNone/>
+            </a:pPr>
+            <a:r>
+              <a:rPr lang="zh-CN" altLang="en-US" sz="860" b="1">
                 <a:solidFill>
                   <a:srgbClr val="24D5FF"/>
                 </a:solidFill>
@@ -5405,7 +5608,7 @@
               </a:rPr>
               <a:t>供应商</a:t>
             </a:r>
-            <a:endParaRPr lang="zh-CN" altLang="en-US" sz="820" b="1">
+            <a:endParaRPr lang="zh-CN" altLang="en-US" sz="860" b="1">
               <a:solidFill>
                 <a:srgbClr val="24D5FF"/>
               </a:solidFill>
@@ -5417,14 +5620,14 @@
       </p:sp>
       <p:sp>
         <p:nvSpPr>
-          <p:cNvPr id="62" name="文本框 61"/>
+          <p:cNvPr id="64" name="文本框 63"/>
           <p:cNvSpPr txBox="1"/>
           <p:nvPr/>
         </p:nvSpPr>
         <p:spPr>
           <a:xfrm>
-            <a:off x="723900" y="2755900"/>
-            <a:ext cx="1193800" cy="322580"/>
+            <a:off x="711200" y="2717800"/>
+            <a:ext cx="1219200" cy="347980"/>
           </a:xfrm>
           <a:prstGeom prst="rect">
             <a:avLst/>
@@ -5432,13 +5635,21 @@
           <a:noFill/>
         </p:spPr>
         <p:txBody>
-          <a:bodyPr wrap="square" lIns="0" tIns="0" rIns="0" rtlCol="0" anchor="t">
-            <a:normAutofit/>
+          <a:bodyPr wrap="square" lIns="25400" tIns="25400" rIns="25400" rtlCol="0" anchor="ctr">
+            <a:noAutofit/>
           </a:bodyPr>
           <a:p>
-            <a:pPr algn="ctr"/>
-            <a:r>
-              <a:rPr lang="zh-CN" altLang="en-US" sz="1300" b="1">
+            <a:pPr indent="0" algn="ctr">
+              <a:spcBef>
+                <a:spcPts val="0"/>
+              </a:spcBef>
+              <a:spcAft>
+                <a:spcPts val="0"/>
+              </a:spcAft>
+              <a:buNone/>
+            </a:pPr>
+            <a:r>
+              <a:rPr lang="zh-CN" altLang="en-US" sz="1250" b="1">
                 <a:solidFill>
                   <a:srgbClr val="F4F8FC"/>
                 </a:solidFill>
@@ -5447,7 +5658,7 @@
               </a:rPr>
               <a:t>提交贸易资料</a:t>
             </a:r>
-            <a:endParaRPr lang="zh-CN" altLang="en-US" sz="1300" b="1">
+            <a:endParaRPr lang="zh-CN" altLang="en-US" sz="1250" b="1">
               <a:solidFill>
                 <a:srgbClr val="F4F8FC"/>
               </a:solidFill>
@@ -5459,7 +5670,7 @@
       </p:sp>
       <p:cxnSp>
         <p:nvCxnSpPr>
-          <p:cNvPr id="63" name="直接连接符 62"/>
+          <p:cNvPr id="65" name="直接连接符 64"/>
           <p:cNvCxnSpPr/>
           <p:nvPr/>
         </p:nvCxnSpPr>
@@ -5494,14 +5705,14 @@
       </p:cxnSp>
       <p:sp>
         <p:nvSpPr>
-          <p:cNvPr id="64" name="文本框 63"/>
+          <p:cNvPr id="66" name="文本框 65"/>
           <p:cNvSpPr txBox="1"/>
           <p:nvPr/>
         </p:nvSpPr>
         <p:spPr>
           <a:xfrm>
-            <a:off x="711200" y="3352800"/>
-            <a:ext cx="1219200" cy="322580"/>
+            <a:off x="711200" y="3340100"/>
+            <a:ext cx="1219200" cy="347980"/>
           </a:xfrm>
           <a:prstGeom prst="rect">
             <a:avLst/>
@@ -5509,13 +5720,21 @@
           <a:noFill/>
         </p:spPr>
         <p:txBody>
-          <a:bodyPr wrap="square" lIns="0" tIns="0" rIns="0" rtlCol="0" anchor="t">
-            <a:normAutofit fontScale="40000"/>
+          <a:bodyPr wrap="square" lIns="25400" tIns="25400" rIns="25400" rtlCol="0" anchor="t">
+            <a:noAutofit/>
           </a:bodyPr>
           <a:p>
-            <a:pPr algn="ctr"/>
-            <a:r>
-              <a:rPr lang="zh-CN" altLang="en-US" sz="2050">
+            <a:pPr indent="0" algn="ctr">
+              <a:spcBef>
+                <a:spcPts val="0"/>
+              </a:spcBef>
+              <a:spcAft>
+                <a:spcPts val="0"/>
+              </a:spcAft>
+              <a:buNone/>
+            </a:pPr>
+            <a:r>
+              <a:rPr lang="zh-CN" altLang="en-US" sz="900">
                 <a:solidFill>
                   <a:srgbClr val="C7D7E8"/>
                 </a:solidFill>
@@ -5526,7 +5745,7 @@
               <a:t>合同</a:t>
             </a:r>
             <a:r>
-              <a:rPr lang="en-US" altLang="zh-CN" sz="2050">
+              <a:rPr lang="en-US" altLang="zh-CN" sz="900">
                 <a:solidFill>
                   <a:srgbClr val="C7D7E8"/>
                 </a:solidFill>
@@ -5537,7 +5756,7 @@
               <a:t> / PO / </a:t>
             </a:r>
             <a:r>
-              <a:rPr lang="zh-CN" altLang="en-US" sz="2050">
+              <a:rPr lang="zh-CN" altLang="en-US" sz="900">
                 <a:solidFill>
                   <a:srgbClr val="C7D7E8"/>
                 </a:solidFill>
@@ -5548,7 +5767,7 @@
               <a:t>发票</a:t>
             </a:r>
             <a:r>
-              <a:rPr lang="en-US" altLang="zh-CN" sz="2050">
+              <a:rPr lang="en-US" altLang="zh-CN" sz="900">
                 <a:solidFill>
                   <a:srgbClr val="C7D7E8"/>
                 </a:solidFill>
@@ -5560,7 +5779,7 @@
 </a:t>
             </a:r>
             <a:r>
-              <a:rPr lang="zh-CN" altLang="en-US" sz="2050">
+              <a:rPr lang="zh-CN" altLang="en-US" sz="900">
                 <a:solidFill>
                   <a:srgbClr val="C7D7E8"/>
                 </a:solidFill>
@@ -5570,7 +5789,7 @@
               </a:rPr>
               <a:t>验收记录</a:t>
             </a:r>
-            <a:endParaRPr lang="zh-CN" altLang="en-US" sz="2050">
+            <a:endParaRPr lang="zh-CN" altLang="en-US" sz="900">
               <a:solidFill>
                 <a:srgbClr val="C7D7E8"/>
               </a:solidFill>
@@ -5583,7 +5802,7 @@
       </p:sp>
       <p:sp>
         <p:nvSpPr>
-          <p:cNvPr id="65" name="圆角矩形 64"/>
+          <p:cNvPr id="67" name="圆角矩形 66"/>
           <p:cNvSpPr/>
           <p:nvPr/>
         </p:nvSpPr>
@@ -5600,8 +5819,8 @@
           </a:solidFill>
           <a:ln w="12700">
             <a:solidFill>
-              <a:srgbClr val="FFCB66">
-                <a:alpha val="55000"/>
+              <a:srgbClr val="244666">
+                <a:alpha val="88000"/>
               </a:srgbClr>
             </a:solidFill>
           </a:ln>
@@ -5632,7 +5851,7 @@
       </p:sp>
       <p:sp>
         <p:nvSpPr>
-          <p:cNvPr id="66" name="椭圆 65"/>
+          <p:cNvPr id="68" name="椭圆 67"/>
           <p:cNvSpPr/>
           <p:nvPr/>
         </p:nvSpPr>
@@ -5679,7 +5898,7 @@
       </p:sp>
       <p:sp>
         <p:nvSpPr>
-          <p:cNvPr id="67" name="文本框 66"/>
+          <p:cNvPr id="69" name="文本框 68"/>
           <p:cNvSpPr txBox="1"/>
           <p:nvPr/>
         </p:nvSpPr>
@@ -5694,13 +5913,21 @@
           <a:noFill/>
         </p:spPr>
         <p:txBody>
-          <a:bodyPr wrap="square" lIns="0" tIns="0" rIns="0" rtlCol="0" anchor="t">
-            <a:normAutofit/>
+          <a:bodyPr wrap="square" lIns="0" tIns="0" rIns="0" rtlCol="0" anchor="ctr">
+            <a:noAutofit/>
           </a:bodyPr>
           <a:p>
-            <a:pPr algn="ctr"/>
-            <a:r>
-              <a:rPr lang="en-US" altLang="en-US" sz="835" b="1">
+            <a:pPr indent="0" algn="ctr">
+              <a:spcBef>
+                <a:spcPts val="0"/>
+              </a:spcBef>
+              <a:spcAft>
+                <a:spcPts val="0"/>
+              </a:spcAft>
+              <a:buNone/>
+            </a:pPr>
+            <a:r>
+              <a:rPr lang="en-US" altLang="en-US" sz="750" b="1">
                 <a:solidFill>
                   <a:srgbClr val="071426"/>
                 </a:solidFill>
@@ -5709,7 +5936,7 @@
               </a:rPr>
               <a:t>02</a:t>
             </a:r>
-            <a:endParaRPr lang="en-US" altLang="en-US" sz="835" b="1">
+            <a:endParaRPr lang="en-US" altLang="en-US" sz="750" b="1">
               <a:solidFill>
                 <a:srgbClr val="071426"/>
               </a:solidFill>
@@ -5721,14 +5948,14 @@
       </p:sp>
       <p:sp>
         <p:nvSpPr>
-          <p:cNvPr id="68" name="圆角矩形 67"/>
+          <p:cNvPr id="70" name="圆角矩形 69"/>
           <p:cNvSpPr/>
           <p:nvPr/>
         </p:nvSpPr>
         <p:spPr>
           <a:xfrm>
             <a:off x="2743200" y="2260600"/>
-            <a:ext cx="1016000" cy="279400"/>
+            <a:ext cx="1016000" cy="304800"/>
           </a:xfrm>
           <a:prstGeom prst="roundRect">
             <a:avLst/>
@@ -5739,7 +5966,7 @@
           <a:ln w="12700">
             <a:solidFill>
               <a:srgbClr val="FFCB66">
-                <a:alpha val="65000"/>
+                <a:alpha val="48000"/>
               </a:srgbClr>
             </a:solidFill>
           </a:ln>
@@ -5770,14 +5997,14 @@
       </p:sp>
       <p:sp>
         <p:nvSpPr>
-          <p:cNvPr id="69" name="文本框 68"/>
+          <p:cNvPr id="71" name="文本框 70"/>
           <p:cNvSpPr txBox="1"/>
           <p:nvPr/>
         </p:nvSpPr>
         <p:spPr>
           <a:xfrm>
-            <a:off x="2806700" y="2324100"/>
-            <a:ext cx="889000" cy="322580"/>
+            <a:off x="2806700" y="2298700"/>
+            <a:ext cx="889000" cy="335280"/>
           </a:xfrm>
           <a:prstGeom prst="rect">
             <a:avLst/>
@@ -5785,13 +6012,21 @@
           <a:noFill/>
         </p:spPr>
         <p:txBody>
-          <a:bodyPr wrap="square" lIns="0" tIns="0" rIns="0" rtlCol="0" anchor="t">
-            <a:normAutofit/>
+          <a:bodyPr wrap="square" lIns="12700" tIns="12700" rIns="12700" rtlCol="0" anchor="ctr">
+            <a:noAutofit/>
           </a:bodyPr>
           <a:p>
-            <a:pPr algn="ctr"/>
-            <a:r>
-              <a:rPr lang="zh-CN" altLang="en-US" sz="910" b="1">
+            <a:pPr indent="0" algn="ctr">
+              <a:spcBef>
+                <a:spcPts val="0"/>
+              </a:spcBef>
+              <a:spcAft>
+                <a:spcPts val="0"/>
+              </a:spcAft>
+              <a:buNone/>
+            </a:pPr>
+            <a:r>
+              <a:rPr lang="zh-CN" altLang="en-US" sz="860" b="1">
                 <a:solidFill>
                   <a:srgbClr val="FFCB66"/>
                 </a:solidFill>
@@ -5800,7 +6035,7 @@
               </a:rPr>
               <a:t>核心买方</a:t>
             </a:r>
-            <a:endParaRPr lang="zh-CN" altLang="en-US" sz="910" b="1">
+            <a:endParaRPr lang="zh-CN" altLang="en-US" sz="860" b="1">
               <a:solidFill>
                 <a:srgbClr val="FFCB66"/>
               </a:solidFill>
@@ -5812,14 +6047,14 @@
       </p:sp>
       <p:sp>
         <p:nvSpPr>
-          <p:cNvPr id="70" name="文本框 69"/>
+          <p:cNvPr id="72" name="文本框 71"/>
           <p:cNvSpPr txBox="1"/>
           <p:nvPr/>
         </p:nvSpPr>
         <p:spPr>
           <a:xfrm>
-            <a:off x="2654300" y="2755900"/>
-            <a:ext cx="1193800" cy="322580"/>
+            <a:off x="2641600" y="2717800"/>
+            <a:ext cx="1219200" cy="347980"/>
           </a:xfrm>
           <a:prstGeom prst="rect">
             <a:avLst/>
@@ -5827,13 +6062,21 @@
           <a:noFill/>
         </p:spPr>
         <p:txBody>
-          <a:bodyPr wrap="square" lIns="0" tIns="0" rIns="0" rtlCol="0" anchor="t">
-            <a:normAutofit/>
+          <a:bodyPr wrap="square" lIns="25400" tIns="25400" rIns="25400" rtlCol="0" anchor="ctr">
+            <a:noAutofit/>
           </a:bodyPr>
           <a:p>
-            <a:pPr algn="ctr"/>
-            <a:r>
-              <a:rPr lang="zh-CN" altLang="en-US" sz="1155" b="1">
+            <a:pPr indent="0" algn="ctr">
+              <a:spcBef>
+                <a:spcPts val="0"/>
+              </a:spcBef>
+              <a:spcAft>
+                <a:spcPts val="0"/>
+              </a:spcAft>
+              <a:buNone/>
+            </a:pPr>
+            <a:r>
+              <a:rPr lang="zh-CN" altLang="en-US" sz="1250" b="1">
                 <a:solidFill>
                   <a:srgbClr val="F4F8FC"/>
                 </a:solidFill>
@@ -5844,7 +6087,7 @@
               <a:t>确权</a:t>
             </a:r>
             <a:r>
-              <a:rPr lang="en-US" altLang="zh-CN" sz="1155" b="1">
+              <a:rPr lang="en-US" altLang="zh-CN" sz="1250" b="1">
                 <a:solidFill>
                   <a:srgbClr val="F4F8FC"/>
                 </a:solidFill>
@@ -5855,7 +6098,7 @@
               <a:t> + </a:t>
             </a:r>
             <a:r>
-              <a:rPr lang="zh-CN" altLang="en-US" sz="1155" b="1">
+              <a:rPr lang="zh-CN" altLang="en-US" sz="1250" b="1">
                 <a:solidFill>
                   <a:srgbClr val="F4F8FC"/>
                 </a:solidFill>
@@ -5865,7 +6108,7 @@
               </a:rPr>
               <a:t>双签</a:t>
             </a:r>
-            <a:endParaRPr lang="zh-CN" altLang="en-US" sz="1155" b="1">
+            <a:endParaRPr lang="zh-CN" altLang="en-US" sz="1250" b="1">
               <a:solidFill>
                 <a:srgbClr val="F4F8FC"/>
               </a:solidFill>
@@ -5878,7 +6121,7 @@
       </p:sp>
       <p:cxnSp>
         <p:nvCxnSpPr>
-          <p:cNvPr id="71" name="直接连接符 70"/>
+          <p:cNvPr id="73" name="直接连接符 72"/>
           <p:cNvCxnSpPr/>
           <p:nvPr/>
         </p:nvCxnSpPr>
@@ -5913,14 +6156,14 @@
       </p:cxnSp>
       <p:sp>
         <p:nvSpPr>
-          <p:cNvPr id="72" name="文本框 71"/>
+          <p:cNvPr id="74" name="文本框 73"/>
           <p:cNvSpPr txBox="1"/>
           <p:nvPr/>
         </p:nvSpPr>
         <p:spPr>
           <a:xfrm>
-            <a:off x="2641600" y="3352800"/>
-            <a:ext cx="1219200" cy="322580"/>
+            <a:off x="2641600" y="3340100"/>
+            <a:ext cx="1219200" cy="347980"/>
           </a:xfrm>
           <a:prstGeom prst="rect">
             <a:avLst/>
@@ -5928,13 +6171,21 @@
           <a:noFill/>
         </p:spPr>
         <p:txBody>
-          <a:bodyPr wrap="square" lIns="0" tIns="0" rIns="0" rtlCol="0" anchor="t">
+          <a:bodyPr wrap="square" lIns="25400" tIns="25400" rIns="25400" rtlCol="0" anchor="t">
             <a:noAutofit/>
           </a:bodyPr>
           <a:p>
-            <a:pPr algn="ctr"/>
-            <a:r>
-              <a:rPr lang="en-US" altLang="en-US" sz="800">
+            <a:pPr indent="0" algn="ctr">
+              <a:spcBef>
+                <a:spcPts val="0"/>
+              </a:spcBef>
+              <a:spcAft>
+                <a:spcPts val="0"/>
+              </a:spcAft>
+              <a:buNone/>
+            </a:pPr>
+            <a:r>
+              <a:rPr lang="en-US" altLang="en-US" sz="900">
                 <a:solidFill>
                   <a:srgbClr val="C7D7E8"/>
                 </a:solidFill>
@@ -5946,7 +6197,7 @@
 + EIP-3009 </a:t>
             </a:r>
             <a:r>
-              <a:rPr lang="zh-CN" altLang="en-US" sz="800">
+              <a:rPr lang="zh-CN" altLang="en-US" sz="900">
                 <a:solidFill>
                   <a:srgbClr val="C7D7E8"/>
                 </a:solidFill>
@@ -5957,7 +6208,7 @@
               <a:t>授权</a:t>
             </a:r>
             <a:r>
-              <a:rPr lang="en-US" altLang="zh-CN" sz="800">
+              <a:rPr lang="en-US" altLang="zh-CN" sz="900">
                 <a:solidFill>
                   <a:srgbClr val="C7D7E8"/>
                 </a:solidFill>
@@ -5969,7 +6220,7 @@
 </a:t>
             </a:r>
             <a:r>
-              <a:rPr lang="zh-CN" altLang="en-US" sz="800">
+              <a:rPr lang="zh-CN" altLang="en-US" sz="900">
                 <a:solidFill>
                   <a:srgbClr val="C7D7E8"/>
                 </a:solidFill>
@@ -5979,7 +6230,7 @@
               </a:rPr>
               <a:t>确权时不锁款</a:t>
             </a:r>
-            <a:endParaRPr lang="zh-CN" altLang="en-US" sz="800">
+            <a:endParaRPr lang="zh-CN" altLang="en-US" sz="900">
               <a:solidFill>
                 <a:srgbClr val="C7D7E8"/>
               </a:solidFill>
@@ -5992,7 +6243,7 @@
       </p:sp>
       <p:sp>
         <p:nvSpPr>
-          <p:cNvPr id="73" name="圆角矩形 72"/>
+          <p:cNvPr id="75" name="圆角矩形 74"/>
           <p:cNvSpPr/>
           <p:nvPr/>
         </p:nvSpPr>
@@ -6009,8 +6260,8 @@
           </a:solidFill>
           <a:ln w="12700">
             <a:solidFill>
-              <a:srgbClr val="3B82F6">
-                <a:alpha val="55000"/>
+              <a:srgbClr val="244666">
+                <a:alpha val="88000"/>
               </a:srgbClr>
             </a:solidFill>
           </a:ln>
@@ -6041,7 +6292,7 @@
       </p:sp>
       <p:sp>
         <p:nvSpPr>
-          <p:cNvPr id="74" name="椭圆 73"/>
+          <p:cNvPr id="76" name="椭圆 75"/>
           <p:cNvSpPr/>
           <p:nvPr/>
         </p:nvSpPr>
@@ -6088,7 +6339,7 @@
       </p:sp>
       <p:sp>
         <p:nvSpPr>
-          <p:cNvPr id="75" name="文本框 74"/>
+          <p:cNvPr id="77" name="文本框 76"/>
           <p:cNvSpPr txBox="1"/>
           <p:nvPr/>
         </p:nvSpPr>
@@ -6103,13 +6354,21 @@
           <a:noFill/>
         </p:spPr>
         <p:txBody>
-          <a:bodyPr wrap="square" lIns="0" tIns="0" rIns="0" rtlCol="0" anchor="t">
-            <a:normAutofit/>
+          <a:bodyPr wrap="square" lIns="0" tIns="0" rIns="0" rtlCol="0" anchor="ctr">
+            <a:noAutofit/>
           </a:bodyPr>
           <a:p>
-            <a:pPr algn="ctr"/>
-            <a:r>
-              <a:rPr lang="en-US" altLang="en-US" sz="835" b="1">
+            <a:pPr indent="0" algn="ctr">
+              <a:spcBef>
+                <a:spcPts val="0"/>
+              </a:spcBef>
+              <a:spcAft>
+                <a:spcPts val="0"/>
+              </a:spcAft>
+              <a:buNone/>
+            </a:pPr>
+            <a:r>
+              <a:rPr lang="en-US" altLang="en-US" sz="750" b="1">
                 <a:solidFill>
                   <a:srgbClr val="071426"/>
                 </a:solidFill>
@@ -6118,7 +6377,7 @@
               </a:rPr>
               <a:t>03</a:t>
             </a:r>
-            <a:endParaRPr lang="en-US" altLang="en-US" sz="835" b="1">
+            <a:endParaRPr lang="en-US" altLang="en-US" sz="750" b="1">
               <a:solidFill>
                 <a:srgbClr val="071426"/>
               </a:solidFill>
@@ -6130,14 +6389,14 @@
       </p:sp>
       <p:sp>
         <p:nvSpPr>
-          <p:cNvPr id="76" name="圆角矩形 75"/>
+          <p:cNvPr id="78" name="圆角矩形 77"/>
           <p:cNvSpPr/>
           <p:nvPr/>
         </p:nvSpPr>
         <p:spPr>
           <a:xfrm>
             <a:off x="4673600" y="2260600"/>
-            <a:ext cx="1016000" cy="279400"/>
+            <a:ext cx="1016000" cy="304800"/>
           </a:xfrm>
           <a:prstGeom prst="roundRect">
             <a:avLst/>
@@ -6148,7 +6407,7 @@
           <a:ln w="12700">
             <a:solidFill>
               <a:srgbClr val="3B82F6">
-                <a:alpha val="65000"/>
+                <a:alpha val="48000"/>
               </a:srgbClr>
             </a:solidFill>
           </a:ln>
@@ -6179,14 +6438,14 @@
       </p:sp>
       <p:sp>
         <p:nvSpPr>
-          <p:cNvPr id="77" name="文本框 76"/>
+          <p:cNvPr id="79" name="文本框 78"/>
           <p:cNvSpPr txBox="1"/>
           <p:nvPr/>
         </p:nvSpPr>
         <p:spPr>
           <a:xfrm>
-            <a:off x="4737100" y="2324100"/>
-            <a:ext cx="889000" cy="322580"/>
+            <a:off x="4737100" y="2298700"/>
+            <a:ext cx="889000" cy="335280"/>
           </a:xfrm>
           <a:prstGeom prst="rect">
             <a:avLst/>
@@ -6194,13 +6453,21 @@
           <a:noFill/>
         </p:spPr>
         <p:txBody>
-          <a:bodyPr wrap="square" lIns="0" tIns="0" rIns="0" rtlCol="0" anchor="t">
-            <a:normAutofit/>
+          <a:bodyPr wrap="square" lIns="12700" tIns="12700" rIns="12700" rtlCol="0" anchor="ctr">
+            <a:noAutofit/>
           </a:bodyPr>
           <a:p>
-            <a:pPr algn="ctr"/>
-            <a:r>
-              <a:rPr lang="zh-CN" altLang="en-US" sz="820" b="1">
+            <a:pPr indent="0" algn="ctr">
+              <a:spcBef>
+                <a:spcPts val="0"/>
+              </a:spcBef>
+              <a:spcAft>
+                <a:spcPts val="0"/>
+              </a:spcAft>
+              <a:buNone/>
+            </a:pPr>
+            <a:r>
+              <a:rPr lang="zh-CN" altLang="en-US" sz="860" b="1">
                 <a:solidFill>
                   <a:srgbClr val="3B82F6"/>
                 </a:solidFill>
@@ -6209,7 +6476,7 @@
               </a:rPr>
               <a:t>平台</a:t>
             </a:r>
-            <a:endParaRPr lang="zh-CN" altLang="en-US" sz="820" b="1">
+            <a:endParaRPr lang="zh-CN" altLang="en-US" sz="860" b="1">
               <a:solidFill>
                 <a:srgbClr val="3B82F6"/>
               </a:solidFill>
@@ -6221,14 +6488,14 @@
       </p:sp>
       <p:sp>
         <p:nvSpPr>
-          <p:cNvPr id="78" name="文本框 77"/>
+          <p:cNvPr id="80" name="文本框 79"/>
           <p:cNvSpPr txBox="1"/>
           <p:nvPr/>
         </p:nvSpPr>
         <p:spPr>
           <a:xfrm>
-            <a:off x="4584700" y="2755900"/>
-            <a:ext cx="1193800" cy="322580"/>
+            <a:off x="4572000" y="2717800"/>
+            <a:ext cx="1219200" cy="347980"/>
           </a:xfrm>
           <a:prstGeom prst="rect">
             <a:avLst/>
@@ -6236,13 +6503,21 @@
           <a:noFill/>
         </p:spPr>
         <p:txBody>
-          <a:bodyPr wrap="square" lIns="0" tIns="0" rIns="0" rtlCol="0" anchor="t">
-            <a:normAutofit/>
+          <a:bodyPr wrap="square" lIns="25400" tIns="25400" rIns="25400" rtlCol="0" anchor="ctr">
+            <a:noAutofit/>
           </a:bodyPr>
           <a:p>
-            <a:pPr algn="ctr"/>
-            <a:r>
-              <a:rPr lang="zh-CN" altLang="en-US" sz="1300" b="1">
+            <a:pPr indent="0" algn="ctr">
+              <a:spcBef>
+                <a:spcPts val="0"/>
+              </a:spcBef>
+              <a:spcAft>
+                <a:spcPts val="0"/>
+              </a:spcAft>
+              <a:buNone/>
+            </a:pPr>
+            <a:r>
+              <a:rPr lang="zh-CN" altLang="en-US" sz="1250" b="1">
                 <a:solidFill>
                   <a:srgbClr val="F4F8FC"/>
                 </a:solidFill>
@@ -6251,7 +6526,7 @@
               </a:rPr>
               <a:t>生成数字凭证</a:t>
             </a:r>
-            <a:endParaRPr lang="zh-CN" altLang="en-US" sz="1300" b="1">
+            <a:endParaRPr lang="zh-CN" altLang="en-US" sz="1250" b="1">
               <a:solidFill>
                 <a:srgbClr val="F4F8FC"/>
               </a:solidFill>
@@ -6263,7 +6538,7 @@
       </p:sp>
       <p:cxnSp>
         <p:nvCxnSpPr>
-          <p:cNvPr id="79" name="直接连接符 78"/>
+          <p:cNvPr id="81" name="直接连接符 80"/>
           <p:cNvCxnSpPr/>
           <p:nvPr/>
         </p:nvCxnSpPr>
@@ -6298,14 +6573,14 @@
       </p:cxnSp>
       <p:sp>
         <p:nvSpPr>
-          <p:cNvPr id="80" name="文本框 79"/>
+          <p:cNvPr id="82" name="文本框 81"/>
           <p:cNvSpPr txBox="1"/>
           <p:nvPr/>
         </p:nvSpPr>
         <p:spPr>
           <a:xfrm>
-            <a:off x="4572000" y="3352800"/>
-            <a:ext cx="1219200" cy="322580"/>
+            <a:off x="4572000" y="3340100"/>
+            <a:ext cx="1219200" cy="347980"/>
           </a:xfrm>
           <a:prstGeom prst="rect">
             <a:avLst/>
@@ -6313,13 +6588,21 @@
           <a:noFill/>
         </p:spPr>
         <p:txBody>
-          <a:bodyPr wrap="square" lIns="0" tIns="0" rIns="0" rtlCol="0" anchor="t">
-            <a:normAutofit fontScale="40000"/>
+          <a:bodyPr wrap="square" lIns="25400" tIns="25400" rIns="25400" rtlCol="0" anchor="t">
+            <a:noAutofit/>
           </a:bodyPr>
           <a:p>
-            <a:pPr algn="ctr"/>
-            <a:r>
-              <a:rPr lang="en-US" altLang="en-US" sz="2050">
+            <a:pPr indent="0" algn="ctr">
+              <a:spcBef>
+                <a:spcPts val="0"/>
+              </a:spcBef>
+              <a:spcAft>
+                <a:spcPts val="0"/>
+              </a:spcAft>
+              <a:buNone/>
+            </a:pPr>
+            <a:r>
+              <a:rPr lang="en-US" altLang="en-US" sz="900">
                 <a:solidFill>
                   <a:srgbClr val="C7D7E8"/>
                 </a:solidFill>
@@ -6331,7 +6614,7 @@
 ACTIVE · </a:t>
             </a:r>
             <a:r>
-              <a:rPr lang="zh-CN" altLang="en-US" sz="2050">
+              <a:rPr lang="zh-CN" altLang="en-US" sz="900">
                 <a:solidFill>
                   <a:srgbClr val="C7D7E8"/>
                 </a:solidFill>
@@ -6341,7 +6624,7 @@
               </a:rPr>
               <a:t>可融资</a:t>
             </a:r>
-            <a:endParaRPr lang="zh-CN" altLang="en-US" sz="2050">
+            <a:endParaRPr lang="zh-CN" altLang="en-US" sz="900">
               <a:solidFill>
                 <a:srgbClr val="C7D7E8"/>
               </a:solidFill>
@@ -6354,7 +6637,7 @@
       </p:sp>
       <p:sp>
         <p:nvSpPr>
-          <p:cNvPr id="81" name="圆角矩形 80"/>
+          <p:cNvPr id="83" name="圆角矩形 82"/>
           <p:cNvSpPr/>
           <p:nvPr/>
         </p:nvSpPr>
@@ -6371,8 +6654,8 @@
           </a:solidFill>
           <a:ln w="12700">
             <a:solidFill>
-              <a:srgbClr val="45F0C5">
-                <a:alpha val="55000"/>
+              <a:srgbClr val="244666">
+                <a:alpha val="88000"/>
               </a:srgbClr>
             </a:solidFill>
           </a:ln>
@@ -6403,7 +6686,7 @@
       </p:sp>
       <p:sp>
         <p:nvSpPr>
-          <p:cNvPr id="82" name="椭圆 81"/>
+          <p:cNvPr id="84" name="椭圆 83"/>
           <p:cNvSpPr/>
           <p:nvPr/>
         </p:nvSpPr>
@@ -6450,7 +6733,7 @@
       </p:sp>
       <p:sp>
         <p:nvSpPr>
-          <p:cNvPr id="83" name="文本框 82"/>
+          <p:cNvPr id="85" name="文本框 84"/>
           <p:cNvSpPr txBox="1"/>
           <p:nvPr/>
         </p:nvSpPr>
@@ -6465,13 +6748,21 @@
           <a:noFill/>
         </p:spPr>
         <p:txBody>
-          <a:bodyPr wrap="square" lIns="0" tIns="0" rIns="0" rtlCol="0" anchor="t">
-            <a:normAutofit/>
+          <a:bodyPr wrap="square" lIns="0" tIns="0" rIns="0" rtlCol="0" anchor="ctr">
+            <a:noAutofit/>
           </a:bodyPr>
           <a:p>
-            <a:pPr algn="ctr"/>
-            <a:r>
-              <a:rPr lang="en-US" altLang="en-US" sz="835" b="1">
+            <a:pPr indent="0" algn="ctr">
+              <a:spcBef>
+                <a:spcPts val="0"/>
+              </a:spcBef>
+              <a:spcAft>
+                <a:spcPts val="0"/>
+              </a:spcAft>
+              <a:buNone/>
+            </a:pPr>
+            <a:r>
+              <a:rPr lang="en-US" altLang="en-US" sz="750" b="1">
                 <a:solidFill>
                   <a:srgbClr val="071426"/>
                 </a:solidFill>
@@ -6480,7 +6771,7 @@
               </a:rPr>
               <a:t>04</a:t>
             </a:r>
-            <a:endParaRPr lang="en-US" altLang="en-US" sz="835" b="1">
+            <a:endParaRPr lang="en-US" altLang="en-US" sz="750" b="1">
               <a:solidFill>
                 <a:srgbClr val="071426"/>
               </a:solidFill>
@@ -6492,14 +6783,14 @@
       </p:sp>
       <p:sp>
         <p:nvSpPr>
-          <p:cNvPr id="84" name="圆角矩形 83"/>
+          <p:cNvPr id="86" name="圆角矩形 85"/>
           <p:cNvSpPr/>
           <p:nvPr/>
         </p:nvSpPr>
         <p:spPr>
           <a:xfrm>
             <a:off x="6604000" y="2260600"/>
-            <a:ext cx="1016000" cy="279400"/>
+            <a:ext cx="1016000" cy="304800"/>
           </a:xfrm>
           <a:prstGeom prst="roundRect">
             <a:avLst/>
@@ -6510,7 +6801,7 @@
           <a:ln w="12700">
             <a:solidFill>
               <a:srgbClr val="45F0C5">
-                <a:alpha val="65000"/>
+                <a:alpha val="48000"/>
               </a:srgbClr>
             </a:solidFill>
           </a:ln>
@@ -6541,14 +6832,14 @@
       </p:sp>
       <p:sp>
         <p:nvSpPr>
-          <p:cNvPr id="85" name="文本框 84"/>
+          <p:cNvPr id="87" name="文本框 86"/>
           <p:cNvSpPr txBox="1"/>
           <p:nvPr/>
         </p:nvSpPr>
         <p:spPr>
           <a:xfrm>
-            <a:off x="6667500" y="2324100"/>
-            <a:ext cx="889000" cy="322580"/>
+            <a:off x="6667500" y="2298700"/>
+            <a:ext cx="889000" cy="335280"/>
           </a:xfrm>
           <a:prstGeom prst="rect">
             <a:avLst/>
@@ -6556,13 +6847,21 @@
           <a:noFill/>
         </p:spPr>
         <p:txBody>
-          <a:bodyPr wrap="square" lIns="0" tIns="0" rIns="0" rtlCol="0" anchor="t">
-            <a:normAutofit/>
+          <a:bodyPr wrap="square" lIns="12700" tIns="12700" rIns="12700" rtlCol="0" anchor="ctr">
+            <a:noAutofit/>
           </a:bodyPr>
           <a:p>
-            <a:pPr algn="ctr"/>
-            <a:r>
-              <a:rPr lang="zh-CN" altLang="en-US" sz="820" b="1">
+            <a:pPr indent="0" algn="ctr">
+              <a:spcBef>
+                <a:spcPts val="0"/>
+              </a:spcBef>
+              <a:spcAft>
+                <a:spcPts val="0"/>
+              </a:spcAft>
+              <a:buNone/>
+            </a:pPr>
+            <a:r>
+              <a:rPr lang="zh-CN" altLang="en-US" sz="860" b="1">
                 <a:solidFill>
                   <a:srgbClr val="45F0C5"/>
                 </a:solidFill>
@@ -6571,7 +6870,7 @@
               </a:rPr>
               <a:t>资金方</a:t>
             </a:r>
-            <a:endParaRPr lang="zh-CN" altLang="en-US" sz="820" b="1">
+            <a:endParaRPr lang="zh-CN" altLang="en-US" sz="860" b="1">
               <a:solidFill>
                 <a:srgbClr val="45F0C5"/>
               </a:solidFill>
@@ -6583,14 +6882,14 @@
       </p:sp>
       <p:sp>
         <p:nvSpPr>
-          <p:cNvPr id="86" name="文本框 85"/>
+          <p:cNvPr id="88" name="文本框 87"/>
           <p:cNvSpPr txBox="1"/>
           <p:nvPr/>
         </p:nvSpPr>
         <p:spPr>
           <a:xfrm>
-            <a:off x="6515100" y="2755900"/>
-            <a:ext cx="1193800" cy="322580"/>
+            <a:off x="6502400" y="2717800"/>
+            <a:ext cx="1219200" cy="347980"/>
           </a:xfrm>
           <a:prstGeom prst="rect">
             <a:avLst/>
@@ -6598,13 +6897,21 @@
           <a:noFill/>
         </p:spPr>
         <p:txBody>
-          <a:bodyPr wrap="square" lIns="0" tIns="0" rIns="0" rtlCol="0" anchor="t">
-            <a:normAutofit/>
+          <a:bodyPr wrap="square" lIns="25400" tIns="25400" rIns="25400" rtlCol="0" anchor="ctr">
+            <a:noAutofit/>
           </a:bodyPr>
           <a:p>
-            <a:pPr algn="ctr"/>
-            <a:r>
-              <a:rPr lang="zh-CN" altLang="en-US" sz="1300" b="1">
+            <a:pPr indent="0" algn="ctr">
+              <a:spcBef>
+                <a:spcPts val="0"/>
+              </a:spcBef>
+              <a:spcAft>
+                <a:spcPts val="0"/>
+              </a:spcAft>
+              <a:buNone/>
+            </a:pPr>
+            <a:r>
+              <a:rPr lang="zh-CN" altLang="en-US" sz="1250" b="1">
                 <a:solidFill>
                   <a:srgbClr val="F4F8FC"/>
                 </a:solidFill>
@@ -6613,7 +6920,7 @@
               </a:rPr>
               <a:t>提交融资报价</a:t>
             </a:r>
-            <a:endParaRPr lang="zh-CN" altLang="en-US" sz="1300" b="1">
+            <a:endParaRPr lang="zh-CN" altLang="en-US" sz="1250" b="1">
               <a:solidFill>
                 <a:srgbClr val="F4F8FC"/>
               </a:solidFill>
@@ -6625,7 +6932,7 @@
       </p:sp>
       <p:cxnSp>
         <p:nvCxnSpPr>
-          <p:cNvPr id="87" name="直接连接符 86"/>
+          <p:cNvPr id="89" name="直接连接符 88"/>
           <p:cNvCxnSpPr/>
           <p:nvPr/>
         </p:nvCxnSpPr>
@@ -6660,14 +6967,14 @@
       </p:cxnSp>
       <p:sp>
         <p:nvSpPr>
-          <p:cNvPr id="88" name="文本框 87"/>
+          <p:cNvPr id="90" name="文本框 89"/>
           <p:cNvSpPr txBox="1"/>
           <p:nvPr/>
         </p:nvSpPr>
         <p:spPr>
           <a:xfrm>
-            <a:off x="6502400" y="3352800"/>
-            <a:ext cx="1219200" cy="322580"/>
+            <a:off x="6502400" y="3340100"/>
+            <a:ext cx="1219200" cy="347980"/>
           </a:xfrm>
           <a:prstGeom prst="rect">
             <a:avLst/>
@@ -6675,13 +6982,21 @@
           <a:noFill/>
         </p:spPr>
         <p:txBody>
-          <a:bodyPr wrap="square" lIns="0" tIns="0" rIns="0" rtlCol="0" anchor="t">
-            <a:normAutofit fontScale="40000"/>
+          <a:bodyPr wrap="square" lIns="25400" tIns="25400" rIns="25400" rtlCol="0" anchor="t">
+            <a:noAutofit/>
           </a:bodyPr>
           <a:p>
-            <a:pPr algn="ctr"/>
-            <a:r>
-              <a:rPr lang="zh-CN" altLang="en-US" sz="2050">
+            <a:pPr indent="0" algn="ctr">
+              <a:spcBef>
+                <a:spcPts val="0"/>
+              </a:spcBef>
+              <a:spcAft>
+                <a:spcPts val="0"/>
+              </a:spcAft>
+              <a:buNone/>
+            </a:pPr>
+            <a:r>
+              <a:rPr lang="zh-CN" altLang="en-US" sz="900">
                 <a:solidFill>
                   <a:srgbClr val="C7D7E8"/>
                 </a:solidFill>
@@ -6692,7 +7007,7 @@
               <a:t>按买方授信</a:t>
             </a:r>
             <a:r>
-              <a:rPr lang="en-US" altLang="zh-CN" sz="2050">
+              <a:rPr lang="en-US" altLang="zh-CN" sz="900">
                 <a:solidFill>
                   <a:srgbClr val="C7D7E8"/>
                 </a:solidFill>
@@ -6704,7 +7019,7 @@
 </a:t>
             </a:r>
             <a:r>
-              <a:rPr lang="zh-CN" altLang="en-US" sz="2050">
+              <a:rPr lang="zh-CN" altLang="en-US" sz="900">
                 <a:solidFill>
                   <a:srgbClr val="C7D7E8"/>
                 </a:solidFill>
@@ -6714,7 +7029,7 @@
               </a:rPr>
               <a:t>无追索报价</a:t>
             </a:r>
-            <a:endParaRPr lang="zh-CN" altLang="en-US" sz="2050">
+            <a:endParaRPr lang="zh-CN" altLang="en-US" sz="900">
               <a:solidFill>
                 <a:srgbClr val="C7D7E8"/>
               </a:solidFill>
@@ -6727,7 +7042,7 @@
       </p:sp>
       <p:sp>
         <p:nvSpPr>
-          <p:cNvPr id="89" name="圆角矩形 88"/>
+          <p:cNvPr id="91" name="圆角矩形 90"/>
           <p:cNvSpPr/>
           <p:nvPr/>
         </p:nvSpPr>
@@ -6744,8 +7059,8 @@
           </a:solidFill>
           <a:ln w="12700">
             <a:solidFill>
-              <a:srgbClr val="24D5FF">
-                <a:alpha val="55000"/>
+              <a:srgbClr val="244666">
+                <a:alpha val="88000"/>
               </a:srgbClr>
             </a:solidFill>
           </a:ln>
@@ -6776,7 +7091,7 @@
       </p:sp>
       <p:sp>
         <p:nvSpPr>
-          <p:cNvPr id="90" name="椭圆 89"/>
+          <p:cNvPr id="92" name="椭圆 91"/>
           <p:cNvSpPr/>
           <p:nvPr/>
         </p:nvSpPr>
@@ -6823,7 +7138,7 @@
       </p:sp>
       <p:sp>
         <p:nvSpPr>
-          <p:cNvPr id="91" name="文本框 90"/>
+          <p:cNvPr id="93" name="文本框 92"/>
           <p:cNvSpPr txBox="1"/>
           <p:nvPr/>
         </p:nvSpPr>
@@ -6838,13 +7153,21 @@
           <a:noFill/>
         </p:spPr>
         <p:txBody>
-          <a:bodyPr wrap="square" lIns="0" tIns="0" rIns="0" rtlCol="0" anchor="t">
-            <a:normAutofit/>
+          <a:bodyPr wrap="square" lIns="0" tIns="0" rIns="0" rtlCol="0" anchor="ctr">
+            <a:noAutofit/>
           </a:bodyPr>
           <a:p>
-            <a:pPr algn="ctr"/>
-            <a:r>
-              <a:rPr lang="en-US" altLang="en-US" sz="835" b="1">
+            <a:pPr indent="0" algn="ctr">
+              <a:spcBef>
+                <a:spcPts val="0"/>
+              </a:spcBef>
+              <a:spcAft>
+                <a:spcPts val="0"/>
+              </a:spcAft>
+              <a:buNone/>
+            </a:pPr>
+            <a:r>
+              <a:rPr lang="en-US" altLang="en-US" sz="750" b="1">
                 <a:solidFill>
                   <a:srgbClr val="071426"/>
                 </a:solidFill>
@@ -6853,7 +7176,7 @@
               </a:rPr>
               <a:t>05</a:t>
             </a:r>
-            <a:endParaRPr lang="en-US" altLang="en-US" sz="835" b="1">
+            <a:endParaRPr lang="en-US" altLang="en-US" sz="750" b="1">
               <a:solidFill>
                 <a:srgbClr val="071426"/>
               </a:solidFill>
@@ -6865,14 +7188,14 @@
       </p:sp>
       <p:sp>
         <p:nvSpPr>
-          <p:cNvPr id="92" name="圆角矩形 91"/>
+          <p:cNvPr id="94" name="圆角矩形 93"/>
           <p:cNvSpPr/>
           <p:nvPr/>
         </p:nvSpPr>
         <p:spPr>
           <a:xfrm>
             <a:off x="8534400" y="2260600"/>
-            <a:ext cx="1016000" cy="279400"/>
+            <a:ext cx="1016000" cy="304800"/>
           </a:xfrm>
           <a:prstGeom prst="roundRect">
             <a:avLst/>
@@ -6883,7 +7206,7 @@
           <a:ln w="12700">
             <a:solidFill>
               <a:srgbClr val="24D5FF">
-                <a:alpha val="65000"/>
+                <a:alpha val="48000"/>
               </a:srgbClr>
             </a:solidFill>
           </a:ln>
@@ -6914,14 +7237,14 @@
       </p:sp>
       <p:sp>
         <p:nvSpPr>
-          <p:cNvPr id="93" name="文本框 92"/>
+          <p:cNvPr id="95" name="文本框 94"/>
           <p:cNvSpPr txBox="1"/>
           <p:nvPr/>
         </p:nvSpPr>
         <p:spPr>
           <a:xfrm>
-            <a:off x="8597900" y="2324100"/>
-            <a:ext cx="889000" cy="322580"/>
+            <a:off x="8597900" y="2298700"/>
+            <a:ext cx="889000" cy="335280"/>
           </a:xfrm>
           <a:prstGeom prst="rect">
             <a:avLst/>
@@ -6929,13 +7252,21 @@
           <a:noFill/>
         </p:spPr>
         <p:txBody>
-          <a:bodyPr wrap="square" lIns="0" tIns="0" rIns="0" rtlCol="0" anchor="t">
-            <a:normAutofit/>
+          <a:bodyPr wrap="square" lIns="12700" tIns="12700" rIns="12700" rtlCol="0" anchor="ctr">
+            <a:noAutofit/>
           </a:bodyPr>
           <a:p>
-            <a:pPr algn="ctr"/>
-            <a:r>
-              <a:rPr lang="zh-CN" altLang="en-US" sz="820" b="1">
+            <a:pPr indent="0" algn="ctr">
+              <a:spcBef>
+                <a:spcPts val="0"/>
+              </a:spcBef>
+              <a:spcAft>
+                <a:spcPts val="0"/>
+              </a:spcAft>
+              <a:buNone/>
+            </a:pPr>
+            <a:r>
+              <a:rPr lang="zh-CN" altLang="en-US" sz="860" b="1">
                 <a:solidFill>
                   <a:srgbClr val="24D5FF"/>
                 </a:solidFill>
@@ -6944,7 +7275,7 @@
               </a:rPr>
               <a:t>供应商</a:t>
             </a:r>
-            <a:endParaRPr lang="zh-CN" altLang="en-US" sz="820" b="1">
+            <a:endParaRPr lang="zh-CN" altLang="en-US" sz="860" b="1">
               <a:solidFill>
                 <a:srgbClr val="24D5FF"/>
               </a:solidFill>
@@ -6956,14 +7287,14 @@
       </p:sp>
       <p:sp>
         <p:nvSpPr>
-          <p:cNvPr id="94" name="文本框 93"/>
+          <p:cNvPr id="96" name="文本框 95"/>
           <p:cNvSpPr txBox="1"/>
           <p:nvPr/>
         </p:nvSpPr>
         <p:spPr>
           <a:xfrm>
-            <a:off x="8445500" y="2755900"/>
-            <a:ext cx="1193800" cy="322580"/>
+            <a:off x="8432800" y="2717800"/>
+            <a:ext cx="1219200" cy="347980"/>
           </a:xfrm>
           <a:prstGeom prst="rect">
             <a:avLst/>
@@ -6971,13 +7302,21 @@
           <a:noFill/>
         </p:spPr>
         <p:txBody>
-          <a:bodyPr wrap="square" lIns="0" tIns="0" rIns="0" rtlCol="0" anchor="t">
-            <a:normAutofit/>
+          <a:bodyPr wrap="square" lIns="25400" tIns="25400" rIns="25400" rtlCol="0" anchor="ctr">
+            <a:noAutofit/>
           </a:bodyPr>
           <a:p>
-            <a:pPr algn="ctr"/>
-            <a:r>
-              <a:rPr lang="zh-CN" altLang="en-US" sz="1155" b="1">
+            <a:pPr indent="0" algn="ctr">
+              <a:spcBef>
+                <a:spcPts val="0"/>
+              </a:spcBef>
+              <a:spcAft>
+                <a:spcPts val="0"/>
+              </a:spcAft>
+              <a:buNone/>
+            </a:pPr>
+            <a:r>
+              <a:rPr lang="zh-CN" altLang="en-US" sz="1250" b="1">
                 <a:solidFill>
                   <a:srgbClr val="F4F8FC"/>
                 </a:solidFill>
@@ -6986,7 +7325,7 @@
               </a:rPr>
               <a:t>接受并放款</a:t>
             </a:r>
-            <a:endParaRPr lang="zh-CN" altLang="en-US" sz="1155" b="1">
+            <a:endParaRPr lang="zh-CN" altLang="en-US" sz="1250" b="1">
               <a:solidFill>
                 <a:srgbClr val="F4F8FC"/>
               </a:solidFill>
@@ -6998,7 +7337,7 @@
       </p:sp>
       <p:cxnSp>
         <p:nvCxnSpPr>
-          <p:cNvPr id="95" name="直接连接符 94"/>
+          <p:cNvPr id="97" name="直接连接符 96"/>
           <p:cNvCxnSpPr/>
           <p:nvPr/>
         </p:nvCxnSpPr>
@@ -7033,14 +7372,14 @@
       </p:cxnSp>
       <p:sp>
         <p:nvSpPr>
-          <p:cNvPr id="96" name="文本框 95"/>
+          <p:cNvPr id="98" name="文本框 97"/>
           <p:cNvSpPr txBox="1"/>
           <p:nvPr/>
         </p:nvSpPr>
         <p:spPr>
           <a:xfrm>
-            <a:off x="8432800" y="3352800"/>
-            <a:ext cx="1219200" cy="322580"/>
+            <a:off x="8432800" y="3340100"/>
+            <a:ext cx="1219200" cy="347980"/>
           </a:xfrm>
           <a:prstGeom prst="rect">
             <a:avLst/>
@@ -7048,13 +7387,21 @@
           <a:noFill/>
         </p:spPr>
         <p:txBody>
-          <a:bodyPr wrap="square" lIns="0" tIns="0" rIns="0" rtlCol="0" anchor="t">
-            <a:normAutofit fontScale="40000"/>
+          <a:bodyPr wrap="square" lIns="25400" tIns="25400" rIns="25400" rtlCol="0" anchor="t">
+            <a:noAutofit/>
           </a:bodyPr>
           <a:p>
-            <a:pPr algn="ctr"/>
-            <a:r>
-              <a:rPr lang="en-US" altLang="en-US" sz="2050">
+            <a:pPr indent="0" algn="ctr">
+              <a:spcBef>
+                <a:spcPts val="0"/>
+              </a:spcBef>
+              <a:spcAft>
+                <a:spcPts val="0"/>
+              </a:spcAft>
+              <a:buNone/>
+            </a:pPr>
+            <a:r>
+              <a:rPr lang="en-US" altLang="en-US" sz="900">
                 <a:solidFill>
                   <a:srgbClr val="C7D7E8"/>
                 </a:solidFill>
@@ -7066,7 +7413,7 @@
 </a:t>
             </a:r>
             <a:r>
-              <a:rPr lang="zh-CN" altLang="en-US" sz="2050">
+              <a:rPr lang="zh-CN" altLang="en-US" sz="900">
                 <a:solidFill>
                   <a:srgbClr val="C7D7E8"/>
                 </a:solidFill>
@@ -7077,7 +7424,7 @@
               <a:t>原子放款</a:t>
             </a:r>
             <a:r>
-              <a:rPr lang="en-US" altLang="zh-CN" sz="2050">
+              <a:rPr lang="en-US" altLang="zh-CN" sz="900">
                 <a:solidFill>
                   <a:srgbClr val="C7D7E8"/>
                 </a:solidFill>
@@ -7088,7 +7435,7 @@
               <a:t> · </a:t>
             </a:r>
             <a:r>
-              <a:rPr lang="zh-CN" altLang="en-US" sz="2050">
+              <a:rPr lang="zh-CN" altLang="en-US" sz="900">
                 <a:solidFill>
                   <a:srgbClr val="C7D7E8"/>
                 </a:solidFill>
@@ -7098,7 +7445,7 @@
               </a:rPr>
               <a:t>权属更新</a:t>
             </a:r>
-            <a:endParaRPr lang="zh-CN" altLang="en-US" sz="2050">
+            <a:endParaRPr lang="zh-CN" altLang="en-US" sz="900">
               <a:solidFill>
                 <a:srgbClr val="C7D7E8"/>
               </a:solidFill>
@@ -7111,7 +7458,7 @@
       </p:sp>
       <p:sp>
         <p:nvSpPr>
-          <p:cNvPr id="97" name="圆角矩形 96"/>
+          <p:cNvPr id="99" name="圆角矩形 98"/>
           <p:cNvSpPr/>
           <p:nvPr/>
         </p:nvSpPr>
@@ -7128,8 +7475,8 @@
           </a:solidFill>
           <a:ln w="12700">
             <a:solidFill>
-              <a:srgbClr val="3B82F6">
-                <a:alpha val="55000"/>
+              <a:srgbClr val="244666">
+                <a:alpha val="88000"/>
               </a:srgbClr>
             </a:solidFill>
           </a:ln>
@@ -7160,7 +7507,7 @@
       </p:sp>
       <p:sp>
         <p:nvSpPr>
-          <p:cNvPr id="98" name="椭圆 97"/>
+          <p:cNvPr id="100" name="椭圆 99"/>
           <p:cNvSpPr/>
           <p:nvPr/>
         </p:nvSpPr>
@@ -7207,7 +7554,7 @@
       </p:sp>
       <p:sp>
         <p:nvSpPr>
-          <p:cNvPr id="99" name="文本框 98"/>
+          <p:cNvPr id="101" name="文本框 100"/>
           <p:cNvSpPr txBox="1"/>
           <p:nvPr/>
         </p:nvSpPr>
@@ -7222,13 +7569,21 @@
           <a:noFill/>
         </p:spPr>
         <p:txBody>
-          <a:bodyPr wrap="square" lIns="0" tIns="0" rIns="0" rtlCol="0" anchor="t">
-            <a:normAutofit/>
+          <a:bodyPr wrap="square" lIns="0" tIns="0" rIns="0" rtlCol="0" anchor="ctr">
+            <a:noAutofit/>
           </a:bodyPr>
           <a:p>
-            <a:pPr algn="ctr"/>
-            <a:r>
-              <a:rPr lang="en-US" altLang="en-US" sz="835" b="1">
+            <a:pPr indent="0" algn="ctr">
+              <a:spcBef>
+                <a:spcPts val="0"/>
+              </a:spcBef>
+              <a:spcAft>
+                <a:spcPts val="0"/>
+              </a:spcAft>
+              <a:buNone/>
+            </a:pPr>
+            <a:r>
+              <a:rPr lang="en-US" altLang="en-US" sz="750" b="1">
                 <a:solidFill>
                   <a:srgbClr val="071426"/>
                 </a:solidFill>
@@ -7237,7 +7592,7 @@
               </a:rPr>
               <a:t>06</a:t>
             </a:r>
-            <a:endParaRPr lang="en-US" altLang="en-US" sz="835" b="1">
+            <a:endParaRPr lang="en-US" altLang="en-US" sz="750" b="1">
               <a:solidFill>
                 <a:srgbClr val="071426"/>
               </a:solidFill>
@@ -7249,14 +7604,14 @@
       </p:sp>
       <p:sp>
         <p:nvSpPr>
-          <p:cNvPr id="100" name="圆角矩形 99"/>
+          <p:cNvPr id="102" name="圆角矩形 101"/>
           <p:cNvSpPr/>
           <p:nvPr/>
         </p:nvSpPr>
         <p:spPr>
           <a:xfrm>
             <a:off x="10464800" y="2260600"/>
-            <a:ext cx="1016000" cy="279400"/>
+            <a:ext cx="1016000" cy="304800"/>
           </a:xfrm>
           <a:prstGeom prst="roundRect">
             <a:avLst/>
@@ -7267,7 +7622,7 @@
           <a:ln w="12700">
             <a:solidFill>
               <a:srgbClr val="3B82F6">
-                <a:alpha val="65000"/>
+                <a:alpha val="48000"/>
               </a:srgbClr>
             </a:solidFill>
           </a:ln>
@@ -7298,14 +7653,14 @@
       </p:sp>
       <p:sp>
         <p:nvSpPr>
-          <p:cNvPr id="101" name="文本框 100"/>
+          <p:cNvPr id="103" name="文本框 102"/>
           <p:cNvSpPr txBox="1"/>
           <p:nvPr/>
         </p:nvSpPr>
         <p:spPr>
           <a:xfrm>
-            <a:off x="10528300" y="2324100"/>
-            <a:ext cx="889000" cy="322580"/>
+            <a:off x="10528300" y="2298700"/>
+            <a:ext cx="889000" cy="335280"/>
           </a:xfrm>
           <a:prstGeom prst="rect">
             <a:avLst/>
@@ -7313,13 +7668,21 @@
           <a:noFill/>
         </p:spPr>
         <p:txBody>
-          <a:bodyPr wrap="square" lIns="0" tIns="0" rIns="0" rtlCol="0" anchor="t">
-            <a:normAutofit/>
+          <a:bodyPr wrap="square" lIns="12700" tIns="12700" rIns="12700" rtlCol="0" anchor="ctr">
+            <a:noAutofit/>
           </a:bodyPr>
           <a:p>
-            <a:pPr algn="ctr"/>
-            <a:r>
-              <a:rPr lang="zh-CN" altLang="en-US" sz="910" b="1">
+            <a:pPr indent="0" algn="ctr">
+              <a:spcBef>
+                <a:spcPts val="0"/>
+              </a:spcBef>
+              <a:spcAft>
+                <a:spcPts val="0"/>
+              </a:spcAft>
+              <a:buNone/>
+            </a:pPr>
+            <a:r>
+              <a:rPr lang="zh-CN" altLang="en-US" sz="860" b="1">
                 <a:solidFill>
                   <a:srgbClr val="3B82F6"/>
                 </a:solidFill>
@@ -7328,7 +7691,7 @@
               </a:rPr>
               <a:t>结算合约</a:t>
             </a:r>
-            <a:endParaRPr lang="zh-CN" altLang="en-US" sz="910" b="1">
+            <a:endParaRPr lang="zh-CN" altLang="en-US" sz="860" b="1">
               <a:solidFill>
                 <a:srgbClr val="3B82F6"/>
               </a:solidFill>
@@ -7340,14 +7703,14 @@
       </p:sp>
       <p:sp>
         <p:nvSpPr>
-          <p:cNvPr id="102" name="文本框 101"/>
+          <p:cNvPr id="104" name="文本框 103"/>
           <p:cNvSpPr txBox="1"/>
           <p:nvPr/>
         </p:nvSpPr>
         <p:spPr>
           <a:xfrm>
-            <a:off x="10375900" y="2755900"/>
-            <a:ext cx="1193800" cy="322580"/>
+            <a:off x="10363200" y="2717800"/>
+            <a:ext cx="1219200" cy="347980"/>
           </a:xfrm>
           <a:prstGeom prst="rect">
             <a:avLst/>
@@ -7355,13 +7718,21 @@
           <a:noFill/>
         </p:spPr>
         <p:txBody>
-          <a:bodyPr wrap="square" lIns="0" tIns="0" rIns="0" rtlCol="0" anchor="t">
-            <a:normAutofit/>
+          <a:bodyPr wrap="square" lIns="25400" tIns="25400" rIns="25400" rtlCol="0" anchor="ctr">
+            <a:noAutofit/>
           </a:bodyPr>
           <a:p>
-            <a:pPr algn="ctr"/>
-            <a:r>
-              <a:rPr lang="zh-CN" altLang="en-US" sz="1155" b="1">
+            <a:pPr indent="0" algn="ctr">
+              <a:spcBef>
+                <a:spcPts val="0"/>
+              </a:spcBef>
+              <a:spcAft>
+                <a:spcPts val="0"/>
+              </a:spcAft>
+              <a:buNone/>
+            </a:pPr>
+            <a:r>
+              <a:rPr lang="zh-CN" altLang="en-US" sz="1250" b="1">
                 <a:solidFill>
                   <a:srgbClr val="F4F8FC"/>
                 </a:solidFill>
@@ -7370,7 +7741,7 @@
               </a:rPr>
               <a:t>到期分账</a:t>
             </a:r>
-            <a:endParaRPr lang="zh-CN" altLang="en-US" sz="1155" b="1">
+            <a:endParaRPr lang="zh-CN" altLang="en-US" sz="1250" b="1">
               <a:solidFill>
                 <a:srgbClr val="F4F8FC"/>
               </a:solidFill>
@@ -7382,7 +7753,7 @@
       </p:sp>
       <p:cxnSp>
         <p:nvCxnSpPr>
-          <p:cNvPr id="103" name="直接连接符 102"/>
+          <p:cNvPr id="105" name="直接连接符 104"/>
           <p:cNvCxnSpPr/>
           <p:nvPr/>
         </p:nvCxnSpPr>
@@ -7417,14 +7788,14 @@
       </p:cxnSp>
       <p:sp>
         <p:nvSpPr>
-          <p:cNvPr id="104" name="文本框 103"/>
+          <p:cNvPr id="106" name="文本框 105"/>
           <p:cNvSpPr txBox="1"/>
           <p:nvPr/>
         </p:nvSpPr>
         <p:spPr>
           <a:xfrm>
-            <a:off x="10363200" y="3352800"/>
-            <a:ext cx="1219200" cy="322580"/>
+            <a:off x="10363200" y="3340100"/>
+            <a:ext cx="1219200" cy="347980"/>
           </a:xfrm>
           <a:prstGeom prst="rect">
             <a:avLst/>
@@ -7432,13 +7803,21 @@
           <a:noFill/>
         </p:spPr>
         <p:txBody>
-          <a:bodyPr wrap="square" lIns="0" tIns="0" rIns="0" rtlCol="0" anchor="t">
-            <a:normAutofit fontScale="40000"/>
+          <a:bodyPr wrap="square" lIns="25400" tIns="25400" rIns="25400" rtlCol="0" anchor="t">
+            <a:noAutofit/>
           </a:bodyPr>
           <a:p>
-            <a:pPr algn="ctr"/>
-            <a:r>
-              <a:rPr lang="zh-CN" altLang="en-US" sz="2050">
+            <a:pPr indent="0" algn="ctr">
+              <a:spcBef>
+                <a:spcPts val="0"/>
+              </a:spcBef>
+              <a:spcAft>
+                <a:spcPts val="0"/>
+              </a:spcAft>
+              <a:buNone/>
+            </a:pPr>
+            <a:r>
+              <a:rPr lang="zh-CN" altLang="en-US" sz="900">
                 <a:solidFill>
                   <a:srgbClr val="C7D7E8"/>
                 </a:solidFill>
@@ -7449,7 +7828,7 @@
               <a:t>受限</a:t>
             </a:r>
             <a:r>
-              <a:rPr lang="en-US" altLang="zh-CN" sz="2050">
+              <a:rPr lang="en-US" altLang="zh-CN" sz="900">
                 <a:solidFill>
                   <a:srgbClr val="C7D7E8"/>
                 </a:solidFill>
@@ -7460,7 +7839,7 @@
               <a:t> Relayer
 → claim()</a:t>
             </a:r>
-            <a:endParaRPr lang="en-US" altLang="zh-CN" sz="2050">
+            <a:endParaRPr lang="en-US" altLang="zh-CN" sz="900">
               <a:solidFill>
                 <a:srgbClr val="C7D7E8"/>
               </a:solidFill>
@@ -7473,7 +7852,7 @@
       </p:sp>
       <p:sp>
         <p:nvSpPr>
-          <p:cNvPr id="105" name="圆角矩形 104"/>
+          <p:cNvPr id="107" name="圆角矩形 106"/>
           <p:cNvSpPr/>
           <p:nvPr/>
         </p:nvSpPr>
@@ -7490,8 +7869,8 @@
           </a:solidFill>
           <a:ln w="12700">
             <a:solidFill>
-              <a:srgbClr val="3B82F6">
-                <a:alpha val="65000"/>
+              <a:srgbClr val="244666">
+                <a:alpha val="88000"/>
               </a:srgbClr>
             </a:solidFill>
           </a:ln>
@@ -7522,7 +7901,7 @@
       </p:sp>
       <p:sp>
         <p:nvSpPr>
-          <p:cNvPr id="106" name="矩形 105"/>
+          <p:cNvPr id="108" name="矩形 107"/>
           <p:cNvSpPr/>
           <p:nvPr/>
         </p:nvSpPr>
@@ -7569,14 +7948,14 @@
       </p:sp>
       <p:sp>
         <p:nvSpPr>
-          <p:cNvPr id="107" name="文本框 106"/>
+          <p:cNvPr id="109" name="文本框 108"/>
           <p:cNvSpPr txBox="1"/>
           <p:nvPr/>
         </p:nvSpPr>
         <p:spPr>
           <a:xfrm>
             <a:off x="889000" y="4635500"/>
-            <a:ext cx="1905000" cy="322580"/>
+            <a:ext cx="1905000" cy="360680"/>
           </a:xfrm>
           <a:prstGeom prst="rect">
             <a:avLst/>
@@ -7584,11 +7963,19 @@
           <a:noFill/>
         </p:spPr>
         <p:txBody>
-          <a:bodyPr wrap="square" lIns="0" tIns="0" rIns="0" rtlCol="0" anchor="t">
-            <a:normAutofit/>
+          <a:bodyPr wrap="square" lIns="38100" tIns="38100" rIns="38100" rtlCol="0" anchor="t">
+            <a:noAutofit/>
           </a:bodyPr>
           <a:p>
-            <a:pPr algn="l"/>
+            <a:pPr indent="0" algn="l">
+              <a:spcBef>
+                <a:spcPts val="0"/>
+              </a:spcBef>
+              <a:spcAft>
+                <a:spcPts val="0"/>
+              </a:spcAft>
+              <a:buNone/>
+            </a:pPr>
             <a:r>
               <a:rPr lang="zh-CN" altLang="en-US" sz="1500" b="1">
                 <a:solidFill>
@@ -7611,14 +7998,14 @@
       </p:sp>
       <p:sp>
         <p:nvSpPr>
-          <p:cNvPr id="108" name="文本框 107"/>
+          <p:cNvPr id="110" name="文本框 109"/>
           <p:cNvSpPr txBox="1"/>
           <p:nvPr/>
         </p:nvSpPr>
         <p:spPr>
           <a:xfrm>
             <a:off x="889000" y="5067300"/>
-            <a:ext cx="825500" cy="322580"/>
+            <a:ext cx="825500" cy="335280"/>
           </a:xfrm>
           <a:prstGeom prst="rect">
             <a:avLst/>
@@ -7626,13 +8013,21 @@
           <a:noFill/>
         </p:spPr>
         <p:txBody>
-          <a:bodyPr wrap="square" lIns="0" tIns="0" rIns="0" rtlCol="0" anchor="t">
-            <a:normAutofit/>
+          <a:bodyPr wrap="square" lIns="12700" tIns="12700" rIns="12700" rtlCol="0" anchor="t">
+            <a:noAutofit/>
           </a:bodyPr>
           <a:p>
-            <a:pPr algn="l"/>
-            <a:r>
-              <a:rPr lang="zh-CN" altLang="en-US" sz="910" b="1">
+            <a:pPr indent="0" algn="l">
+              <a:spcBef>
+                <a:spcPts val="0"/>
+              </a:spcBef>
+              <a:spcAft>
+                <a:spcPts val="0"/>
+              </a:spcAft>
+              <a:buNone/>
+            </a:pPr>
+            <a:r>
+              <a:rPr lang="zh-CN" altLang="en-US" sz="820" b="1">
                 <a:solidFill>
                   <a:srgbClr val="FFCB66"/>
                 </a:solidFill>
@@ -7641,7 +8036,7 @@
               </a:rPr>
               <a:t>买方资金</a:t>
             </a:r>
-            <a:endParaRPr lang="zh-CN" altLang="en-US" sz="910" b="1">
+            <a:endParaRPr lang="zh-CN" altLang="en-US" sz="820" b="1">
               <a:solidFill>
                 <a:srgbClr val="FFCB66"/>
               </a:solidFill>
@@ -7653,14 +8048,14 @@
       </p:sp>
       <p:sp>
         <p:nvSpPr>
-          <p:cNvPr id="109" name="文本框 108"/>
+          <p:cNvPr id="111" name="文本框 110"/>
           <p:cNvSpPr txBox="1"/>
           <p:nvPr/>
         </p:nvSpPr>
         <p:spPr>
           <a:xfrm>
             <a:off x="1778000" y="5041900"/>
-            <a:ext cx="3619500" cy="322580"/>
+            <a:ext cx="3619500" cy="360680"/>
           </a:xfrm>
           <a:prstGeom prst="rect">
             <a:avLst/>
@@ -7668,13 +8063,21 @@
           <a:noFill/>
         </p:spPr>
         <p:txBody>
-          <a:bodyPr wrap="square" lIns="0" tIns="0" rIns="0" rtlCol="0" anchor="t">
-            <a:normAutofit/>
+          <a:bodyPr wrap="square" lIns="38100" tIns="38100" rIns="38100" rtlCol="0" anchor="t">
+            <a:noAutofit/>
           </a:bodyPr>
           <a:p>
-            <a:pPr algn="l"/>
-            <a:r>
-              <a:rPr lang="zh-CN" altLang="en-US" sz="945">
+            <a:pPr indent="0" algn="l">
+              <a:spcBef>
+                <a:spcPts val="0"/>
+              </a:spcBef>
+              <a:spcAft>
+                <a:spcPts val="0"/>
+              </a:spcAft>
+              <a:buNone/>
+            </a:pPr>
+            <a:r>
+              <a:rPr lang="zh-CN" altLang="en-US" sz="920">
                 <a:solidFill>
                   <a:srgbClr val="C7D7E8"/>
                 </a:solidFill>
@@ -7685,7 +8088,7 @@
               <a:t>确权时不锁款</a:t>
             </a:r>
             <a:r>
-              <a:rPr lang="en-US" altLang="zh-CN" sz="945">
+              <a:rPr lang="en-US" altLang="zh-CN" sz="920">
                 <a:solidFill>
                   <a:srgbClr val="C7D7E8"/>
                 </a:solidFill>
@@ -7696,7 +8099,7 @@
               <a:t> · </a:t>
             </a:r>
             <a:r>
-              <a:rPr lang="zh-CN" altLang="en-US" sz="945">
+              <a:rPr lang="zh-CN" altLang="en-US" sz="920">
                 <a:solidFill>
                   <a:srgbClr val="C7D7E8"/>
                 </a:solidFill>
@@ -7706,7 +8109,7 @@
               </a:rPr>
               <a:t>到期前检查余额与授权</a:t>
             </a:r>
-            <a:endParaRPr lang="zh-CN" altLang="en-US" sz="945">
+            <a:endParaRPr lang="zh-CN" altLang="en-US" sz="920">
               <a:solidFill>
                 <a:srgbClr val="C7D7E8"/>
               </a:solidFill>
@@ -7719,14 +8122,14 @@
       </p:sp>
       <p:sp>
         <p:nvSpPr>
-          <p:cNvPr id="110" name="文本框 109"/>
+          <p:cNvPr id="112" name="文本框 111"/>
           <p:cNvSpPr txBox="1"/>
           <p:nvPr/>
         </p:nvSpPr>
         <p:spPr>
           <a:xfrm>
             <a:off x="889000" y="5410200"/>
-            <a:ext cx="952500" cy="322580"/>
+            <a:ext cx="952500" cy="335280"/>
           </a:xfrm>
           <a:prstGeom prst="rect">
             <a:avLst/>
@@ -7734,13 +8137,21 @@
           <a:noFill/>
         </p:spPr>
         <p:txBody>
-          <a:bodyPr wrap="square" lIns="0" tIns="0" rIns="0" rtlCol="0" anchor="t">
-            <a:normAutofit/>
+          <a:bodyPr wrap="square" lIns="12700" tIns="12700" rIns="12700" rtlCol="0" anchor="t">
+            <a:noAutofit/>
           </a:bodyPr>
           <a:p>
-            <a:pPr algn="l"/>
-            <a:r>
-              <a:rPr lang="zh-CN" altLang="en-US" sz="1025" b="1">
+            <a:pPr indent="0" algn="l">
+              <a:spcBef>
+                <a:spcPts val="0"/>
+              </a:spcBef>
+              <a:spcAft>
+                <a:spcPts val="0"/>
+              </a:spcAft>
+              <a:buNone/>
+            </a:pPr>
+            <a:r>
+              <a:rPr lang="zh-CN" altLang="en-US" sz="820" b="1">
                 <a:solidFill>
                   <a:srgbClr val="45F0C5"/>
                 </a:solidFill>
@@ -7749,7 +8160,7 @@
               </a:rPr>
               <a:t>资金方本金</a:t>
             </a:r>
-            <a:endParaRPr lang="zh-CN" altLang="en-US" sz="1025" b="1">
+            <a:endParaRPr lang="zh-CN" altLang="en-US" sz="820" b="1">
               <a:solidFill>
                 <a:srgbClr val="45F0C5"/>
               </a:solidFill>
@@ -7761,14 +8172,14 @@
       </p:sp>
       <p:sp>
         <p:nvSpPr>
-          <p:cNvPr id="111" name="文本框 110"/>
+          <p:cNvPr id="113" name="文本框 112"/>
           <p:cNvSpPr txBox="1"/>
           <p:nvPr/>
         </p:nvSpPr>
         <p:spPr>
           <a:xfrm>
             <a:off x="1778000" y="5384800"/>
-            <a:ext cx="3619500" cy="322580"/>
+            <a:ext cx="3619500" cy="360680"/>
           </a:xfrm>
           <a:prstGeom prst="rect">
             <a:avLst/>
@@ -7776,13 +8187,21 @@
           <a:noFill/>
         </p:spPr>
         <p:txBody>
-          <a:bodyPr wrap="square" lIns="0" tIns="0" rIns="0" rtlCol="0" anchor="t">
-            <a:normAutofit/>
+          <a:bodyPr wrap="square" lIns="38100" tIns="38100" rIns="38100" rtlCol="0" anchor="t">
+            <a:noAutofit/>
           </a:bodyPr>
           <a:p>
-            <a:pPr algn="l"/>
-            <a:r>
-              <a:rPr lang="zh-CN" altLang="en-US" sz="945">
+            <a:pPr indent="0" algn="l">
+              <a:spcBef>
+                <a:spcPts val="0"/>
+              </a:spcBef>
+              <a:spcAft>
+                <a:spcPts val="0"/>
+              </a:spcAft>
+              <a:buNone/>
+            </a:pPr>
+            <a:r>
+              <a:rPr lang="zh-CN" altLang="en-US" sz="920">
                 <a:solidFill>
                   <a:srgbClr val="C7D7E8"/>
                 </a:solidFill>
@@ -7793,7 +8212,7 @@
               <a:t>报价后托管在合约</a:t>
             </a:r>
             <a:r>
-              <a:rPr lang="en-US" altLang="zh-CN" sz="945">
+              <a:rPr lang="en-US" altLang="zh-CN" sz="920">
                 <a:solidFill>
                   <a:srgbClr val="C7D7E8"/>
                 </a:solidFill>
@@ -7804,7 +8223,7 @@
               <a:t> · </a:t>
             </a:r>
             <a:r>
-              <a:rPr lang="zh-CN" altLang="en-US" sz="945">
+              <a:rPr lang="zh-CN" altLang="en-US" sz="920">
                 <a:solidFill>
                   <a:srgbClr val="C7D7E8"/>
                 </a:solidFill>
@@ -7814,7 +8233,7 @@
               </a:rPr>
               <a:t>接受后原子放款</a:t>
             </a:r>
-            <a:endParaRPr lang="zh-CN" altLang="en-US" sz="945">
+            <a:endParaRPr lang="zh-CN" altLang="en-US" sz="920">
               <a:solidFill>
                 <a:srgbClr val="C7D7E8"/>
               </a:solidFill>
@@ -7827,7 +8246,7 @@
       </p:sp>
       <p:cxnSp>
         <p:nvCxnSpPr>
-          <p:cNvPr id="112" name="直接连接符 111"/>
+          <p:cNvPr id="114" name="直接连接符 113"/>
           <p:cNvCxnSpPr/>
           <p:nvPr/>
         </p:nvCxnSpPr>
@@ -7862,14 +8281,14 @@
       </p:cxnSp>
       <p:sp>
         <p:nvSpPr>
-          <p:cNvPr id="113" name="文本框 112"/>
+          <p:cNvPr id="115" name="文本框 114"/>
           <p:cNvSpPr txBox="1"/>
           <p:nvPr/>
         </p:nvSpPr>
         <p:spPr>
           <a:xfrm>
             <a:off x="6070600" y="4635500"/>
-            <a:ext cx="2159000" cy="322580"/>
+            <a:ext cx="2159000" cy="360680"/>
           </a:xfrm>
           <a:prstGeom prst="rect">
             <a:avLst/>
@@ -7877,11 +8296,19 @@
           <a:noFill/>
         </p:spPr>
         <p:txBody>
-          <a:bodyPr wrap="square" lIns="0" tIns="0" rIns="0" rtlCol="0" anchor="t">
-            <a:normAutofit/>
+          <a:bodyPr wrap="square" lIns="38100" tIns="38100" rIns="38100" rtlCol="0" anchor="t">
+            <a:noAutofit/>
           </a:bodyPr>
           <a:p>
-            <a:pPr algn="l"/>
+            <a:pPr indent="0" algn="l">
+              <a:spcBef>
+                <a:spcPts val="0"/>
+              </a:spcBef>
+              <a:spcAft>
+                <a:spcPts val="0"/>
+              </a:spcAft>
+              <a:buNone/>
+            </a:pPr>
             <a:r>
               <a:rPr lang="zh-CN" altLang="en-US" sz="1500" b="1">
                 <a:solidFill>
@@ -7904,14 +8331,14 @@
       </p:sp>
       <p:sp>
         <p:nvSpPr>
-          <p:cNvPr id="114" name="圆角矩形 113"/>
+          <p:cNvPr id="116" name="圆角矩形 115"/>
           <p:cNvSpPr/>
           <p:nvPr/>
         </p:nvSpPr>
         <p:spPr>
           <a:xfrm>
             <a:off x="6070600" y="5041900"/>
-            <a:ext cx="1092200" cy="279400"/>
+            <a:ext cx="1092200" cy="304800"/>
           </a:xfrm>
           <a:prstGeom prst="roundRect">
             <a:avLst/>
@@ -7922,7 +8349,7 @@
           <a:ln w="12700">
             <a:solidFill>
               <a:srgbClr val="FFCB66">
-                <a:alpha val="65000"/>
+                <a:alpha val="48000"/>
               </a:srgbClr>
             </a:solidFill>
           </a:ln>
@@ -7953,14 +8380,14 @@
       </p:sp>
       <p:sp>
         <p:nvSpPr>
-          <p:cNvPr id="115" name="文本框 114"/>
+          <p:cNvPr id="117" name="文本框 116"/>
           <p:cNvSpPr txBox="1"/>
           <p:nvPr/>
         </p:nvSpPr>
         <p:spPr>
           <a:xfrm>
-            <a:off x="6134100" y="5105400"/>
-            <a:ext cx="965200" cy="322580"/>
+            <a:off x="6134100" y="5080000"/>
+            <a:ext cx="965200" cy="335280"/>
           </a:xfrm>
           <a:prstGeom prst="rect">
             <a:avLst/>
@@ -7968,13 +8395,21 @@
           <a:noFill/>
         </p:spPr>
         <p:txBody>
-          <a:bodyPr wrap="square" lIns="0" tIns="0" rIns="0" rtlCol="0" anchor="t">
-            <a:normAutofit/>
+          <a:bodyPr wrap="square" lIns="12700" tIns="12700" rIns="12700" rtlCol="0" anchor="ctr">
+            <a:noAutofit/>
           </a:bodyPr>
           <a:p>
-            <a:pPr algn="ctr"/>
-            <a:r>
-              <a:rPr lang="zh-CN" altLang="en-US" sz="820" b="1">
+            <a:pPr indent="0" algn="ctr">
+              <a:spcBef>
+                <a:spcPts val="0"/>
+              </a:spcBef>
+              <a:spcAft>
+                <a:spcPts val="0"/>
+              </a:spcAft>
+              <a:buNone/>
+            </a:pPr>
+            <a:r>
+              <a:rPr lang="zh-CN" altLang="en-US" sz="860" b="1">
                 <a:solidFill>
                   <a:srgbClr val="FFCB66"/>
                 </a:solidFill>
@@ -7983,7 +8418,7 @@
               </a:rPr>
               <a:t>授权有效</a:t>
             </a:r>
-            <a:endParaRPr lang="zh-CN" altLang="en-US" sz="820" b="1">
+            <a:endParaRPr lang="zh-CN" altLang="en-US" sz="860" b="1">
               <a:solidFill>
                 <a:srgbClr val="FFCB66"/>
               </a:solidFill>
@@ -7995,14 +8430,14 @@
       </p:sp>
       <p:sp>
         <p:nvSpPr>
-          <p:cNvPr id="116" name="圆角矩形 115"/>
+          <p:cNvPr id="118" name="圆角矩形 117"/>
           <p:cNvSpPr/>
           <p:nvPr/>
         </p:nvSpPr>
         <p:spPr>
           <a:xfrm>
             <a:off x="7264400" y="5041900"/>
-            <a:ext cx="1092200" cy="279400"/>
+            <a:ext cx="1092200" cy="304800"/>
           </a:xfrm>
           <a:prstGeom prst="roundRect">
             <a:avLst/>
@@ -8013,7 +8448,7 @@
           <a:ln w="12700">
             <a:solidFill>
               <a:srgbClr val="45F0C5">
-                <a:alpha val="65000"/>
+                <a:alpha val="48000"/>
               </a:srgbClr>
             </a:solidFill>
           </a:ln>
@@ -8044,14 +8479,14 @@
       </p:sp>
       <p:sp>
         <p:nvSpPr>
-          <p:cNvPr id="117" name="文本框 116"/>
+          <p:cNvPr id="119" name="文本框 118"/>
           <p:cNvSpPr txBox="1"/>
           <p:nvPr/>
         </p:nvSpPr>
         <p:spPr>
           <a:xfrm>
-            <a:off x="7327900" y="5105400"/>
-            <a:ext cx="965200" cy="322580"/>
+            <a:off x="7327900" y="5080000"/>
+            <a:ext cx="965200" cy="335280"/>
           </a:xfrm>
           <a:prstGeom prst="rect">
             <a:avLst/>
@@ -8059,13 +8494,21 @@
           <a:noFill/>
         </p:spPr>
         <p:txBody>
-          <a:bodyPr wrap="square" lIns="0" tIns="0" rIns="0" rtlCol="0" anchor="t">
-            <a:normAutofit/>
+          <a:bodyPr wrap="square" lIns="12700" tIns="12700" rIns="12700" rtlCol="0" anchor="ctr">
+            <a:noAutofit/>
           </a:bodyPr>
           <a:p>
-            <a:pPr algn="ctr"/>
-            <a:r>
-              <a:rPr lang="zh-CN" altLang="en-US" sz="820" b="1">
+            <a:pPr indent="0" algn="ctr">
+              <a:spcBef>
+                <a:spcPts val="0"/>
+              </a:spcBef>
+              <a:spcAft>
+                <a:spcPts val="0"/>
+              </a:spcAft>
+              <a:buNone/>
+            </a:pPr>
+            <a:r>
+              <a:rPr lang="zh-CN" altLang="en-US" sz="860" b="1">
                 <a:solidFill>
                   <a:srgbClr val="45F0C5"/>
                 </a:solidFill>
@@ -8074,7 +8517,7 @@
               </a:rPr>
               <a:t>余额充足</a:t>
             </a:r>
-            <a:endParaRPr lang="zh-CN" altLang="en-US" sz="820" b="1">
+            <a:endParaRPr lang="zh-CN" altLang="en-US" sz="860" b="1">
               <a:solidFill>
                 <a:srgbClr val="45F0C5"/>
               </a:solidFill>
@@ -8086,14 +8529,14 @@
       </p:sp>
       <p:sp>
         <p:nvSpPr>
-          <p:cNvPr id="118" name="圆角矩形 117"/>
+          <p:cNvPr id="120" name="圆角矩形 119"/>
           <p:cNvSpPr/>
           <p:nvPr/>
         </p:nvSpPr>
         <p:spPr>
           <a:xfrm>
             <a:off x="8458200" y="5041900"/>
-            <a:ext cx="1219200" cy="279400"/>
+            <a:ext cx="1219200" cy="304800"/>
           </a:xfrm>
           <a:prstGeom prst="roundRect">
             <a:avLst/>
@@ -8104,7 +8547,7 @@
           <a:ln w="12700">
             <a:solidFill>
               <a:srgbClr val="24D5FF">
-                <a:alpha val="65000"/>
+                <a:alpha val="48000"/>
               </a:srgbClr>
             </a:solidFill>
           </a:ln>
@@ -8135,14 +8578,14 @@
       </p:sp>
       <p:sp>
         <p:nvSpPr>
-          <p:cNvPr id="119" name="文本框 118"/>
+          <p:cNvPr id="121" name="文本框 120"/>
           <p:cNvSpPr txBox="1"/>
           <p:nvPr/>
         </p:nvSpPr>
         <p:spPr>
           <a:xfrm>
-            <a:off x="8521700" y="5105400"/>
-            <a:ext cx="1092200" cy="322580"/>
+            <a:off x="8521700" y="5080000"/>
+            <a:ext cx="1092200" cy="335280"/>
           </a:xfrm>
           <a:prstGeom prst="rect">
             <a:avLst/>
@@ -8150,13 +8593,21 @@
           <a:noFill/>
         </p:spPr>
         <p:txBody>
-          <a:bodyPr wrap="square" lIns="0" tIns="0" rIns="0" rtlCol="0" anchor="t">
-            <a:normAutofit/>
+          <a:bodyPr wrap="square" lIns="12700" tIns="12700" rIns="12700" rtlCol="0" anchor="ctr">
+            <a:noAutofit/>
           </a:bodyPr>
           <a:p>
-            <a:pPr algn="ctr"/>
-            <a:r>
-              <a:rPr lang="zh-CN" altLang="en-US" sz="910" b="1">
+            <a:pPr indent="0" algn="ctr">
+              <a:spcBef>
+                <a:spcPts val="0"/>
+              </a:spcBef>
+              <a:spcAft>
+                <a:spcPts val="0"/>
+              </a:spcAft>
+              <a:buNone/>
+            </a:pPr>
+            <a:r>
+              <a:rPr lang="zh-CN" altLang="en-US" sz="860" b="1">
                 <a:solidFill>
                   <a:srgbClr val="24D5FF"/>
                 </a:solidFill>
@@ -8165,7 +8616,7 @@
               </a:rPr>
               <a:t>当前权利人</a:t>
             </a:r>
-            <a:endParaRPr lang="zh-CN" altLang="en-US" sz="910" b="1">
+            <a:endParaRPr lang="zh-CN" altLang="en-US" sz="860" b="1">
               <a:solidFill>
                 <a:srgbClr val="24D5FF"/>
               </a:solidFill>
@@ -8177,14 +8628,14 @@
       </p:sp>
       <p:sp>
         <p:nvSpPr>
-          <p:cNvPr id="120" name="文本框 119"/>
+          <p:cNvPr id="122" name="文本框 121"/>
           <p:cNvSpPr txBox="1"/>
           <p:nvPr/>
         </p:nvSpPr>
         <p:spPr>
           <a:xfrm>
             <a:off x="6070600" y="5435600"/>
-            <a:ext cx="4953000" cy="322580"/>
+            <a:ext cx="4953000" cy="360680"/>
           </a:xfrm>
           <a:prstGeom prst="rect">
             <a:avLst/>
@@ -8192,13 +8643,21 @@
           <a:noFill/>
         </p:spPr>
         <p:txBody>
-          <a:bodyPr wrap="square" lIns="0" tIns="0" rIns="0" rtlCol="0" anchor="t">
-            <a:normAutofit/>
+          <a:bodyPr wrap="square" lIns="38100" tIns="38100" rIns="38100" rtlCol="0" anchor="t">
+            <a:noAutofit/>
           </a:bodyPr>
           <a:p>
-            <a:pPr algn="l"/>
-            <a:r>
-              <a:rPr lang="en-US" altLang="en-US" sz="945">
+            <a:pPr indent="0" algn="l">
+              <a:spcBef>
+                <a:spcPts val="0"/>
+              </a:spcBef>
+              <a:spcAft>
+                <a:spcPts val="0"/>
+              </a:spcAft>
+              <a:buNone/>
+            </a:pPr>
+            <a:r>
+              <a:rPr lang="en-US" altLang="en-US" sz="920">
                 <a:solidFill>
                   <a:srgbClr val="C7D7E8"/>
                 </a:solidFill>
@@ -8209,7 +8668,7 @@
               <a:t>→ </a:t>
             </a:r>
             <a:r>
-              <a:rPr lang="zh-CN" altLang="en-US" sz="945">
+              <a:rPr lang="zh-CN" altLang="en-US" sz="920">
                 <a:solidFill>
                   <a:srgbClr val="C7D7E8"/>
                 </a:solidFill>
@@ -8220,7 +8679,7 @@
               <a:t>结算合约收款</a:t>
             </a:r>
             <a:r>
-              <a:rPr lang="en-US" altLang="zh-CN" sz="945">
+              <a:rPr lang="en-US" altLang="zh-CN" sz="920">
                 <a:solidFill>
                   <a:srgbClr val="C7D7E8"/>
                 </a:solidFill>
@@ -8231,7 +8690,7 @@
               <a:t> · </a:t>
             </a:r>
             <a:r>
-              <a:rPr lang="zh-CN" altLang="en-US" sz="945">
+              <a:rPr lang="zh-CN" altLang="en-US" sz="920">
                 <a:solidFill>
                   <a:srgbClr val="C7D7E8"/>
                 </a:solidFill>
@@ -8241,7 +8700,7 @@
               </a:rPr>
               <a:t>按最新权属分账</a:t>
             </a:r>
-            <a:endParaRPr lang="zh-CN" altLang="en-US" sz="945">
+            <a:endParaRPr lang="zh-CN" altLang="en-US" sz="920">
               <a:solidFill>
                 <a:srgbClr val="C7D7E8"/>
               </a:solidFill>
@@ -8254,14 +8713,14 @@
       </p:sp>
       <p:sp>
         <p:nvSpPr>
-          <p:cNvPr id="121" name="文本框 120"/>
+          <p:cNvPr id="123" name="文本框 122"/>
           <p:cNvSpPr txBox="1"/>
           <p:nvPr/>
         </p:nvSpPr>
         <p:spPr>
           <a:xfrm>
             <a:off x="6070600" y="5689600"/>
-            <a:ext cx="4953000" cy="322580"/>
+            <a:ext cx="4953000" cy="360680"/>
           </a:xfrm>
           <a:prstGeom prst="rect">
             <a:avLst/>
@@ -8269,13 +8728,21 @@
           <a:noFill/>
         </p:spPr>
         <p:txBody>
-          <a:bodyPr wrap="square" lIns="0" tIns="0" rIns="0" rtlCol="0" anchor="t">
-            <a:normAutofit/>
+          <a:bodyPr wrap="square" lIns="38100" tIns="38100" rIns="38100" rtlCol="0" anchor="t">
+            <a:noAutofit/>
           </a:bodyPr>
           <a:p>
-            <a:pPr algn="l"/>
-            <a:r>
-              <a:rPr lang="zh-CN" altLang="en-US" sz="945" b="1">
+            <a:pPr indent="0" algn="l">
+              <a:spcBef>
+                <a:spcPts val="0"/>
+              </a:spcBef>
+              <a:spcAft>
+                <a:spcPts val="0"/>
+              </a:spcAft>
+              <a:buNone/>
+            </a:pPr>
+            <a:r>
+              <a:rPr lang="zh-CN" altLang="en-US" sz="920" b="1">
                 <a:solidFill>
                   <a:srgbClr val="FFCB66"/>
                 </a:solidFill>
@@ -8284,7 +8751,7 @@
               </a:rPr>
               <a:t>无追索：普通买方信用风险由资金方承担</a:t>
             </a:r>
-            <a:endParaRPr lang="zh-CN" altLang="en-US" sz="945" b="1">
+            <a:endParaRPr lang="zh-CN" altLang="en-US" sz="920" b="1">
               <a:solidFill>
                 <a:srgbClr val="FFCB66"/>
               </a:solidFill>
@@ -8296,14 +8763,14 @@
       </p:sp>
       <p:sp>
         <p:nvSpPr>
-          <p:cNvPr id="122" name="文本框 121"/>
+          <p:cNvPr id="124" name="文本框 123"/>
           <p:cNvSpPr txBox="1"/>
           <p:nvPr/>
         </p:nvSpPr>
         <p:spPr>
           <a:xfrm>
             <a:off x="609600" y="6108700"/>
-            <a:ext cx="10972800" cy="322580"/>
+            <a:ext cx="10972800" cy="360680"/>
           </a:xfrm>
           <a:prstGeom prst="rect">
             <a:avLst/>
@@ -8311,13 +8778,21 @@
           <a:noFill/>
         </p:spPr>
         <p:txBody>
-          <a:bodyPr wrap="square" lIns="0" tIns="0" rIns="0" rtlCol="0" anchor="t">
-            <a:normAutofit/>
+          <a:bodyPr wrap="square" lIns="38100" tIns="38100" rIns="38100" rtlCol="0" anchor="t">
+            <a:noAutofit/>
           </a:bodyPr>
           <a:p>
-            <a:pPr algn="ctr"/>
-            <a:r>
-              <a:rPr lang="zh-CN" altLang="en-US" sz="980" b="1">
+            <a:pPr indent="0" algn="ctr">
+              <a:spcBef>
+                <a:spcPts val="0"/>
+              </a:spcBef>
+              <a:spcAft>
+                <a:spcPts val="0"/>
+              </a:spcAft>
+              <a:buNone/>
+            </a:pPr>
+            <a:r>
+              <a:rPr lang="zh-CN" altLang="en-US" sz="880" b="1">
                 <a:solidFill>
                   <a:srgbClr val="24D5FF"/>
                 </a:solidFill>
@@ -8328,7 +8803,7 @@
               <a:t>方案</a:t>
             </a:r>
             <a:r>
-              <a:rPr lang="en-US" altLang="zh-CN" sz="980" b="1">
+              <a:rPr lang="en-US" altLang="zh-CN" sz="880" b="1">
                 <a:solidFill>
                   <a:srgbClr val="24D5FF"/>
                 </a:solidFill>
@@ -8339,7 +8814,7 @@
               <a:t> A · </a:t>
             </a:r>
             <a:r>
-              <a:rPr lang="zh-CN" altLang="en-US" sz="980" b="1">
+              <a:rPr lang="zh-CN" altLang="en-US" sz="880" b="1">
                 <a:solidFill>
                   <a:srgbClr val="24D5FF"/>
                 </a:solidFill>
@@ -8350,7 +8825,7 @@
               <a:t>许可式</a:t>
             </a:r>
             <a:r>
-              <a:rPr lang="en-US" altLang="zh-CN" sz="980" b="1">
+              <a:rPr lang="en-US" altLang="zh-CN" sz="880" b="1">
                 <a:solidFill>
                   <a:srgbClr val="24D5FF"/>
                 </a:solidFill>
@@ -8361,7 +8836,7 @@
               <a:t> MVP · </a:t>
             </a:r>
             <a:r>
-              <a:rPr lang="zh-CN" altLang="en-US" sz="980" b="1">
+              <a:rPr lang="zh-CN" altLang="en-US" sz="880" b="1">
                 <a:solidFill>
                   <a:srgbClr val="24D5FF"/>
                 </a:solidFill>
@@ -8371,7 +8846,7 @@
               </a:rPr>
               <a:t>数字凭证不等同于法定票据或还款保证</a:t>
             </a:r>
-            <a:endParaRPr lang="zh-CN" altLang="en-US" sz="980" b="1">
+            <a:endParaRPr lang="zh-CN" altLang="en-US" sz="880" b="1">
               <a:solidFill>
                 <a:srgbClr val="24D5FF"/>
               </a:solidFill>
@@ -10000,384 +10475,45 @@
           </a:p>
         </p:txBody>
       </p:sp>
-      <p:cxnSp>
-        <p:nvCxnSpPr>
-          <p:cNvPr id="44" name="直接连接符 43"/>
-          <p:cNvCxnSpPr/>
-          <p:nvPr/>
-        </p:nvCxnSpPr>
-        <p:spPr>
-          <a:xfrm>
-            <a:off x="609600" y="6502400"/>
-            <a:ext cx="10972800" cy="635"/>
-          </a:xfrm>
-          <a:prstGeom prst="line">
-            <a:avLst/>
-          </a:prstGeom>
-          <a:ln w="9525">
-            <a:solidFill>
-              <a:srgbClr val="244666"/>
-            </a:solidFill>
+      <p:sp>
+        <p:nvSpPr>
+          <p:cNvPr id="44" name="椭圆 43"/>
+          <p:cNvSpPr/>
+          <p:nvPr/>
+        </p:nvSpPr>
+        <p:spPr>
+          <a:xfrm>
+            <a:off x="9804400" y="-1676400"/>
+            <a:ext cx="4089400" cy="4089400"/>
+          </a:xfrm>
+          <a:prstGeom prst="ellipse">
+            <a:avLst/>
+          </a:prstGeom>
+          <a:solidFill>
+            <a:srgbClr val="3B82F6">
+              <a:alpha val="9000"/>
+            </a:srgbClr>
+          </a:solidFill>
+          <a:ln w="12700" cap="flat" cmpd="sng" algn="ctr">
+            <a:noFill/>
+            <a:prstDash val="solid"/>
+            <a:miter lim="800000"/>
           </a:ln>
-        </p:spPr>
-        <p:style>
-          <a:lnRef idx="2">
-            <a:schemeClr val="accent1"/>
-          </a:lnRef>
-          <a:fillRef idx="0">
-            <a:srgbClr val="FFFFFF"/>
-          </a:fillRef>
-          <a:effectRef idx="0">
-            <a:srgbClr val="FFFFFF"/>
-          </a:effectRef>
-          <a:fontRef idx="minor">
-            <a:schemeClr val="tx1"/>
-          </a:fontRef>
-        </p:style>
-      </p:cxnSp>
-      <p:sp>
-        <p:nvSpPr>
-          <p:cNvPr id="45" name="文本框 44"/>
-          <p:cNvSpPr txBox="1"/>
-          <p:nvPr/>
-        </p:nvSpPr>
-        <p:spPr>
-          <a:xfrm>
-            <a:off x="609600" y="6578600"/>
-            <a:ext cx="1587500" cy="322580"/>
-          </a:xfrm>
-          <a:prstGeom prst="rect">
-            <a:avLst/>
-          </a:prstGeom>
-          <a:noFill/>
-        </p:spPr>
-        <p:txBody>
-          <a:bodyPr wrap="square" lIns="0" tIns="0" rIns="0" rtlCol="0" anchor="t">
-            <a:normAutofit/>
-          </a:bodyPr>
-          <a:p>
-            <a:pPr algn="l"/>
-            <a:r>
-              <a:rPr lang="en-US" altLang="en-US" sz="940" b="1">
-                <a:solidFill>
-                  <a:srgbClr val="7894AF"/>
-                </a:solidFill>
-                <a:latin typeface="Aptos" charset="0"/>
-                <a:cs typeface="Aptos" charset="0"/>
-              </a:rPr>
-              <a:t>SUPPLYCHAINX402</a:t>
-            </a:r>
-            <a:endParaRPr lang="en-US" altLang="en-US" sz="940" b="1">
-              <a:solidFill>
-                <a:srgbClr val="7894AF"/>
-              </a:solidFill>
-              <a:latin typeface="Aptos" charset="0"/>
-              <a:cs typeface="Aptos" charset="0"/>
-            </a:endParaRPr>
-          </a:p>
-        </p:txBody>
-      </p:sp>
-      <p:sp>
-        <p:nvSpPr>
-          <p:cNvPr id="46" name="文本框 45"/>
-          <p:cNvSpPr txBox="1"/>
-          <p:nvPr/>
-        </p:nvSpPr>
-        <p:spPr>
-          <a:xfrm>
-            <a:off x="9448800" y="6578600"/>
-            <a:ext cx="1879600" cy="322580"/>
-          </a:xfrm>
-          <a:prstGeom prst="rect">
-            <a:avLst/>
-          </a:prstGeom>
-          <a:noFill/>
-        </p:spPr>
-        <p:txBody>
-          <a:bodyPr wrap="square" lIns="0" tIns="0" rIns="0" rtlCol="0" anchor="t">
-            <a:normAutofit/>
-          </a:bodyPr>
-          <a:p>
-            <a:pPr algn="r"/>
-            <a:r>
-              <a:rPr lang="en-US" altLang="en-US" sz="1070" b="1">
-                <a:solidFill>
-                  <a:srgbClr val="7894AF"/>
-                </a:solidFill>
-                <a:latin typeface="Aptos" charset="0"/>
-                <a:cs typeface="Aptos" charset="0"/>
-              </a:rPr>
-              <a:t>ATTESTFLOW · CC3 MVP</a:t>
-            </a:r>
-            <a:endParaRPr lang="en-US" altLang="en-US" sz="1070" b="1">
-              <a:solidFill>
-                <a:srgbClr val="7894AF"/>
-              </a:solidFill>
-              <a:latin typeface="Aptos" charset="0"/>
-              <a:cs typeface="Aptos" charset="0"/>
-            </a:endParaRPr>
-          </a:p>
-        </p:txBody>
-      </p:sp>
-      <p:sp>
-        <p:nvSpPr>
-          <p:cNvPr id="47" name="文本框 46"/>
-          <p:cNvSpPr txBox="1"/>
-          <p:nvPr/>
-        </p:nvSpPr>
-        <p:spPr>
-          <a:xfrm>
-            <a:off x="11493500" y="6578600"/>
-            <a:ext cx="152400" cy="322580"/>
-          </a:xfrm>
-          <a:prstGeom prst="rect">
-            <a:avLst/>
-          </a:prstGeom>
-          <a:noFill/>
-        </p:spPr>
-        <p:txBody>
-          <a:bodyPr wrap="square" lIns="0" tIns="0" rIns="0" rtlCol="0" anchor="t">
-            <a:normAutofit/>
-          </a:bodyPr>
-          <a:p>
-            <a:pPr algn="r"/>
-            <a:r>
-              <a:rPr lang="en-US" altLang="en-US" sz="835">
-                <a:solidFill>
-                  <a:srgbClr val="7894AF"/>
-                </a:solidFill>
-                <a:latin typeface="Aptos" charset="0"/>
-                <a:cs typeface="Aptos" charset="0"/>
-              </a:rPr>
-              <a:t>2</a:t>
-            </a:r>
-            <a:endParaRPr lang="en-US" altLang="en-US" sz="835">
-              <a:solidFill>
-                <a:srgbClr val="7894AF"/>
-              </a:solidFill>
-              <a:latin typeface="Aptos" charset="0"/>
-              <a:cs typeface="Aptos" charset="0"/>
-            </a:endParaRPr>
-          </a:p>
-        </p:txBody>
-      </p:sp>
-      <p:sp>
-        <p:nvSpPr>
-          <p:cNvPr id="48" name="文本框 47"/>
-          <p:cNvSpPr txBox="1"/>
-          <p:nvPr/>
-        </p:nvSpPr>
-        <p:spPr>
-          <a:xfrm>
-            <a:off x="622300" y="355600"/>
-            <a:ext cx="4318000" cy="322580"/>
-          </a:xfrm>
-          <a:prstGeom prst="rect">
-            <a:avLst/>
-          </a:prstGeom>
-          <a:noFill/>
-        </p:spPr>
-        <p:txBody>
-          <a:bodyPr wrap="square" lIns="0" tIns="0" rIns="0" rtlCol="0" anchor="t">
-            <a:normAutofit/>
-          </a:bodyPr>
-          <a:p>
-            <a:pPr algn="l"/>
-            <a:r>
-              <a:rPr lang="en-US" altLang="en-US" sz="945" b="1" spc="150">
-                <a:solidFill>
-                  <a:srgbClr val="24D5FF"/>
-                </a:solidFill>
-                <a:latin typeface="Aptos" charset="0"/>
-                <a:cs typeface="Aptos" charset="0"/>
-              </a:rPr>
-              <a:t>02  /  </a:t>
-            </a:r>
-            <a:r>
-              <a:rPr lang="zh-CN" altLang="en-US" sz="945" b="1" spc="150">
-                <a:solidFill>
-                  <a:srgbClr val="24D5FF"/>
-                </a:solidFill>
-                <a:latin typeface="Aptos" charset="0"/>
-                <a:cs typeface="Aptos" charset="0"/>
-              </a:rPr>
-              <a:t>本项目亮点</a:t>
-            </a:r>
-            <a:endParaRPr lang="zh-CN" altLang="en-US" sz="945" b="1" spc="150">
-              <a:solidFill>
-                <a:srgbClr val="24D5FF"/>
-              </a:solidFill>
-              <a:latin typeface="Aptos" charset="0"/>
-              <a:cs typeface="Aptos" charset="0"/>
-            </a:endParaRPr>
-          </a:p>
-        </p:txBody>
-      </p:sp>
-      <p:sp>
-        <p:nvSpPr>
-          <p:cNvPr id="49" name="文本框 48"/>
-          <p:cNvSpPr txBox="1"/>
-          <p:nvPr/>
-        </p:nvSpPr>
-        <p:spPr>
-          <a:xfrm>
-            <a:off x="609600" y="660400"/>
-            <a:ext cx="10972800" cy="322580"/>
-          </a:xfrm>
-          <a:prstGeom prst="rect">
-            <a:avLst/>
-          </a:prstGeom>
-          <a:noFill/>
-        </p:spPr>
-        <p:txBody>
-          <a:bodyPr wrap="square" lIns="0" tIns="0" rIns="0" rtlCol="0" anchor="t">
-            <a:noAutofit/>
-          </a:bodyPr>
-          <a:p>
-            <a:pPr algn="l"/>
-            <a:r>
-              <a:rPr lang="zh-CN" altLang="en-US" sz="2300" b="1">
-                <a:solidFill>
-                  <a:srgbClr val="F4F8FC"/>
-                </a:solidFill>
-                <a:latin typeface="微软雅黑" panose="020B0503020204020204" charset="-122"/>
-                <a:ea typeface="微软雅黑" panose="020B0503020204020204" charset="-122"/>
-              </a:rPr>
-              <a:t>把确权、融资、审计与兑付做成可验证闭环</a:t>
-            </a:r>
-            <a:endParaRPr lang="zh-CN" altLang="en-US" sz="2300" b="1">
-              <a:solidFill>
-                <a:srgbClr val="F4F8FC"/>
-              </a:solidFill>
-              <a:latin typeface="微软雅黑" panose="020B0503020204020204" charset="-122"/>
-              <a:ea typeface="微软雅黑" panose="020B0503020204020204" charset="-122"/>
-            </a:endParaRPr>
-          </a:p>
-        </p:txBody>
-      </p:sp>
-      <p:sp>
-        <p:nvSpPr>
-          <p:cNvPr id="50" name="文本框 49"/>
-          <p:cNvSpPr txBox="1"/>
-          <p:nvPr/>
-        </p:nvSpPr>
-        <p:spPr>
-          <a:xfrm>
-            <a:off x="622300" y="1282700"/>
-            <a:ext cx="10795000" cy="322580"/>
-          </a:xfrm>
-          <a:prstGeom prst="rect">
-            <a:avLst/>
-          </a:prstGeom>
-          <a:noFill/>
-        </p:spPr>
-        <p:txBody>
-          <a:bodyPr wrap="square" lIns="0" tIns="0" rIns="0" rtlCol="0" anchor="t">
-            <a:normAutofit/>
-          </a:bodyPr>
-          <a:p>
-            <a:pPr algn="l"/>
-            <a:r>
-              <a:rPr lang="en-US" altLang="en-US" sz="1165">
-                <a:solidFill>
-                  <a:srgbClr val="C7D7E8"/>
-                </a:solidFill>
-                <a:latin typeface="微软雅黑" panose="020B0503020204020204" charset="-122"/>
-                <a:ea typeface="微软雅黑" panose="020B0503020204020204" charset="-122"/>
-                <a:cs typeface="微软雅黑" panose="020B0503020204020204" charset="-122"/>
-              </a:rPr>
-              <a:t>Creditcoin CC3 </a:t>
-            </a:r>
-            <a:r>
-              <a:rPr lang="zh-CN" altLang="en-US" sz="1165">
-                <a:solidFill>
-                  <a:srgbClr val="C7D7E8"/>
-                </a:solidFill>
-                <a:latin typeface="微软雅黑" panose="020B0503020204020204" charset="-122"/>
-                <a:ea typeface="微软雅黑" panose="020B0503020204020204" charset="-122"/>
-                <a:cs typeface="微软雅黑" panose="020B0503020204020204" charset="-122"/>
-              </a:rPr>
-              <a:t>测试网封闭式</a:t>
-            </a:r>
-            <a:r>
-              <a:rPr lang="en-US" altLang="zh-CN" sz="1165">
-                <a:solidFill>
-                  <a:srgbClr val="C7D7E8"/>
-                </a:solidFill>
-                <a:latin typeface="微软雅黑" panose="020B0503020204020204" charset="-122"/>
-                <a:ea typeface="微软雅黑" panose="020B0503020204020204" charset="-122"/>
-                <a:cs typeface="微软雅黑" panose="020B0503020204020204" charset="-122"/>
-              </a:rPr>
-              <a:t> MVP · </a:t>
-            </a:r>
-            <a:r>
-              <a:rPr lang="zh-CN" altLang="en-US" sz="1165">
-                <a:solidFill>
-                  <a:srgbClr val="C7D7E8"/>
-                </a:solidFill>
-                <a:latin typeface="微软雅黑" panose="020B0503020204020204" charset="-122"/>
-                <a:ea typeface="微软雅黑" panose="020B0503020204020204" charset="-122"/>
-                <a:cs typeface="微软雅黑" panose="020B0503020204020204" charset="-122"/>
-              </a:rPr>
-              <a:t>链上状态驱动</a:t>
-            </a:r>
-            <a:r>
-              <a:rPr lang="en-US" altLang="zh-CN" sz="1165">
-                <a:solidFill>
-                  <a:srgbClr val="C7D7E8"/>
-                </a:solidFill>
-                <a:latin typeface="微软雅黑" panose="020B0503020204020204" charset="-122"/>
-                <a:ea typeface="微软雅黑" panose="020B0503020204020204" charset="-122"/>
-                <a:cs typeface="微软雅黑" panose="020B0503020204020204" charset="-122"/>
-              </a:rPr>
-              <a:t> · </a:t>
-            </a:r>
-            <a:r>
-              <a:rPr lang="zh-CN" altLang="en-US" sz="1165">
-                <a:solidFill>
-                  <a:srgbClr val="C7D7E8"/>
-                </a:solidFill>
-                <a:latin typeface="微软雅黑" panose="020B0503020204020204" charset="-122"/>
-                <a:ea typeface="微软雅黑" panose="020B0503020204020204" charset="-122"/>
-                <a:cs typeface="微软雅黑" panose="020B0503020204020204" charset="-122"/>
-              </a:rPr>
-              <a:t>异步证明不阻塞核心流程。</a:t>
-            </a:r>
-            <a:endParaRPr lang="zh-CN" altLang="en-US" sz="1165">
-              <a:solidFill>
-                <a:srgbClr val="C7D7E8"/>
-              </a:solidFill>
-              <a:latin typeface="微软雅黑" panose="020B0503020204020204" charset="-122"/>
-              <a:ea typeface="微软雅黑" panose="020B0503020204020204" charset="-122"/>
-              <a:cs typeface="微软雅黑" panose="020B0503020204020204" charset="-122"/>
-            </a:endParaRPr>
-          </a:p>
-        </p:txBody>
-      </p:sp>
-      <p:sp>
-        <p:nvSpPr>
-          <p:cNvPr id="51" name="圆角矩形 50"/>
-          <p:cNvSpPr/>
-          <p:nvPr/>
-        </p:nvSpPr>
-        <p:spPr>
-          <a:xfrm>
-            <a:off x="609600" y="1816100"/>
-            <a:ext cx="2768600" cy="1600200"/>
-          </a:xfrm>
-          <a:prstGeom prst="roundRect">
-            <a:avLst/>
-          </a:prstGeom>
-          <a:solidFill>
-            <a:srgbClr val="0D2037"/>
-          </a:solidFill>
-          <a:ln w="12700">
-            <a:solidFill>
-              <a:srgbClr val="24D5FF">
-                <a:alpha val="52000"/>
-              </a:srgbClr>
-            </a:solidFill>
-          </a:ln>
+          <a:extLst>
+            <a:ext uri="{91240B29-F687-4F45-9708-019B960494DF}">
+              <a14:hiddenLine xmlns:a14="http://schemas.microsoft.com/office/drawing/2010/main" w="12700" cap="flat" cmpd="sng" algn="ctr">
+                <a:solidFill>
+                  <a:schemeClr val="accent1">
+                    <a:lumMod val="75000"/>
+                  </a:schemeClr>
+                </a:solidFill>
+                <a:prstDash val="solid"/>
+                <a:miter lim="800000"/>
+                <a:headEnd/>
+                <a:tailEnd/>
+              </a14:hiddenLine>
+            </a:ext>
+          </a:extLst>
         </p:spPr>
         <p:style>
           <a:lnRef idx="2">
@@ -10405,255 +10541,43 @@
       </p:sp>
       <p:sp>
         <p:nvSpPr>
-          <p:cNvPr id="52" name="文本框 51"/>
-          <p:cNvSpPr txBox="1"/>
-          <p:nvPr/>
-        </p:nvSpPr>
-        <p:spPr>
-          <a:xfrm>
-            <a:off x="787400" y="1993900"/>
-            <a:ext cx="431800" cy="322580"/>
-          </a:xfrm>
-          <a:prstGeom prst="rect">
-            <a:avLst/>
-          </a:prstGeom>
-          <a:noFill/>
-        </p:spPr>
-        <p:txBody>
-          <a:bodyPr wrap="square" lIns="0" tIns="0" rIns="0" rtlCol="0" anchor="t">
-            <a:normAutofit fontScale="90000"/>
-          </a:bodyPr>
-          <a:p>
-            <a:pPr algn="l"/>
-            <a:r>
-              <a:rPr lang="en-US" altLang="en-US" sz="1890" b="1">
-                <a:solidFill>
-                  <a:srgbClr val="24D5FF"/>
-                </a:solidFill>
-                <a:latin typeface="Aptos Display" charset="0"/>
-                <a:cs typeface="Aptos Display" charset="0"/>
-              </a:rPr>
-              <a:t>01</a:t>
-            </a:r>
-            <a:endParaRPr lang="en-US" altLang="en-US" sz="1890" b="1">
-              <a:solidFill>
-                <a:srgbClr val="24D5FF"/>
-              </a:solidFill>
-              <a:latin typeface="Aptos Display" charset="0"/>
-              <a:cs typeface="Aptos Display" charset="0"/>
-            </a:endParaRPr>
-          </a:p>
-        </p:txBody>
-      </p:sp>
-      <p:sp>
-        <p:nvSpPr>
-          <p:cNvPr id="53" name="文本框 52"/>
-          <p:cNvSpPr txBox="1"/>
-          <p:nvPr/>
-        </p:nvSpPr>
-        <p:spPr>
-          <a:xfrm>
-            <a:off x="1308100" y="2044700"/>
-            <a:ext cx="1879600" cy="322580"/>
-          </a:xfrm>
-          <a:prstGeom prst="rect">
-            <a:avLst/>
-          </a:prstGeom>
-          <a:noFill/>
-        </p:spPr>
-        <p:txBody>
-          <a:bodyPr wrap="square" lIns="0" tIns="0" rIns="0" rtlCol="0" anchor="t">
-            <a:normAutofit/>
-          </a:bodyPr>
-          <a:p>
-            <a:pPr algn="l"/>
-            <a:r>
-              <a:rPr lang="en-US" altLang="en-US" sz="800" b="1" spc="70">
-                <a:solidFill>
-                  <a:srgbClr val="7894AF"/>
-                </a:solidFill>
-                <a:latin typeface="Aptos" charset="0"/>
-                <a:cs typeface="Aptos" charset="0"/>
-              </a:rPr>
-              <a:t>DATA READY</a:t>
-            </a:r>
-            <a:endParaRPr lang="en-US" altLang="en-US" sz="800" b="1" spc="70">
-              <a:solidFill>
-                <a:srgbClr val="7894AF"/>
-              </a:solidFill>
-              <a:latin typeface="Aptos" charset="0"/>
-              <a:cs typeface="Aptos" charset="0"/>
-            </a:endParaRPr>
-          </a:p>
-        </p:txBody>
-      </p:sp>
-      <p:sp>
-        <p:nvSpPr>
-          <p:cNvPr id="54" name="文本框 53"/>
-          <p:cNvSpPr txBox="1"/>
-          <p:nvPr/>
-        </p:nvSpPr>
-        <p:spPr>
-          <a:xfrm>
-            <a:off x="787400" y="2451100"/>
-            <a:ext cx="2413000" cy="322580"/>
-          </a:xfrm>
-          <a:prstGeom prst="rect">
-            <a:avLst/>
-          </a:prstGeom>
-          <a:noFill/>
-        </p:spPr>
-        <p:txBody>
-          <a:bodyPr wrap="square" lIns="0" tIns="0" rIns="0" rtlCol="0" anchor="t">
-            <a:normAutofit/>
-          </a:bodyPr>
-          <a:p>
-            <a:pPr algn="l"/>
-            <a:r>
-              <a:rPr lang="en-US" altLang="en-US" sz="1345" b="1">
-                <a:solidFill>
-                  <a:srgbClr val="F4F8FC"/>
-                </a:solidFill>
-                <a:latin typeface="微软雅黑" panose="020B0503020204020204" charset="-122"/>
-                <a:ea typeface="微软雅黑" panose="020B0503020204020204" charset="-122"/>
-                <a:cs typeface="微软雅黑" panose="020B0503020204020204" charset="-122"/>
-              </a:rPr>
-              <a:t>AI </a:t>
-            </a:r>
-            <a:r>
-              <a:rPr lang="zh-CN" altLang="en-US" sz="1345" b="1">
-                <a:solidFill>
-                  <a:srgbClr val="F4F8FC"/>
-                </a:solidFill>
-                <a:latin typeface="微软雅黑" panose="020B0503020204020204" charset="-122"/>
-                <a:ea typeface="微软雅黑" panose="020B0503020204020204" charset="-122"/>
-                <a:cs typeface="微软雅黑" panose="020B0503020204020204" charset="-122"/>
-              </a:rPr>
-              <a:t>辅助字段提取</a:t>
-            </a:r>
-            <a:endParaRPr lang="zh-CN" altLang="en-US" sz="1345" b="1">
-              <a:solidFill>
-                <a:srgbClr val="F4F8FC"/>
-              </a:solidFill>
-              <a:latin typeface="微软雅黑" panose="020B0503020204020204" charset="-122"/>
-              <a:ea typeface="微软雅黑" panose="020B0503020204020204" charset="-122"/>
-              <a:cs typeface="微软雅黑" panose="020B0503020204020204" charset="-122"/>
-            </a:endParaRPr>
-          </a:p>
-        </p:txBody>
-      </p:sp>
-      <p:sp>
-        <p:nvSpPr>
-          <p:cNvPr id="55" name="文本框 54"/>
-          <p:cNvSpPr txBox="1"/>
-          <p:nvPr/>
-        </p:nvSpPr>
-        <p:spPr>
-          <a:xfrm>
-            <a:off x="787400" y="2857500"/>
-            <a:ext cx="2413000" cy="322580"/>
-          </a:xfrm>
-          <a:prstGeom prst="rect">
-            <a:avLst/>
-          </a:prstGeom>
-          <a:noFill/>
-        </p:spPr>
-        <p:txBody>
-          <a:bodyPr wrap="square" lIns="0" tIns="0" rIns="0" rtlCol="0" anchor="t">
-            <a:normAutofit fontScale="40000"/>
-          </a:bodyPr>
-          <a:p>
-            <a:pPr algn="l"/>
-            <a:r>
-              <a:rPr lang="zh-CN" altLang="en-US" sz="2065">
-                <a:solidFill>
-                  <a:srgbClr val="C7D7E8"/>
-                </a:solidFill>
-                <a:latin typeface="微软雅黑" panose="020B0503020204020204" charset="-122"/>
-                <a:ea typeface="微软雅黑" panose="020B0503020204020204" charset="-122"/>
-                <a:cs typeface="微软雅黑" panose="020B0503020204020204" charset="-122"/>
-              </a:rPr>
-              <a:t>合同</a:t>
-            </a:r>
-            <a:r>
-              <a:rPr lang="en-US" altLang="zh-CN" sz="2065">
-                <a:solidFill>
-                  <a:srgbClr val="C7D7E8"/>
-                </a:solidFill>
-                <a:latin typeface="微软雅黑" panose="020B0503020204020204" charset="-122"/>
-                <a:ea typeface="微软雅黑" panose="020B0503020204020204" charset="-122"/>
-                <a:cs typeface="微软雅黑" panose="020B0503020204020204" charset="-122"/>
-              </a:rPr>
-              <a:t> + </a:t>
-            </a:r>
-            <a:r>
-              <a:rPr lang="zh-CN" altLang="en-US" sz="2065">
-                <a:solidFill>
-                  <a:srgbClr val="C7D7E8"/>
-                </a:solidFill>
-                <a:latin typeface="微软雅黑" panose="020B0503020204020204" charset="-122"/>
-                <a:ea typeface="微软雅黑" panose="020B0503020204020204" charset="-122"/>
-                <a:cs typeface="微软雅黑" panose="020B0503020204020204" charset="-122"/>
-              </a:rPr>
-              <a:t>发票</a:t>
-            </a:r>
-            <a:r>
-              <a:rPr lang="en-US" altLang="zh-CN" sz="2065">
-                <a:solidFill>
-                  <a:srgbClr val="C7D7E8"/>
-                </a:solidFill>
-                <a:latin typeface="微软雅黑" panose="020B0503020204020204" charset="-122"/>
-                <a:ea typeface="微软雅黑" panose="020B0503020204020204" charset="-122"/>
-                <a:cs typeface="微软雅黑" panose="020B0503020204020204" charset="-122"/>
-              </a:rPr>
-              <a:t> → </a:t>
-            </a:r>
-            <a:r>
-              <a:rPr lang="zh-CN" altLang="en-US" sz="2065">
-                <a:solidFill>
-                  <a:srgbClr val="C7D7E8"/>
-                </a:solidFill>
-                <a:latin typeface="微软雅黑" panose="020B0503020204020204" charset="-122"/>
-                <a:ea typeface="微软雅黑" panose="020B0503020204020204" charset="-122"/>
-                <a:cs typeface="微软雅黑" panose="020B0503020204020204" charset="-122"/>
-              </a:rPr>
-              <a:t>买方、供应商、金额与到期日；人工复核后创建凭证。</a:t>
-            </a:r>
-            <a:endParaRPr lang="zh-CN" altLang="en-US" sz="2065">
-              <a:solidFill>
-                <a:srgbClr val="C7D7E8"/>
-              </a:solidFill>
-              <a:latin typeface="微软雅黑" panose="020B0503020204020204" charset="-122"/>
-              <a:ea typeface="微软雅黑" panose="020B0503020204020204" charset="-122"/>
-              <a:cs typeface="微软雅黑" panose="020B0503020204020204" charset="-122"/>
-            </a:endParaRPr>
-          </a:p>
-        </p:txBody>
-      </p:sp>
-      <p:sp>
-        <p:nvSpPr>
-          <p:cNvPr id="56" name="圆角矩形 55"/>
+          <p:cNvPr id="45" name="椭圆 44"/>
           <p:cNvSpPr/>
           <p:nvPr/>
         </p:nvSpPr>
         <p:spPr>
           <a:xfrm>
-            <a:off x="3657600" y="1816100"/>
-            <a:ext cx="2768600" cy="1600200"/>
-          </a:xfrm>
-          <a:prstGeom prst="roundRect">
+            <a:off x="-1498600" y="5194300"/>
+            <a:ext cx="2997200" cy="2997200"/>
+          </a:xfrm>
+          <a:prstGeom prst="ellipse">
             <a:avLst/>
           </a:prstGeom>
           <a:solidFill>
-            <a:srgbClr val="0D2037"/>
+            <a:srgbClr val="24D5FF">
+              <a:alpha val="6000"/>
+            </a:srgbClr>
           </a:solidFill>
-          <a:ln w="12700">
-            <a:solidFill>
-              <a:srgbClr val="FFCB66">
-                <a:alpha val="52000"/>
-              </a:srgbClr>
-            </a:solidFill>
+          <a:ln w="12700" cap="flat" cmpd="sng" algn="ctr">
+            <a:noFill/>
+            <a:prstDash val="solid"/>
+            <a:miter lim="800000"/>
           </a:ln>
+          <a:extLst>
+            <a:ext uri="{91240B29-F687-4F45-9708-019B960494DF}">
+              <a14:hiddenLine xmlns:a14="http://schemas.microsoft.com/office/drawing/2010/main" w="12700" cap="flat" cmpd="sng" algn="ctr">
+                <a:solidFill>
+                  <a:schemeClr val="accent1">
+                    <a:lumMod val="75000"/>
+                  </a:schemeClr>
+                </a:solidFill>
+                <a:prstDash val="solid"/>
+                <a:miter lim="800000"/>
+                <a:headEnd/>
+                <a:tailEnd/>
+              </a14:hiddenLine>
+            </a:ext>
+          </a:extLst>
         </p:spPr>
         <p:style>
           <a:lnRef idx="2">
@@ -10679,16 +10603,51 @@
           </a:p>
         </p:txBody>
       </p:sp>
-      <p:sp>
-        <p:nvSpPr>
-          <p:cNvPr id="57" name="文本框 56"/>
+      <p:cxnSp>
+        <p:nvCxnSpPr>
+          <p:cNvPr id="46" name="直接连接符 45"/>
+          <p:cNvCxnSpPr/>
+          <p:nvPr/>
+        </p:nvCxnSpPr>
+        <p:spPr>
+          <a:xfrm>
+            <a:off x="609600" y="6502400"/>
+            <a:ext cx="10972800" cy="635"/>
+          </a:xfrm>
+          <a:prstGeom prst="line">
+            <a:avLst/>
+          </a:prstGeom>
+          <a:ln w="9525">
+            <a:solidFill>
+              <a:srgbClr val="244666"/>
+            </a:solidFill>
+          </a:ln>
+        </p:spPr>
+        <p:style>
+          <a:lnRef idx="2">
+            <a:schemeClr val="accent1"/>
+          </a:lnRef>
+          <a:fillRef idx="0">
+            <a:srgbClr val="FFFFFF"/>
+          </a:fillRef>
+          <a:effectRef idx="0">
+            <a:srgbClr val="FFFFFF"/>
+          </a:effectRef>
+          <a:fontRef idx="minor">
+            <a:schemeClr val="tx1"/>
+          </a:fontRef>
+        </p:style>
+      </p:cxnSp>
+      <p:sp>
+        <p:nvSpPr>
+          <p:cNvPr id="47" name="文本框 46"/>
           <p:cNvSpPr txBox="1"/>
           <p:nvPr/>
         </p:nvSpPr>
         <p:spPr>
           <a:xfrm>
-            <a:off x="3835400" y="1993900"/>
-            <a:ext cx="431800" cy="322580"/>
+            <a:off x="609600" y="6578600"/>
+            <a:ext cx="1587500" cy="322580"/>
           </a:xfrm>
           <a:prstGeom prst="rect">
             <a:avLst/>
@@ -10696,64 +10655,30 @@
           <a:noFill/>
         </p:spPr>
         <p:txBody>
-          <a:bodyPr wrap="square" lIns="0" tIns="0" rIns="0" rtlCol="0" anchor="t">
-            <a:normAutofit fontScale="90000"/>
+          <a:bodyPr wrap="square" lIns="0" tIns="0" rIns="0" rtlCol="0" anchor="ctr">
+            <a:noAutofit/>
           </a:bodyPr>
           <a:p>
-            <a:pPr algn="l"/>
-            <a:r>
-              <a:rPr lang="en-US" altLang="en-US" sz="1890" b="1">
-                <a:solidFill>
-                  <a:srgbClr val="FFCB66"/>
-                </a:solidFill>
-                <a:latin typeface="Aptos Display" charset="0"/>
-                <a:cs typeface="Aptos Display" charset="0"/>
-              </a:rPr>
-              <a:t>02</a:t>
-            </a:r>
-            <a:endParaRPr lang="en-US" altLang="en-US" sz="1890" b="1">
-              <a:solidFill>
-                <a:srgbClr val="FFCB66"/>
-              </a:solidFill>
-              <a:latin typeface="Aptos Display" charset="0"/>
-              <a:cs typeface="Aptos Display" charset="0"/>
-            </a:endParaRPr>
-          </a:p>
-        </p:txBody>
-      </p:sp>
-      <p:sp>
-        <p:nvSpPr>
-          <p:cNvPr id="58" name="文本框 57"/>
-          <p:cNvSpPr txBox="1"/>
-          <p:nvPr/>
-        </p:nvSpPr>
-        <p:spPr>
-          <a:xfrm>
-            <a:off x="4356100" y="2044700"/>
-            <a:ext cx="1879600" cy="322580"/>
-          </a:xfrm>
-          <a:prstGeom prst="rect">
-            <a:avLst/>
-          </a:prstGeom>
-          <a:noFill/>
-        </p:spPr>
-        <p:txBody>
-          <a:bodyPr wrap="square" lIns="0" tIns="0" rIns="0" rtlCol="0" anchor="t">
-            <a:normAutofit/>
-          </a:bodyPr>
-          <a:p>
-            <a:pPr algn="l"/>
-            <a:r>
-              <a:rPr lang="en-US" altLang="en-US" sz="900" b="1" spc="70">
+            <a:pPr indent="0" algn="l">
+              <a:spcBef>
+                <a:spcPts val="0"/>
+              </a:spcBef>
+              <a:spcAft>
+                <a:spcPts val="0"/>
+              </a:spcAft>
+              <a:buNone/>
+            </a:pPr>
+            <a:r>
+              <a:rPr lang="en-US" altLang="en-US" sz="750" b="1">
                 <a:solidFill>
                   <a:srgbClr val="7894AF"/>
                 </a:solidFill>
                 <a:latin typeface="Aptos" charset="0"/>
                 <a:cs typeface="Aptos" charset="0"/>
               </a:rPr>
-              <a:t>SIGNED, NOT LOCKED</a:t>
-            </a:r>
-            <a:endParaRPr lang="en-US" altLang="en-US" sz="900" b="1" spc="70">
+              <a:t>SUPPLYCHAINX402</a:t>
+            </a:r>
+            <a:endParaRPr lang="en-US" altLang="en-US" sz="750" b="1">
               <a:solidFill>
                 <a:srgbClr val="7894AF"/>
               </a:solidFill>
@@ -10765,14 +10690,14 @@
       </p:sp>
       <p:sp>
         <p:nvSpPr>
-          <p:cNvPr id="59" name="文本框 58"/>
+          <p:cNvPr id="48" name="文本框 47"/>
           <p:cNvSpPr txBox="1"/>
           <p:nvPr/>
         </p:nvSpPr>
         <p:spPr>
           <a:xfrm>
-            <a:off x="3835400" y="2451100"/>
-            <a:ext cx="2413000" cy="322580"/>
+            <a:off x="9448800" y="6578600"/>
+            <a:ext cx="1879600" cy="322580"/>
           </a:xfrm>
           <a:prstGeom prst="rect">
             <a:avLst/>
@@ -10780,65 +10705,209 @@
           <a:noFill/>
         </p:spPr>
         <p:txBody>
-          <a:bodyPr wrap="square" lIns="0" tIns="0" rIns="0" rtlCol="0" anchor="t">
-            <a:normAutofit/>
+          <a:bodyPr wrap="square" lIns="0" tIns="0" rIns="0" rtlCol="0" anchor="ctr">
+            <a:noAutofit/>
           </a:bodyPr>
           <a:p>
-            <a:pPr algn="l"/>
-            <a:r>
-              <a:rPr lang="zh-CN" altLang="en-US" sz="1345" b="1">
+            <a:pPr indent="0" algn="r">
+              <a:spcBef>
+                <a:spcPts val="0"/>
+              </a:spcBef>
+              <a:spcAft>
+                <a:spcPts val="0"/>
+              </a:spcAft>
+              <a:buNone/>
+            </a:pPr>
+            <a:r>
+              <a:rPr lang="en-US" altLang="en-US" sz="750" b="1">
+                <a:solidFill>
+                  <a:srgbClr val="7894AF"/>
+                </a:solidFill>
+                <a:latin typeface="Aptos" charset="0"/>
+                <a:cs typeface="Aptos" charset="0"/>
+              </a:rPr>
+              <a:t>ATTESTFLOW · CC3 MVP</a:t>
+            </a:r>
+            <a:endParaRPr lang="en-US" altLang="en-US" sz="750" b="1">
+              <a:solidFill>
+                <a:srgbClr val="7894AF"/>
+              </a:solidFill>
+              <a:latin typeface="Aptos" charset="0"/>
+              <a:cs typeface="Aptos" charset="0"/>
+            </a:endParaRPr>
+          </a:p>
+        </p:txBody>
+      </p:sp>
+      <p:sp>
+        <p:nvSpPr>
+          <p:cNvPr id="49" name="文本框 48"/>
+          <p:cNvSpPr txBox="1"/>
+          <p:nvPr/>
+        </p:nvSpPr>
+        <p:spPr>
+          <a:xfrm>
+            <a:off x="11493500" y="6578600"/>
+            <a:ext cx="152400" cy="322580"/>
+          </a:xfrm>
+          <a:prstGeom prst="rect">
+            <a:avLst/>
+          </a:prstGeom>
+          <a:noFill/>
+        </p:spPr>
+        <p:txBody>
+          <a:bodyPr wrap="square" lIns="0" tIns="0" rIns="0" rtlCol="0" anchor="ctr">
+            <a:noAutofit/>
+          </a:bodyPr>
+          <a:p>
+            <a:pPr indent="0" algn="r">
+              <a:spcBef>
+                <a:spcPts val="0"/>
+              </a:spcBef>
+              <a:spcAft>
+                <a:spcPts val="0"/>
+              </a:spcAft>
+              <a:buNone/>
+            </a:pPr>
+            <a:r>
+              <a:rPr lang="en-US" altLang="en-US" sz="750">
+                <a:solidFill>
+                  <a:srgbClr val="7894AF"/>
+                </a:solidFill>
+                <a:latin typeface="Aptos" charset="0"/>
+                <a:cs typeface="Aptos" charset="0"/>
+              </a:rPr>
+              <a:t>2</a:t>
+            </a:r>
+            <a:endParaRPr lang="en-US" altLang="en-US" sz="750">
+              <a:solidFill>
+                <a:srgbClr val="7894AF"/>
+              </a:solidFill>
+              <a:latin typeface="Aptos" charset="0"/>
+              <a:cs typeface="Aptos" charset="0"/>
+            </a:endParaRPr>
+          </a:p>
+        </p:txBody>
+      </p:sp>
+      <p:sp>
+        <p:nvSpPr>
+          <p:cNvPr id="50" name="文本框 49"/>
+          <p:cNvSpPr txBox="1"/>
+          <p:nvPr/>
+        </p:nvSpPr>
+        <p:spPr>
+          <a:xfrm>
+            <a:off x="622300" y="355600"/>
+            <a:ext cx="4318000" cy="360680"/>
+          </a:xfrm>
+          <a:prstGeom prst="rect">
+            <a:avLst/>
+          </a:prstGeom>
+          <a:noFill/>
+        </p:spPr>
+        <p:txBody>
+          <a:bodyPr wrap="square" lIns="38100" tIns="38100" rIns="38100" rtlCol="0" anchor="t">
+            <a:noAutofit/>
+          </a:bodyPr>
+          <a:p>
+            <a:pPr indent="0" algn="l">
+              <a:spcBef>
+                <a:spcPts val="0"/>
+              </a:spcBef>
+              <a:spcAft>
+                <a:spcPts val="0"/>
+              </a:spcAft>
+              <a:buNone/>
+            </a:pPr>
+            <a:r>
+              <a:rPr lang="en-US" altLang="en-US" sz="850" b="1" spc="150">
+                <a:solidFill>
+                  <a:srgbClr val="24D5FF"/>
+                </a:solidFill>
+                <a:latin typeface="Aptos" charset="0"/>
+                <a:cs typeface="Aptos" charset="0"/>
+              </a:rPr>
+              <a:t>02  /  </a:t>
+            </a:r>
+            <a:r>
+              <a:rPr lang="zh-CN" altLang="en-US" sz="850" b="1" spc="150">
+                <a:solidFill>
+                  <a:srgbClr val="24D5FF"/>
+                </a:solidFill>
+                <a:latin typeface="Aptos" charset="0"/>
+                <a:cs typeface="Aptos" charset="0"/>
+              </a:rPr>
+              <a:t>本项目亮点</a:t>
+            </a:r>
+            <a:endParaRPr lang="zh-CN" altLang="en-US" sz="850" b="1" spc="150">
+              <a:solidFill>
+                <a:srgbClr val="24D5FF"/>
+              </a:solidFill>
+              <a:latin typeface="Aptos" charset="0"/>
+              <a:cs typeface="Aptos" charset="0"/>
+            </a:endParaRPr>
+          </a:p>
+        </p:txBody>
+      </p:sp>
+      <p:sp>
+        <p:nvSpPr>
+          <p:cNvPr id="51" name="文本框 50"/>
+          <p:cNvSpPr txBox="1"/>
+          <p:nvPr/>
+        </p:nvSpPr>
+        <p:spPr>
+          <a:xfrm>
+            <a:off x="609600" y="660400"/>
+            <a:ext cx="10972800" cy="360680"/>
+          </a:xfrm>
+          <a:prstGeom prst="rect">
+            <a:avLst/>
+          </a:prstGeom>
+          <a:noFill/>
+        </p:spPr>
+        <p:txBody>
+          <a:bodyPr wrap="square" lIns="38100" tIns="38100" rIns="38100" rtlCol="0" anchor="t">
+            <a:noAutofit/>
+          </a:bodyPr>
+          <a:p>
+            <a:pPr indent="0" algn="l">
+              <a:spcBef>
+                <a:spcPts val="0"/>
+              </a:spcBef>
+              <a:spcAft>
+                <a:spcPts val="0"/>
+              </a:spcAft>
+              <a:buNone/>
+            </a:pPr>
+            <a:r>
+              <a:rPr lang="zh-CN" altLang="en-US" sz="2350" b="1">
                 <a:solidFill>
                   <a:srgbClr val="F4F8FC"/>
                 </a:solidFill>
                 <a:latin typeface="微软雅黑" panose="020B0503020204020204" charset="-122"/>
                 <a:ea typeface="微软雅黑" panose="020B0503020204020204" charset="-122"/>
-                <a:cs typeface="微软雅黑" panose="020B0503020204020204" charset="-122"/>
-              </a:rPr>
-              <a:t>双签确权</a:t>
-            </a:r>
-            <a:r>
-              <a:rPr lang="en-US" altLang="zh-CN" sz="1345" b="1">
-                <a:solidFill>
-                  <a:srgbClr val="F4F8FC"/>
-                </a:solidFill>
-                <a:latin typeface="微软雅黑" panose="020B0503020204020204" charset="-122"/>
-                <a:ea typeface="微软雅黑" panose="020B0503020204020204" charset="-122"/>
-                <a:cs typeface="微软雅黑" panose="020B0503020204020204" charset="-122"/>
-              </a:rPr>
-              <a:t> · </a:t>
-            </a:r>
-            <a:r>
-              <a:rPr lang="zh-CN" altLang="en-US" sz="1345" b="1">
-                <a:solidFill>
-                  <a:srgbClr val="F4F8FC"/>
-                </a:solidFill>
-                <a:latin typeface="微软雅黑" panose="020B0503020204020204" charset="-122"/>
-                <a:ea typeface="微软雅黑" panose="020B0503020204020204" charset="-122"/>
-                <a:cs typeface="微软雅黑" panose="020B0503020204020204" charset="-122"/>
-              </a:rPr>
-              <a:t>不锁款</a:t>
-            </a:r>
-            <a:endParaRPr lang="zh-CN" altLang="en-US" sz="1345" b="1">
+              </a:rPr>
+              <a:t>把确权、融资、审计与兑付做成可验证闭环</a:t>
+            </a:r>
+            <a:endParaRPr lang="zh-CN" altLang="en-US" sz="2350" b="1">
               <a:solidFill>
                 <a:srgbClr val="F4F8FC"/>
               </a:solidFill>
               <a:latin typeface="微软雅黑" panose="020B0503020204020204" charset="-122"/>
               <a:ea typeface="微软雅黑" panose="020B0503020204020204" charset="-122"/>
-              <a:cs typeface="微软雅黑" panose="020B0503020204020204" charset="-122"/>
             </a:endParaRPr>
           </a:p>
         </p:txBody>
       </p:sp>
       <p:sp>
         <p:nvSpPr>
-          <p:cNvPr id="60" name="文本框 59"/>
+          <p:cNvPr id="52" name="文本框 51"/>
           <p:cNvSpPr txBox="1"/>
           <p:nvPr/>
         </p:nvSpPr>
         <p:spPr>
           <a:xfrm>
-            <a:off x="3835400" y="2857500"/>
-            <a:ext cx="2413000" cy="322580"/>
+            <a:off x="622300" y="1282700"/>
+            <a:ext cx="10795000" cy="360680"/>
           </a:xfrm>
           <a:prstGeom prst="rect">
             <a:avLst/>
@@ -10846,13 +10915,21 @@
           <a:noFill/>
         </p:spPr>
         <p:txBody>
-          <a:bodyPr wrap="square" lIns="0" tIns="0" rIns="0" rtlCol="0" anchor="t">
-            <a:normAutofit fontScale="40000"/>
+          <a:bodyPr wrap="square" lIns="38100" tIns="38100" rIns="38100" rtlCol="0" anchor="t">
+            <a:noAutofit/>
           </a:bodyPr>
           <a:p>
-            <a:pPr algn="l"/>
-            <a:r>
-              <a:rPr lang="zh-CN" altLang="en-US" sz="2065">
+            <a:pPr indent="0" algn="l">
+              <a:spcBef>
+                <a:spcPts val="0"/>
+              </a:spcBef>
+              <a:spcAft>
+                <a:spcPts val="0"/>
+              </a:spcAft>
+              <a:buNone/>
+            </a:pPr>
+            <a:r>
+              <a:rPr lang="en-US" altLang="en-US" sz="1050">
                 <a:solidFill>
                   <a:srgbClr val="C7D7E8"/>
                 </a:solidFill>
@@ -10860,10 +10937,10 @@
                 <a:ea typeface="微软雅黑" panose="020B0503020204020204" charset="-122"/>
                 <a:cs typeface="微软雅黑" panose="020B0503020204020204" charset="-122"/>
               </a:rPr>
-              <a:t>服务端独立验签；</a:t>
-            </a:r>
-            <a:r>
-              <a:rPr lang="en-US" altLang="zh-CN" sz="2065">
+              <a:t>Creditcoin CC3 </a:t>
+            </a:r>
+            <a:r>
+              <a:rPr lang="zh-CN" altLang="en-US" sz="1050">
                 <a:solidFill>
                   <a:srgbClr val="C7D7E8"/>
                 </a:solidFill>
@@ -10871,10 +10948,10 @@
                 <a:ea typeface="微软雅黑" panose="020B0503020204020204" charset="-122"/>
                 <a:cs typeface="微软雅黑" panose="020B0503020204020204" charset="-122"/>
               </a:rPr>
-              <a:t>Approved Payable </a:t>
-            </a:r>
-            <a:r>
-              <a:rPr lang="zh-CN" altLang="en-US" sz="2065">
+              <a:t>测试网封闭式</a:t>
+            </a:r>
+            <a:r>
+              <a:rPr lang="en-US" altLang="zh-CN" sz="1050">
                 <a:solidFill>
                   <a:srgbClr val="C7D7E8"/>
                 </a:solidFill>
@@ -10882,10 +10959,10 @@
                 <a:ea typeface="微软雅黑" panose="020B0503020204020204" charset="-122"/>
                 <a:cs typeface="微软雅黑" panose="020B0503020204020204" charset="-122"/>
               </a:rPr>
-              <a:t>与未来</a:t>
-            </a:r>
-            <a:r>
-              <a:rPr lang="en-US" altLang="zh-CN" sz="2065">
+              <a:t> MVP · </a:t>
+            </a:r>
+            <a:r>
+              <a:rPr lang="zh-CN" altLang="en-US" sz="1050">
                 <a:solidFill>
                   <a:srgbClr val="C7D7E8"/>
                 </a:solidFill>
@@ -10893,10 +10970,10 @@
                 <a:ea typeface="微软雅黑" panose="020B0503020204020204" charset="-122"/>
                 <a:cs typeface="微软雅黑" panose="020B0503020204020204" charset="-122"/>
               </a:rPr>
-              <a:t> EIP-3009 </a:t>
-            </a:r>
-            <a:r>
-              <a:rPr lang="zh-CN" altLang="en-US" sz="2065">
+              <a:t>链上状态驱动</a:t>
+            </a:r>
+            <a:r>
+              <a:rPr lang="en-US" altLang="zh-CN" sz="1050">
                 <a:solidFill>
                   <a:srgbClr val="C7D7E8"/>
                 </a:solidFill>
@@ -10904,9 +10981,20 @@
                 <a:ea typeface="微软雅黑" panose="020B0503020204020204" charset="-122"/>
                 <a:cs typeface="微软雅黑" panose="020B0503020204020204" charset="-122"/>
               </a:rPr>
-              <a:t>授权哈希绑定，签名不转账。</a:t>
-            </a:r>
-            <a:endParaRPr lang="zh-CN" altLang="en-US" sz="2065">
+              <a:t> · </a:t>
+            </a:r>
+            <a:r>
+              <a:rPr lang="zh-CN" altLang="en-US" sz="1050">
+                <a:solidFill>
+                  <a:srgbClr val="C7D7E8"/>
+                </a:solidFill>
+                <a:latin typeface="微软雅黑" panose="020B0503020204020204" charset="-122"/>
+                <a:ea typeface="微软雅黑" panose="020B0503020204020204" charset="-122"/>
+                <a:cs typeface="微软雅黑" panose="020B0503020204020204" charset="-122"/>
+              </a:rPr>
+              <a:t>异步证明不阻塞核心流程。</a:t>
+            </a:r>
+            <a:endParaRPr lang="zh-CN" altLang="en-US" sz="1050">
               <a:solidFill>
                 <a:srgbClr val="C7D7E8"/>
               </a:solidFill>
@@ -10919,14 +11007,14 @@
       </p:sp>
       <p:sp>
         <p:nvSpPr>
-          <p:cNvPr id="61" name="圆角矩形 60"/>
+          <p:cNvPr id="53" name="圆角矩形 52"/>
           <p:cNvSpPr/>
           <p:nvPr/>
         </p:nvSpPr>
         <p:spPr>
           <a:xfrm>
-            <a:off x="609600" y="3606800"/>
-            <a:ext cx="2768600" cy="1600200"/>
+            <a:off x="609600" y="1816100"/>
+            <a:ext cx="2768600" cy="1676400"/>
           </a:xfrm>
           <a:prstGeom prst="roundRect">
             <a:avLst/>
@@ -10936,8 +11024,8 @@
           </a:solidFill>
           <a:ln w="12700">
             <a:solidFill>
-              <a:srgbClr val="45F0C5">
-                <a:alpha val="52000"/>
+              <a:srgbClr val="244666">
+                <a:alpha val="88000"/>
               </a:srgbClr>
             </a:solidFill>
           </a:ln>
@@ -10968,13 +11056,13 @@
       </p:sp>
       <p:sp>
         <p:nvSpPr>
-          <p:cNvPr id="62" name="文本框 61"/>
+          <p:cNvPr id="54" name="文本框 53"/>
           <p:cNvSpPr txBox="1"/>
           <p:nvPr/>
         </p:nvSpPr>
         <p:spPr>
           <a:xfrm>
-            <a:off x="787400" y="3784600"/>
+            <a:off x="787400" y="1993900"/>
             <a:ext cx="431800" cy="322580"/>
           </a:xfrm>
           <a:prstGeom prst="rect">
@@ -10983,24 +11071,32 @@
           <a:noFill/>
         </p:spPr>
         <p:txBody>
-          <a:bodyPr wrap="square" lIns="0" tIns="0" rIns="0" rtlCol="0" anchor="t">
-            <a:normAutofit fontScale="90000"/>
+          <a:bodyPr wrap="square" lIns="0" tIns="0" rIns="0" rtlCol="0" anchor="ctr">
+            <a:noAutofit/>
           </a:bodyPr>
           <a:p>
-            <a:pPr algn="l"/>
-            <a:r>
-              <a:rPr lang="en-US" altLang="en-US" sz="1890" b="1">
-                <a:solidFill>
-                  <a:srgbClr val="45F0C5"/>
+            <a:pPr indent="0" algn="l">
+              <a:spcBef>
+                <a:spcPts val="0"/>
+              </a:spcBef>
+              <a:spcAft>
+                <a:spcPts val="0"/>
+              </a:spcAft>
+              <a:buNone/>
+            </a:pPr>
+            <a:r>
+              <a:rPr lang="en-US" altLang="en-US" sz="1700" b="1">
+                <a:solidFill>
+                  <a:srgbClr val="24D5FF"/>
                 </a:solidFill>
                 <a:latin typeface="Aptos Display" charset="0"/>
                 <a:cs typeface="Aptos Display" charset="0"/>
               </a:rPr>
-              <a:t>03</a:t>
-            </a:r>
-            <a:endParaRPr lang="en-US" altLang="en-US" sz="1890" b="1">
+              <a:t>01</a:t>
+            </a:r>
+            <a:endParaRPr lang="en-US" altLang="en-US" sz="1700" b="1">
               <a:solidFill>
-                <a:srgbClr val="45F0C5"/>
+                <a:srgbClr val="24D5FF"/>
               </a:solidFill>
               <a:latin typeface="Aptos Display" charset="0"/>
               <a:cs typeface="Aptos Display" charset="0"/>
@@ -11010,14 +11106,14 @@
       </p:sp>
       <p:sp>
         <p:nvSpPr>
-          <p:cNvPr id="63" name="文本框 62"/>
+          <p:cNvPr id="55" name="文本框 54"/>
           <p:cNvSpPr txBox="1"/>
           <p:nvPr/>
         </p:nvSpPr>
         <p:spPr>
           <a:xfrm>
-            <a:off x="1308100" y="3835400"/>
-            <a:ext cx="1879600" cy="322580"/>
+            <a:off x="1308100" y="2044700"/>
+            <a:ext cx="1879600" cy="335280"/>
           </a:xfrm>
           <a:prstGeom prst="rect">
             <a:avLst/>
@@ -11025,22 +11121,30 @@
           <a:noFill/>
         </p:spPr>
         <p:txBody>
-          <a:bodyPr wrap="square" lIns="0" tIns="0" rIns="0" rtlCol="0" anchor="t">
-            <a:normAutofit/>
+          <a:bodyPr wrap="square" lIns="12700" tIns="12700" rIns="12700" rtlCol="0" anchor="ctr">
+            <a:noAutofit/>
           </a:bodyPr>
           <a:p>
-            <a:pPr algn="l"/>
-            <a:r>
-              <a:rPr lang="en-US" altLang="en-US" sz="1030" b="1" spc="70">
+            <a:pPr indent="0" algn="l">
+              <a:spcBef>
+                <a:spcPts val="0"/>
+              </a:spcBef>
+              <a:spcAft>
+                <a:spcPts val="0"/>
+              </a:spcAft>
+              <a:buNone/>
+            </a:pPr>
+            <a:r>
+              <a:rPr lang="en-US" altLang="en-US" sz="750" b="1" spc="70">
                 <a:solidFill>
                   <a:srgbClr val="7894AF"/>
                 </a:solidFill>
                 <a:latin typeface="Aptos" charset="0"/>
                 <a:cs typeface="Aptos" charset="0"/>
               </a:rPr>
-              <a:t>NATIVE STATE MACHINE</a:t>
-            </a:r>
-            <a:endParaRPr lang="en-US" altLang="en-US" sz="1030" b="1" spc="70">
+              <a:t>DATA READY</a:t>
+            </a:r>
+            <a:endParaRPr lang="en-US" altLang="en-US" sz="750" b="1" spc="70">
               <a:solidFill>
                 <a:srgbClr val="7894AF"/>
               </a:solidFill>
@@ -11052,14 +11156,14 @@
       </p:sp>
       <p:sp>
         <p:nvSpPr>
-          <p:cNvPr id="64" name="文本框 63"/>
+          <p:cNvPr id="56" name="文本框 55"/>
           <p:cNvSpPr txBox="1"/>
           <p:nvPr/>
         </p:nvSpPr>
         <p:spPr>
           <a:xfrm>
-            <a:off x="787400" y="4241800"/>
-            <a:ext cx="2413000" cy="322580"/>
+            <a:off x="787400" y="2425700"/>
+            <a:ext cx="2413000" cy="347980"/>
           </a:xfrm>
           <a:prstGeom prst="rect">
             <a:avLst/>
@@ -11067,41 +11171,62 @@
           <a:noFill/>
         </p:spPr>
         <p:txBody>
-          <a:bodyPr wrap="square" lIns="0" tIns="0" rIns="0" rtlCol="0" anchor="t">
-            <a:normAutofit/>
+          <a:bodyPr wrap="square" lIns="25400" tIns="25400" rIns="25400" rtlCol="0" anchor="t">
+            <a:noAutofit/>
           </a:bodyPr>
           <a:p>
-            <a:pPr algn="l"/>
-            <a:r>
-              <a:rPr lang="zh-CN" altLang="en-US" sz="1345" b="1">
+            <a:pPr indent="0" algn="l">
+              <a:spcBef>
+                <a:spcPts val="0"/>
+              </a:spcBef>
+              <a:spcAft>
+                <a:spcPts val="0"/>
+              </a:spcAft>
+              <a:buNone/>
+            </a:pPr>
+            <a:r>
+              <a:rPr lang="en-US" altLang="en-US" sz="1320" b="1">
                 <a:solidFill>
                   <a:srgbClr val="F4F8FC"/>
                 </a:solidFill>
                 <a:latin typeface="微软雅黑" panose="020B0503020204020204" charset="-122"/>
                 <a:ea typeface="微软雅黑" panose="020B0503020204020204" charset="-122"/>
-              </a:rPr>
-              <a:t>融资状态机上链</a:t>
-            </a:r>
-            <a:endParaRPr lang="zh-CN" altLang="en-US" sz="1345" b="1">
+                <a:cs typeface="微软雅黑" panose="020B0503020204020204" charset="-122"/>
+              </a:rPr>
+              <a:t>AI </a:t>
+            </a:r>
+            <a:r>
+              <a:rPr lang="zh-CN" altLang="en-US" sz="1320" b="1">
+                <a:solidFill>
+                  <a:srgbClr val="F4F8FC"/>
+                </a:solidFill>
+                <a:latin typeface="微软雅黑" panose="020B0503020204020204" charset="-122"/>
+                <a:ea typeface="微软雅黑" panose="020B0503020204020204" charset="-122"/>
+                <a:cs typeface="微软雅黑" panose="020B0503020204020204" charset="-122"/>
+              </a:rPr>
+              <a:t>辅助字段提取</a:t>
+            </a:r>
+            <a:endParaRPr lang="zh-CN" altLang="en-US" sz="1320" b="1">
               <a:solidFill>
                 <a:srgbClr val="F4F8FC"/>
               </a:solidFill>
               <a:latin typeface="微软雅黑" panose="020B0503020204020204" charset="-122"/>
               <a:ea typeface="微软雅黑" panose="020B0503020204020204" charset="-122"/>
+              <a:cs typeface="微软雅黑" panose="020B0503020204020204" charset="-122"/>
             </a:endParaRPr>
           </a:p>
         </p:txBody>
       </p:sp>
       <p:sp>
         <p:nvSpPr>
-          <p:cNvPr id="65" name="文本框 64"/>
+          <p:cNvPr id="57" name="文本框 56"/>
           <p:cNvSpPr txBox="1"/>
           <p:nvPr/>
         </p:nvSpPr>
         <p:spPr>
           <a:xfrm>
-            <a:off x="787400" y="4648200"/>
-            <a:ext cx="2413000" cy="322580"/>
+            <a:off x="787400" y="2832100"/>
+            <a:ext cx="2413000" cy="347980"/>
           </a:xfrm>
           <a:prstGeom prst="rect">
             <a:avLst/>
@@ -11109,13 +11234,21 @@
           <a:noFill/>
         </p:spPr>
         <p:txBody>
-          <a:bodyPr wrap="square" lIns="0" tIns="0" rIns="0" rtlCol="0" anchor="t">
+          <a:bodyPr wrap="square" lIns="25400" tIns="25400" rIns="25400" rtlCol="0" anchor="t">
             <a:noAutofit/>
           </a:bodyPr>
           <a:p>
-            <a:pPr algn="l"/>
-            <a:r>
-              <a:rPr lang="en-US" altLang="en-US" sz="800">
+            <a:pPr indent="0" algn="l">
+              <a:spcBef>
+                <a:spcPts val="0"/>
+              </a:spcBef>
+              <a:spcAft>
+                <a:spcPts val="0"/>
+              </a:spcAft>
+              <a:buNone/>
+            </a:pPr>
+            <a:r>
+              <a:rPr lang="zh-CN" altLang="en-US" sz="920">
                 <a:solidFill>
                   <a:srgbClr val="C7D7E8"/>
                 </a:solidFill>
@@ -11123,12 +11256,10 @@
                 <a:ea typeface="微软雅黑" panose="020B0503020204020204" charset="-122"/>
                 <a:cs typeface="微软雅黑" panose="020B0503020204020204" charset="-122"/>
               </a:rPr>
-              <a:t>requestFinancing() →
-submitOffer() → acceptOffer()
-</a:t>
-            </a:r>
-            <a:r>
-              <a:rPr lang="zh-CN" altLang="en-US" sz="800">
+              <a:t>合同</a:t>
+            </a:r>
+            <a:r>
+              <a:rPr lang="en-US" altLang="zh-CN" sz="920">
                 <a:solidFill>
                   <a:srgbClr val="C7D7E8"/>
                 </a:solidFill>
@@ -11136,9 +11267,42 @@
                 <a:ea typeface="微软雅黑" panose="020B0503020204020204" charset="-122"/>
                 <a:cs typeface="微软雅黑" panose="020B0503020204020204" charset="-122"/>
               </a:rPr>
-              <a:t>请求、报价、本金托管与接受状态可核验。</a:t>
-            </a:r>
-            <a:endParaRPr lang="zh-CN" altLang="en-US" sz="800">
+              <a:t> + </a:t>
+            </a:r>
+            <a:r>
+              <a:rPr lang="zh-CN" altLang="en-US" sz="920">
+                <a:solidFill>
+                  <a:srgbClr val="C7D7E8"/>
+                </a:solidFill>
+                <a:latin typeface="微软雅黑" panose="020B0503020204020204" charset="-122"/>
+                <a:ea typeface="微软雅黑" panose="020B0503020204020204" charset="-122"/>
+                <a:cs typeface="微软雅黑" panose="020B0503020204020204" charset="-122"/>
+              </a:rPr>
+              <a:t>发票</a:t>
+            </a:r>
+            <a:r>
+              <a:rPr lang="en-US" altLang="zh-CN" sz="920">
+                <a:solidFill>
+                  <a:srgbClr val="C7D7E8"/>
+                </a:solidFill>
+                <a:latin typeface="微软雅黑" panose="020B0503020204020204" charset="-122"/>
+                <a:ea typeface="微软雅黑" panose="020B0503020204020204" charset="-122"/>
+                <a:cs typeface="微软雅黑" panose="020B0503020204020204" charset="-122"/>
+              </a:rPr>
+              <a:t> → </a:t>
+            </a:r>
+            <a:r>
+              <a:rPr lang="zh-CN" altLang="en-US" sz="920">
+                <a:solidFill>
+                  <a:srgbClr val="C7D7E8"/>
+                </a:solidFill>
+                <a:latin typeface="微软雅黑" panose="020B0503020204020204" charset="-122"/>
+                <a:ea typeface="微软雅黑" panose="020B0503020204020204" charset="-122"/>
+                <a:cs typeface="微软雅黑" panose="020B0503020204020204" charset="-122"/>
+              </a:rPr>
+              <a:t>买方、供应商、金额与到期日；人工复核后创建凭证。</a:t>
+            </a:r>
+            <a:endParaRPr lang="zh-CN" altLang="en-US" sz="920">
               <a:solidFill>
                 <a:srgbClr val="C7D7E8"/>
               </a:solidFill>
@@ -11151,14 +11315,14 @@
       </p:sp>
       <p:sp>
         <p:nvSpPr>
-          <p:cNvPr id="66" name="圆角矩形 65"/>
+          <p:cNvPr id="58" name="圆角矩形 57"/>
           <p:cNvSpPr/>
           <p:nvPr/>
         </p:nvSpPr>
         <p:spPr>
           <a:xfrm>
-            <a:off x="3657600" y="3606800"/>
-            <a:ext cx="2768600" cy="1600200"/>
+            <a:off x="3657600" y="1816100"/>
+            <a:ext cx="2768600" cy="1676400"/>
           </a:xfrm>
           <a:prstGeom prst="roundRect">
             <a:avLst/>
@@ -11168,8 +11332,8 @@
           </a:solidFill>
           <a:ln w="12700">
             <a:solidFill>
-              <a:srgbClr val="3B82F6">
-                <a:alpha val="52000"/>
+              <a:srgbClr val="244666">
+                <a:alpha val="88000"/>
               </a:srgbClr>
             </a:solidFill>
           </a:ln>
@@ -11200,13 +11364,13 @@
       </p:sp>
       <p:sp>
         <p:nvSpPr>
-          <p:cNvPr id="67" name="文本框 66"/>
+          <p:cNvPr id="59" name="文本框 58"/>
           <p:cNvSpPr txBox="1"/>
           <p:nvPr/>
         </p:nvSpPr>
         <p:spPr>
           <a:xfrm>
-            <a:off x="3835400" y="3784600"/>
+            <a:off x="3835400" y="1993900"/>
             <a:ext cx="431800" cy="322580"/>
           </a:xfrm>
           <a:prstGeom prst="rect">
@@ -11215,24 +11379,32 @@
           <a:noFill/>
         </p:spPr>
         <p:txBody>
-          <a:bodyPr wrap="square" lIns="0" tIns="0" rIns="0" rtlCol="0" anchor="t">
-            <a:normAutofit fontScale="90000"/>
+          <a:bodyPr wrap="square" lIns="0" tIns="0" rIns="0" rtlCol="0" anchor="ctr">
+            <a:noAutofit/>
           </a:bodyPr>
           <a:p>
-            <a:pPr algn="l"/>
-            <a:r>
-              <a:rPr lang="en-US" altLang="en-US" sz="1890" b="1">
-                <a:solidFill>
-                  <a:srgbClr val="3B82F6"/>
+            <a:pPr indent="0" algn="l">
+              <a:spcBef>
+                <a:spcPts val="0"/>
+              </a:spcBef>
+              <a:spcAft>
+                <a:spcPts val="0"/>
+              </a:spcAft>
+              <a:buNone/>
+            </a:pPr>
+            <a:r>
+              <a:rPr lang="en-US" altLang="en-US" sz="1700" b="1">
+                <a:solidFill>
+                  <a:srgbClr val="FFCB66"/>
                 </a:solidFill>
                 <a:latin typeface="Aptos Display" charset="0"/>
                 <a:cs typeface="Aptos Display" charset="0"/>
               </a:rPr>
-              <a:t>04</a:t>
-            </a:r>
-            <a:endParaRPr lang="en-US" altLang="en-US" sz="1890" b="1">
+              <a:t>02</a:t>
+            </a:r>
+            <a:endParaRPr lang="en-US" altLang="en-US" sz="1700" b="1">
               <a:solidFill>
-                <a:srgbClr val="3B82F6"/>
+                <a:srgbClr val="FFCB66"/>
               </a:solidFill>
               <a:latin typeface="Aptos Display" charset="0"/>
               <a:cs typeface="Aptos Display" charset="0"/>
@@ -11242,14 +11414,14 @@
       </p:sp>
       <p:sp>
         <p:nvSpPr>
-          <p:cNvPr id="68" name="文本框 67"/>
+          <p:cNvPr id="60" name="文本框 59"/>
           <p:cNvSpPr txBox="1"/>
           <p:nvPr/>
         </p:nvSpPr>
         <p:spPr>
           <a:xfrm>
-            <a:off x="4356100" y="3835400"/>
-            <a:ext cx="1879600" cy="322580"/>
+            <a:off x="4356100" y="2044700"/>
+            <a:ext cx="1879600" cy="335280"/>
           </a:xfrm>
           <a:prstGeom prst="rect">
             <a:avLst/>
@@ -11257,22 +11429,30 @@
           <a:noFill/>
         </p:spPr>
         <p:txBody>
-          <a:bodyPr wrap="square" lIns="0" tIns="0" rIns="0" rtlCol="0" anchor="t">
-            <a:normAutofit/>
+          <a:bodyPr wrap="square" lIns="12700" tIns="12700" rIns="12700" rtlCol="0" anchor="ctr">
+            <a:noAutofit/>
           </a:bodyPr>
           <a:p>
-            <a:pPr algn="l"/>
-            <a:r>
-              <a:rPr lang="en-US" altLang="en-US" sz="900" b="1" spc="70">
+            <a:pPr indent="0" algn="l">
+              <a:spcBef>
+                <a:spcPts val="0"/>
+              </a:spcBef>
+              <a:spcAft>
+                <a:spcPts val="0"/>
+              </a:spcAft>
+              <a:buNone/>
+            </a:pPr>
+            <a:r>
+              <a:rPr lang="en-US" altLang="en-US" sz="750" b="1" spc="70">
                 <a:solidFill>
                   <a:srgbClr val="7894AF"/>
                 </a:solidFill>
                 <a:latin typeface="Aptos" charset="0"/>
                 <a:cs typeface="Aptos" charset="0"/>
               </a:rPr>
-              <a:t>REPLAY-SAFE + AUDIT</a:t>
-            </a:r>
-            <a:endParaRPr lang="en-US" altLang="en-US" sz="900" b="1" spc="70">
+              <a:t>SIGNED, NOT LOCKED</a:t>
+            </a:r>
+            <a:endParaRPr lang="en-US" altLang="en-US" sz="750" b="1" spc="70">
               <a:solidFill>
                 <a:srgbClr val="7894AF"/>
               </a:solidFill>
@@ -11284,14 +11464,14 @@
       </p:sp>
       <p:sp>
         <p:nvSpPr>
-          <p:cNvPr id="69" name="文本框 68"/>
+          <p:cNvPr id="61" name="文本框 60"/>
           <p:cNvSpPr txBox="1"/>
           <p:nvPr/>
         </p:nvSpPr>
         <p:spPr>
           <a:xfrm>
-            <a:off x="3835400" y="4241800"/>
-            <a:ext cx="2413000" cy="322580"/>
+            <a:off x="3835400" y="2425700"/>
+            <a:ext cx="2413000" cy="347980"/>
           </a:xfrm>
           <a:prstGeom prst="rect">
             <a:avLst/>
@@ -11299,13 +11479,21 @@
           <a:noFill/>
         </p:spPr>
         <p:txBody>
-          <a:bodyPr wrap="square" lIns="0" tIns="0" rIns="0" rtlCol="0" anchor="t">
-            <a:normAutofit/>
+          <a:bodyPr wrap="square" lIns="25400" tIns="25400" rIns="25400" rtlCol="0" anchor="t">
+            <a:noAutofit/>
           </a:bodyPr>
           <a:p>
-            <a:pPr algn="l"/>
-            <a:r>
-              <a:rPr lang="zh-CN" altLang="en-US" sz="1345" b="1">
+            <a:pPr indent="0" algn="l">
+              <a:spcBef>
+                <a:spcPts val="0"/>
+              </a:spcBef>
+              <a:spcAft>
+                <a:spcPts val="0"/>
+              </a:spcAft>
+              <a:buNone/>
+            </a:pPr>
+            <a:r>
+              <a:rPr lang="zh-CN" altLang="en-US" sz="1320" b="1">
                 <a:solidFill>
                   <a:srgbClr val="F4F8FC"/>
                 </a:solidFill>
@@ -11313,10 +11501,10 @@
                 <a:ea typeface="微软雅黑" panose="020B0503020204020204" charset="-122"/>
                 <a:cs typeface="微软雅黑" panose="020B0503020204020204" charset="-122"/>
               </a:rPr>
-              <a:t>防重放结算</a:t>
-            </a:r>
-            <a:r>
-              <a:rPr lang="en-US" altLang="zh-CN" sz="1345" b="1">
+              <a:t>双签确权</a:t>
+            </a:r>
+            <a:r>
+              <a:rPr lang="en-US" altLang="zh-CN" sz="1320" b="1">
                 <a:solidFill>
                   <a:srgbClr val="F4F8FC"/>
                 </a:solidFill>
@@ -11324,10 +11512,10 @@
                 <a:ea typeface="微软雅黑" panose="020B0503020204020204" charset="-122"/>
                 <a:cs typeface="微软雅黑" panose="020B0503020204020204" charset="-122"/>
               </a:rPr>
-              <a:t> + </a:t>
-            </a:r>
-            <a:r>
-              <a:rPr lang="zh-CN" altLang="en-US" sz="1345" b="1">
+              <a:t> · </a:t>
+            </a:r>
+            <a:r>
+              <a:rPr lang="zh-CN" altLang="en-US" sz="1320" b="1">
                 <a:solidFill>
                   <a:srgbClr val="F4F8FC"/>
                 </a:solidFill>
@@ -11335,9 +11523,9 @@
                 <a:ea typeface="微软雅黑" panose="020B0503020204020204" charset="-122"/>
                 <a:cs typeface="微软雅黑" panose="020B0503020204020204" charset="-122"/>
               </a:rPr>
-              <a:t>异步证明</a:t>
-            </a:r>
-            <a:endParaRPr lang="zh-CN" altLang="en-US" sz="1345" b="1">
+              <a:t>不锁款</a:t>
+            </a:r>
+            <a:endParaRPr lang="zh-CN" altLang="en-US" sz="1320" b="1">
               <a:solidFill>
                 <a:srgbClr val="F4F8FC"/>
               </a:solidFill>
@@ -11350,14 +11538,14 @@
       </p:sp>
       <p:sp>
         <p:nvSpPr>
-          <p:cNvPr id="70" name="文本框 69"/>
+          <p:cNvPr id="62" name="文本框 61"/>
           <p:cNvSpPr txBox="1"/>
           <p:nvPr/>
         </p:nvSpPr>
         <p:spPr>
           <a:xfrm>
-            <a:off x="3835400" y="4648200"/>
-            <a:ext cx="2413000" cy="322580"/>
+            <a:off x="3835400" y="2832100"/>
+            <a:ext cx="2413000" cy="347980"/>
           </a:xfrm>
           <a:prstGeom prst="rect">
             <a:avLst/>
@@ -11365,13 +11553,21 @@
           <a:noFill/>
         </p:spPr>
         <p:txBody>
-          <a:bodyPr wrap="square" lIns="0" tIns="0" rIns="0" rtlCol="0" anchor="t">
-            <a:normAutofit fontScale="40000"/>
+          <a:bodyPr wrap="square" lIns="25400" tIns="25400" rIns="25400" rtlCol="0" anchor="t">
+            <a:noAutofit/>
           </a:bodyPr>
           <a:p>
-            <a:pPr algn="l"/>
-            <a:r>
-              <a:rPr lang="zh-CN" altLang="en-US" sz="2065">
+            <a:pPr indent="0" algn="l">
+              <a:spcBef>
+                <a:spcPts val="0"/>
+              </a:spcBef>
+              <a:spcAft>
+                <a:spcPts val="0"/>
+              </a:spcAft>
+              <a:buNone/>
+            </a:pPr>
+            <a:r>
+              <a:rPr lang="zh-CN" altLang="en-US" sz="920">
                 <a:solidFill>
                   <a:srgbClr val="C7D7E8"/>
                 </a:solidFill>
@@ -11379,10 +11575,10 @@
                 <a:ea typeface="微软雅黑" panose="020B0503020204020204" charset="-122"/>
                 <a:cs typeface="微软雅黑" panose="020B0503020204020204" charset="-122"/>
               </a:rPr>
-              <a:t>校验窗口、</a:t>
-            </a:r>
-            <a:r>
-              <a:rPr lang="en-US" altLang="zh-CN" sz="2065">
+              <a:t>服务端独立验签；</a:t>
+            </a:r>
+            <a:r>
+              <a:rPr lang="en-US" altLang="zh-CN" sz="920">
                 <a:solidFill>
                   <a:srgbClr val="C7D7E8"/>
                 </a:solidFill>
@@ -11390,10 +11586,10 @@
                 <a:ea typeface="微软雅黑" panose="020B0503020204020204" charset="-122"/>
                 <a:cs typeface="微软雅黑" panose="020B0503020204020204" charset="-122"/>
               </a:rPr>
-              <a:t>nonce</a:t>
-            </a:r>
-            <a:r>
-              <a:rPr lang="zh-CN" altLang="en-US" sz="2065">
+              <a:t>Approved Payable </a:t>
+            </a:r>
+            <a:r>
+              <a:rPr lang="zh-CN" altLang="en-US" sz="920">
                 <a:solidFill>
                   <a:srgbClr val="C7D7E8"/>
                 </a:solidFill>
@@ -11401,10 +11597,10 @@
                 <a:ea typeface="微软雅黑" panose="020B0503020204020204" charset="-122"/>
                 <a:cs typeface="微软雅黑" panose="020B0503020204020204" charset="-122"/>
               </a:rPr>
-              <a:t>、收款人；</a:t>
-            </a:r>
-            <a:r>
-              <a:rPr lang="en-US" altLang="zh-CN" sz="2065">
+              <a:t>与未来</a:t>
+            </a:r>
+            <a:r>
+              <a:rPr lang="en-US" altLang="zh-CN" sz="920">
                 <a:solidFill>
                   <a:srgbClr val="C7D7E8"/>
                 </a:solidFill>
@@ -11412,10 +11608,10 @@
                 <a:ea typeface="微软雅黑" panose="020B0503020204020204" charset="-122"/>
                 <a:cs typeface="微软雅黑" panose="020B0503020204020204" charset="-122"/>
               </a:rPr>
-              <a:t>ReceivableSettlement </a:t>
-            </a:r>
-            <a:r>
-              <a:rPr lang="zh-CN" altLang="en-US" sz="2065">
+              <a:t> EIP-3009 </a:t>
+            </a:r>
+            <a:r>
+              <a:rPr lang="zh-CN" altLang="en-US" sz="920">
                 <a:solidFill>
                   <a:srgbClr val="C7D7E8"/>
                 </a:solidFill>
@@ -11423,31 +11619,9 @@
                 <a:ea typeface="微软雅黑" panose="020B0503020204020204" charset="-122"/>
                 <a:cs typeface="微软雅黑" panose="020B0503020204020204" charset="-122"/>
               </a:rPr>
-              <a:t>防重复结算，</a:t>
-            </a:r>
-            <a:r>
-              <a:rPr lang="en-US" altLang="zh-CN" sz="2065">
-                <a:solidFill>
-                  <a:srgbClr val="C7D7E8"/>
-                </a:solidFill>
-                <a:latin typeface="微软雅黑" panose="020B0503020204020204" charset="-122"/>
-                <a:ea typeface="微软雅黑" panose="020B0503020204020204" charset="-122"/>
-                <a:cs typeface="微软雅黑" panose="020B0503020204020204" charset="-122"/>
-              </a:rPr>
-              <a:t>AuditProofRegistry </a:t>
-            </a:r>
-            <a:r>
-              <a:rPr lang="zh-CN" altLang="en-US" sz="2065">
-                <a:solidFill>
-                  <a:srgbClr val="C7D7E8"/>
-                </a:solidFill>
-                <a:latin typeface="微软雅黑" panose="020B0503020204020204" charset="-122"/>
-                <a:ea typeface="微软雅黑" panose="020B0503020204020204" charset="-122"/>
-                <a:cs typeface="微软雅黑" panose="020B0503020204020204" charset="-122"/>
-              </a:rPr>
-              <a:t>登记证据哈希。</a:t>
-            </a:r>
-            <a:endParaRPr lang="zh-CN" altLang="en-US" sz="2065">
+              <a:t>授权哈希绑定，签名不转账。</a:t>
+            </a:r>
+            <a:endParaRPr lang="zh-CN" altLang="en-US" sz="920">
               <a:solidFill>
                 <a:srgbClr val="C7D7E8"/>
               </a:solidFill>
@@ -11460,25 +11634,25 @@
       </p:sp>
       <p:sp>
         <p:nvSpPr>
-          <p:cNvPr id="71" name="圆角矩形 70"/>
+          <p:cNvPr id="63" name="圆角矩形 62"/>
           <p:cNvSpPr/>
           <p:nvPr/>
         </p:nvSpPr>
         <p:spPr>
           <a:xfrm>
-            <a:off x="6756400" y="1816100"/>
-            <a:ext cx="4826000" cy="3568700"/>
+            <a:off x="609600" y="3606800"/>
+            <a:ext cx="2768600" cy="1676400"/>
           </a:xfrm>
           <a:prstGeom prst="roundRect">
             <a:avLst/>
           </a:prstGeom>
           <a:solidFill>
-            <a:srgbClr val="0A1D32"/>
+            <a:srgbClr val="0D2037"/>
           </a:solidFill>
           <a:ln w="12700">
             <a:solidFill>
-              <a:srgbClr val="24D5FF">
-                <a:alpha val="62000"/>
+              <a:srgbClr val="244666">
+                <a:alpha val="88000"/>
               </a:srgbClr>
             </a:solidFill>
           </a:ln>
@@ -11509,14 +11683,14 @@
       </p:sp>
       <p:sp>
         <p:nvSpPr>
-          <p:cNvPr id="72" name="文本框 71"/>
+          <p:cNvPr id="64" name="文本框 63"/>
           <p:cNvSpPr txBox="1"/>
           <p:nvPr/>
         </p:nvSpPr>
         <p:spPr>
           <a:xfrm>
-            <a:off x="7086600" y="2032000"/>
-            <a:ext cx="4064000" cy="322580"/>
+            <a:off x="787400" y="3784600"/>
+            <a:ext cx="431800" cy="322580"/>
           </a:xfrm>
           <a:prstGeom prst="rect">
             <a:avLst/>
@@ -11524,24 +11698,82 @@
           <a:noFill/>
         </p:spPr>
         <p:txBody>
-          <a:bodyPr wrap="square" lIns="0" tIns="0" rIns="0" rtlCol="0" anchor="t">
-            <a:normAutofit/>
+          <a:bodyPr wrap="square" lIns="0" tIns="0" rIns="0" rtlCol="0" anchor="ctr">
+            <a:noAutofit/>
           </a:bodyPr>
           <a:p>
-            <a:pPr algn="l"/>
-            <a:r>
-              <a:rPr lang="en-US" altLang="en-US" sz="890" b="1" spc="140">
-                <a:solidFill>
-                  <a:srgbClr val="24D5FF"/>
+            <a:pPr indent="0" algn="l">
+              <a:spcBef>
+                <a:spcPts val="0"/>
+              </a:spcBef>
+              <a:spcAft>
+                <a:spcPts val="0"/>
+              </a:spcAft>
+              <a:buNone/>
+            </a:pPr>
+            <a:r>
+              <a:rPr lang="en-US" altLang="en-US" sz="1700" b="1">
+                <a:solidFill>
+                  <a:srgbClr val="45F0C5"/>
+                </a:solidFill>
+                <a:latin typeface="Aptos Display" charset="0"/>
+                <a:cs typeface="Aptos Display" charset="0"/>
+              </a:rPr>
+              <a:t>03</a:t>
+            </a:r>
+            <a:endParaRPr lang="en-US" altLang="en-US" sz="1700" b="1">
+              <a:solidFill>
+                <a:srgbClr val="45F0C5"/>
+              </a:solidFill>
+              <a:latin typeface="Aptos Display" charset="0"/>
+              <a:cs typeface="Aptos Display" charset="0"/>
+            </a:endParaRPr>
+          </a:p>
+        </p:txBody>
+      </p:sp>
+      <p:sp>
+        <p:nvSpPr>
+          <p:cNvPr id="65" name="文本框 64"/>
+          <p:cNvSpPr txBox="1"/>
+          <p:nvPr/>
+        </p:nvSpPr>
+        <p:spPr>
+          <a:xfrm>
+            <a:off x="1308100" y="3835400"/>
+            <a:ext cx="1879600" cy="335280"/>
+          </a:xfrm>
+          <a:prstGeom prst="rect">
+            <a:avLst/>
+          </a:prstGeom>
+          <a:noFill/>
+        </p:spPr>
+        <p:txBody>
+          <a:bodyPr wrap="square" lIns="12700" tIns="12700" rIns="12700" rtlCol="0" anchor="ctr">
+            <a:noAutofit/>
+          </a:bodyPr>
+          <a:p>
+            <a:pPr indent="0" algn="l">
+              <a:spcBef>
+                <a:spcPts val="0"/>
+              </a:spcBef>
+              <a:spcAft>
+                <a:spcPts val="0"/>
+              </a:spcAft>
+              <a:buNone/>
+            </a:pPr>
+            <a:r>
+              <a:rPr lang="en-US" altLang="en-US" sz="750" b="1" spc="70">
+                <a:solidFill>
+                  <a:srgbClr val="7894AF"/>
                 </a:solidFill>
                 <a:latin typeface="Aptos" charset="0"/>
                 <a:cs typeface="Aptos" charset="0"/>
               </a:rPr>
-              <a:t>VERIFIABLE PATH</a:t>
-            </a:r>
-            <a:endParaRPr lang="en-US" altLang="en-US" sz="890" b="1" spc="140">
+              <a:t>NATIVE STATE MACHINE</a:t>
+            </a:r>
+            <a:endParaRPr lang="en-US" altLang="en-US" sz="750" b="1" spc="70">
               <a:solidFill>
-                <a:srgbClr val="24D5FF"/>
+                <a:srgbClr val="7894AF"/>
               </a:solidFill>
               <a:latin typeface="Aptos" charset="0"/>
               <a:cs typeface="Aptos" charset="0"/>
@@ -11551,14 +11783,14 @@
       </p:sp>
       <p:sp>
         <p:nvSpPr>
-          <p:cNvPr id="73" name="文本框 72"/>
+          <p:cNvPr id="66" name="文本框 65"/>
           <p:cNvSpPr txBox="1"/>
           <p:nvPr/>
         </p:nvSpPr>
         <p:spPr>
           <a:xfrm>
-            <a:off x="7086600" y="2286000"/>
-            <a:ext cx="3810000" cy="322580"/>
+            <a:off x="787400" y="4216400"/>
+            <a:ext cx="2413000" cy="347980"/>
           </a:xfrm>
           <a:prstGeom prst="rect">
             <a:avLst/>
@@ -11566,22 +11798,30 @@
           <a:noFill/>
         </p:spPr>
         <p:txBody>
-          <a:bodyPr wrap="square" lIns="0" tIns="0" rIns="0" rtlCol="0" anchor="t">
-            <a:normAutofit/>
+          <a:bodyPr wrap="square" lIns="25400" tIns="25400" rIns="25400" rtlCol="0" anchor="t">
+            <a:noAutofit/>
           </a:bodyPr>
           <a:p>
-            <a:pPr algn="l"/>
-            <a:r>
-              <a:rPr lang="zh-CN" altLang="en-US" sz="1665" b="1">
+            <a:pPr indent="0" algn="l">
+              <a:spcBef>
+                <a:spcPts val="0"/>
+              </a:spcBef>
+              <a:spcAft>
+                <a:spcPts val="0"/>
+              </a:spcAft>
+              <a:buNone/>
+            </a:pPr>
+            <a:r>
+              <a:rPr lang="zh-CN" altLang="en-US" sz="1320" b="1">
                 <a:solidFill>
                   <a:srgbClr val="F4F8FC"/>
                 </a:solidFill>
                 <a:latin typeface="微软雅黑" panose="020B0503020204020204" charset="-122"/>
                 <a:ea typeface="微软雅黑" panose="020B0503020204020204" charset="-122"/>
               </a:rPr>
-              <a:t>可验证链路</a:t>
-            </a:r>
-            <a:endParaRPr lang="zh-CN" altLang="en-US" sz="1665" b="1">
+              <a:t>融资状态机上链</a:t>
+            </a:r>
+            <a:endParaRPr lang="zh-CN" altLang="en-US" sz="1320" b="1">
               <a:solidFill>
                 <a:srgbClr val="F4F8FC"/>
               </a:solidFill>
@@ -11591,169 +11831,93 @@
           </a:p>
         </p:txBody>
       </p:sp>
-      <p:cxnSp>
-        <p:nvCxnSpPr>
-          <p:cNvPr id="74" name="直接连接符 73"/>
-          <p:cNvCxnSpPr/>
-          <p:nvPr/>
-        </p:nvCxnSpPr>
-        <p:spPr>
-          <a:xfrm>
-            <a:off x="7353300" y="2895600"/>
-            <a:ext cx="635" cy="1435100"/>
-          </a:xfrm>
-          <a:prstGeom prst="line">
-            <a:avLst/>
-          </a:prstGeom>
+      <p:sp>
+        <p:nvSpPr>
+          <p:cNvPr id="67" name="文本框 66"/>
+          <p:cNvSpPr txBox="1"/>
+          <p:nvPr/>
+        </p:nvSpPr>
+        <p:spPr>
+          <a:xfrm>
+            <a:off x="787400" y="4622800"/>
+            <a:ext cx="2413000" cy="347980"/>
+          </a:xfrm>
+          <a:prstGeom prst="rect">
+            <a:avLst/>
+          </a:prstGeom>
+          <a:noFill/>
+        </p:spPr>
+        <p:txBody>
+          <a:bodyPr wrap="square" lIns="25400" tIns="25400" rIns="25400" rtlCol="0" anchor="t">
+            <a:noAutofit/>
+          </a:bodyPr>
+          <a:p>
+            <a:pPr indent="0" algn="l">
+              <a:spcBef>
+                <a:spcPts val="0"/>
+              </a:spcBef>
+              <a:spcAft>
+                <a:spcPts val="0"/>
+              </a:spcAft>
+              <a:buNone/>
+            </a:pPr>
+            <a:r>
+              <a:rPr lang="en-US" altLang="en-US" sz="920">
+                <a:solidFill>
+                  <a:srgbClr val="C7D7E8"/>
+                </a:solidFill>
+                <a:latin typeface="微软雅黑" panose="020B0503020204020204" charset="-122"/>
+                <a:ea typeface="微软雅黑" panose="020B0503020204020204" charset="-122"/>
+                <a:cs typeface="微软雅黑" panose="020B0503020204020204" charset="-122"/>
+              </a:rPr>
+              <a:t>requestFinancing() →
+submitOffer() → acceptOffer()
+</a:t>
+            </a:r>
+            <a:r>
+              <a:rPr lang="zh-CN" altLang="en-US" sz="920">
+                <a:solidFill>
+                  <a:srgbClr val="C7D7E8"/>
+                </a:solidFill>
+                <a:latin typeface="微软雅黑" panose="020B0503020204020204" charset="-122"/>
+                <a:ea typeface="微软雅黑" panose="020B0503020204020204" charset="-122"/>
+                <a:cs typeface="微软雅黑" panose="020B0503020204020204" charset="-122"/>
+              </a:rPr>
+              <a:t>请求、报价、本金托管与接受状态可核验。</a:t>
+            </a:r>
+            <a:endParaRPr lang="zh-CN" altLang="en-US" sz="920">
+              <a:solidFill>
+                <a:srgbClr val="C7D7E8"/>
+              </a:solidFill>
+              <a:latin typeface="微软雅黑" panose="020B0503020204020204" charset="-122"/>
+              <a:ea typeface="微软雅黑" panose="020B0503020204020204" charset="-122"/>
+              <a:cs typeface="微软雅黑" panose="020B0503020204020204" charset="-122"/>
+            </a:endParaRPr>
+          </a:p>
+        </p:txBody>
+      </p:sp>
+      <p:sp>
+        <p:nvSpPr>
+          <p:cNvPr id="68" name="圆角矩形 67"/>
+          <p:cNvSpPr/>
+          <p:nvPr/>
+        </p:nvSpPr>
+        <p:spPr>
+          <a:xfrm>
+            <a:off x="3657600" y="3606800"/>
+            <a:ext cx="2768600" cy="1676400"/>
+          </a:xfrm>
+          <a:prstGeom prst="roundRect">
+            <a:avLst/>
+          </a:prstGeom>
+          <a:solidFill>
+            <a:srgbClr val="0D2037"/>
+          </a:solidFill>
           <a:ln w="12700">
             <a:solidFill>
-              <a:srgbClr val="244666"/>
-            </a:solidFill>
-          </a:ln>
-        </p:spPr>
-        <p:style>
-          <a:lnRef idx="2">
-            <a:schemeClr val="accent1"/>
-          </a:lnRef>
-          <a:fillRef idx="0">
-            <a:srgbClr val="FFFFFF"/>
-          </a:fillRef>
-          <a:effectRef idx="0">
-            <a:srgbClr val="FFFFFF"/>
-          </a:effectRef>
-          <a:fontRef idx="minor">
-            <a:schemeClr val="tx1"/>
-          </a:fontRef>
-        </p:style>
-      </p:cxnSp>
-      <p:cxnSp>
-        <p:nvCxnSpPr>
-          <p:cNvPr id="75" name="直接连接符 74"/>
-          <p:cNvCxnSpPr/>
-          <p:nvPr/>
-        </p:nvCxnSpPr>
-        <p:spPr>
-          <a:xfrm>
-            <a:off x="7353300" y="3111500"/>
-            <a:ext cx="635" cy="38100"/>
-          </a:xfrm>
-          <a:prstGeom prst="line">
-            <a:avLst/>
-          </a:prstGeom>
-          <a:ln w="12700">
-            <a:solidFill>
-              <a:srgbClr val="244666"/>
-            </a:solidFill>
-            <a:tailEnd type="triangle"/>
-          </a:ln>
-        </p:spPr>
-        <p:style>
-          <a:lnRef idx="2">
-            <a:schemeClr val="accent1"/>
-          </a:lnRef>
-          <a:fillRef idx="0">
-            <a:srgbClr val="FFFFFF"/>
-          </a:fillRef>
-          <a:effectRef idx="0">
-            <a:srgbClr val="FFFFFF"/>
-          </a:effectRef>
-          <a:fontRef idx="minor">
-            <a:schemeClr val="tx1"/>
-          </a:fontRef>
-        </p:style>
-      </p:cxnSp>
-      <p:cxnSp>
-        <p:nvCxnSpPr>
-          <p:cNvPr id="76" name="直接连接符 75"/>
-          <p:cNvCxnSpPr/>
-          <p:nvPr/>
-        </p:nvCxnSpPr>
-        <p:spPr>
-          <a:xfrm>
-            <a:off x="7353300" y="3594100"/>
-            <a:ext cx="635" cy="38100"/>
-          </a:xfrm>
-          <a:prstGeom prst="line">
-            <a:avLst/>
-          </a:prstGeom>
-          <a:ln w="12700">
-            <a:solidFill>
-              <a:srgbClr val="244666"/>
-            </a:solidFill>
-            <a:tailEnd type="triangle"/>
-          </a:ln>
-        </p:spPr>
-        <p:style>
-          <a:lnRef idx="2">
-            <a:schemeClr val="accent1"/>
-          </a:lnRef>
-          <a:fillRef idx="0">
-            <a:srgbClr val="FFFFFF"/>
-          </a:fillRef>
-          <a:effectRef idx="0">
-            <a:srgbClr val="FFFFFF"/>
-          </a:effectRef>
-          <a:fontRef idx="minor">
-            <a:schemeClr val="tx1"/>
-          </a:fontRef>
-        </p:style>
-      </p:cxnSp>
-      <p:cxnSp>
-        <p:nvCxnSpPr>
-          <p:cNvPr id="77" name="直接连接符 76"/>
-          <p:cNvCxnSpPr/>
-          <p:nvPr/>
-        </p:nvCxnSpPr>
-        <p:spPr>
-          <a:xfrm>
-            <a:off x="7353300" y="4076700"/>
-            <a:ext cx="635" cy="38100"/>
-          </a:xfrm>
-          <a:prstGeom prst="line">
-            <a:avLst/>
-          </a:prstGeom>
-          <a:ln w="12700">
-            <a:solidFill>
-              <a:srgbClr val="244666"/>
-            </a:solidFill>
-            <a:tailEnd type="triangle"/>
-          </a:ln>
-        </p:spPr>
-        <p:style>
-          <a:lnRef idx="2">
-            <a:schemeClr val="accent1"/>
-          </a:lnRef>
-          <a:fillRef idx="0">
-            <a:srgbClr val="FFFFFF"/>
-          </a:fillRef>
-          <a:effectRef idx="0">
-            <a:srgbClr val="FFFFFF"/>
-          </a:effectRef>
-          <a:fontRef idx="minor">
-            <a:schemeClr val="tx1"/>
-          </a:fontRef>
-        </p:style>
-      </p:cxnSp>
-      <p:sp>
-        <p:nvSpPr>
-          <p:cNvPr id="78" name="椭圆 77"/>
-          <p:cNvSpPr/>
-          <p:nvPr/>
-        </p:nvSpPr>
-        <p:spPr>
-          <a:xfrm>
-            <a:off x="7137400" y="2628900"/>
-            <a:ext cx="431800" cy="431800"/>
-          </a:xfrm>
-          <a:prstGeom prst="ellipse">
-            <a:avLst/>
-          </a:prstGeom>
-          <a:solidFill>
-            <a:srgbClr val="24D5FF"/>
-          </a:solidFill>
-          <a:ln w="19050">
-            <a:solidFill>
-              <a:srgbClr val="071426"/>
+              <a:srgbClr val="244666">
+                <a:alpha val="88000"/>
+              </a:srgbClr>
             </a:solidFill>
           </a:ln>
         </p:spPr>
@@ -11783,13 +11947,13 @@
       </p:sp>
       <p:sp>
         <p:nvSpPr>
-          <p:cNvPr id="79" name="文本框 78"/>
+          <p:cNvPr id="69" name="文本框 68"/>
           <p:cNvSpPr txBox="1"/>
           <p:nvPr/>
         </p:nvSpPr>
         <p:spPr>
           <a:xfrm>
-            <a:off x="7137400" y="2755900"/>
+            <a:off x="3835400" y="3784600"/>
             <a:ext cx="431800" cy="322580"/>
           </a:xfrm>
           <a:prstGeom prst="rect">
@@ -11798,24 +11962,82 @@
           <a:noFill/>
         </p:spPr>
         <p:txBody>
-          <a:bodyPr wrap="square" lIns="0" tIns="0" rIns="0" rtlCol="0" anchor="t">
-            <a:normAutofit/>
+          <a:bodyPr wrap="square" lIns="0" tIns="0" rIns="0" rtlCol="0" anchor="ctr">
+            <a:noAutofit/>
           </a:bodyPr>
           <a:p>
-            <a:pPr algn="ctr"/>
-            <a:r>
-              <a:rPr lang="en-US" altLang="en-US" sz="835" b="1">
-                <a:solidFill>
-                  <a:srgbClr val="071426"/>
+            <a:pPr indent="0" algn="l">
+              <a:spcBef>
+                <a:spcPts val="0"/>
+              </a:spcBef>
+              <a:spcAft>
+                <a:spcPts val="0"/>
+              </a:spcAft>
+              <a:buNone/>
+            </a:pPr>
+            <a:r>
+              <a:rPr lang="en-US" altLang="en-US" sz="1700" b="1">
+                <a:solidFill>
+                  <a:srgbClr val="3B82F6"/>
+                </a:solidFill>
+                <a:latin typeface="Aptos Display" charset="0"/>
+                <a:cs typeface="Aptos Display" charset="0"/>
+              </a:rPr>
+              <a:t>04</a:t>
+            </a:r>
+            <a:endParaRPr lang="en-US" altLang="en-US" sz="1700" b="1">
+              <a:solidFill>
+                <a:srgbClr val="3B82F6"/>
+              </a:solidFill>
+              <a:latin typeface="Aptos Display" charset="0"/>
+              <a:cs typeface="Aptos Display" charset="0"/>
+            </a:endParaRPr>
+          </a:p>
+        </p:txBody>
+      </p:sp>
+      <p:sp>
+        <p:nvSpPr>
+          <p:cNvPr id="70" name="文本框 69"/>
+          <p:cNvSpPr txBox="1"/>
+          <p:nvPr/>
+        </p:nvSpPr>
+        <p:spPr>
+          <a:xfrm>
+            <a:off x="4356100" y="3835400"/>
+            <a:ext cx="1879600" cy="335280"/>
+          </a:xfrm>
+          <a:prstGeom prst="rect">
+            <a:avLst/>
+          </a:prstGeom>
+          <a:noFill/>
+        </p:spPr>
+        <p:txBody>
+          <a:bodyPr wrap="square" lIns="12700" tIns="12700" rIns="12700" rtlCol="0" anchor="ctr">
+            <a:noAutofit/>
+          </a:bodyPr>
+          <a:p>
+            <a:pPr indent="0" algn="l">
+              <a:spcBef>
+                <a:spcPts val="0"/>
+              </a:spcBef>
+              <a:spcAft>
+                <a:spcPts val="0"/>
+              </a:spcAft>
+              <a:buNone/>
+            </a:pPr>
+            <a:r>
+              <a:rPr lang="en-US" altLang="en-US" sz="750" b="1" spc="70">
+                <a:solidFill>
+                  <a:srgbClr val="7894AF"/>
                 </a:solidFill>
                 <a:latin typeface="Aptos" charset="0"/>
                 <a:cs typeface="Aptos" charset="0"/>
               </a:rPr>
-              <a:t>01</a:t>
-            </a:r>
-            <a:endParaRPr lang="en-US" altLang="en-US" sz="835" b="1">
+              <a:t>REPLAY-SAFE + AUDIT</a:t>
+            </a:r>
+            <a:endParaRPr lang="en-US" altLang="en-US" sz="750" b="1" spc="70">
               <a:solidFill>
-                <a:srgbClr val="071426"/>
+                <a:srgbClr val="7894AF"/>
               </a:solidFill>
               <a:latin typeface="Aptos" charset="0"/>
               <a:cs typeface="Aptos" charset="0"/>
@@ -11825,14 +12047,14 @@
       </p:sp>
       <p:sp>
         <p:nvSpPr>
-          <p:cNvPr id="80" name="文本框 79"/>
+          <p:cNvPr id="71" name="文本框 70"/>
           <p:cNvSpPr txBox="1"/>
           <p:nvPr/>
         </p:nvSpPr>
         <p:spPr>
           <a:xfrm>
-            <a:off x="7747000" y="2641600"/>
-            <a:ext cx="3175000" cy="322580"/>
+            <a:off x="3835400" y="4216400"/>
+            <a:ext cx="2413000" cy="347980"/>
           </a:xfrm>
           <a:prstGeom prst="rect">
             <a:avLst/>
@@ -11840,41 +12062,73 @@
           <a:noFill/>
         </p:spPr>
         <p:txBody>
-          <a:bodyPr wrap="square" lIns="0" tIns="0" rIns="0" rtlCol="0" anchor="t">
-            <a:normAutofit/>
+          <a:bodyPr wrap="square" lIns="25400" tIns="25400" rIns="25400" rtlCol="0" anchor="t">
+            <a:noAutofit/>
           </a:bodyPr>
           <a:p>
-            <a:pPr algn="l"/>
-            <a:r>
-              <a:rPr lang="zh-CN" altLang="en-US" sz="1110" b="1">
+            <a:pPr indent="0" algn="l">
+              <a:spcBef>
+                <a:spcPts val="0"/>
+              </a:spcBef>
+              <a:spcAft>
+                <a:spcPts val="0"/>
+              </a:spcAft>
+              <a:buNone/>
+            </a:pPr>
+            <a:r>
+              <a:rPr lang="zh-CN" altLang="en-US" sz="1320" b="1">
                 <a:solidFill>
                   <a:srgbClr val="F4F8FC"/>
                 </a:solidFill>
                 <a:latin typeface="微软雅黑" panose="020B0503020204020204" charset="-122"/>
                 <a:ea typeface="微软雅黑" panose="020B0503020204020204" charset="-122"/>
-              </a:rPr>
-              <a:t>贸易资料</a:t>
-            </a:r>
-            <a:endParaRPr lang="zh-CN" altLang="en-US" sz="1110" b="1">
+                <a:cs typeface="微软雅黑" panose="020B0503020204020204" charset="-122"/>
+              </a:rPr>
+              <a:t>防重放结算</a:t>
+            </a:r>
+            <a:r>
+              <a:rPr lang="en-US" altLang="zh-CN" sz="1320" b="1">
+                <a:solidFill>
+                  <a:srgbClr val="F4F8FC"/>
+                </a:solidFill>
+                <a:latin typeface="微软雅黑" panose="020B0503020204020204" charset="-122"/>
+                <a:ea typeface="微软雅黑" panose="020B0503020204020204" charset="-122"/>
+                <a:cs typeface="微软雅黑" panose="020B0503020204020204" charset="-122"/>
+              </a:rPr>
+              <a:t> + </a:t>
+            </a:r>
+            <a:r>
+              <a:rPr lang="zh-CN" altLang="en-US" sz="1320" b="1">
+                <a:solidFill>
+                  <a:srgbClr val="F4F8FC"/>
+                </a:solidFill>
+                <a:latin typeface="微软雅黑" panose="020B0503020204020204" charset="-122"/>
+                <a:ea typeface="微软雅黑" panose="020B0503020204020204" charset="-122"/>
+                <a:cs typeface="微软雅黑" panose="020B0503020204020204" charset="-122"/>
+              </a:rPr>
+              <a:t>异步证明</a:t>
+            </a:r>
+            <a:endParaRPr lang="zh-CN" altLang="en-US" sz="1320" b="1">
               <a:solidFill>
                 <a:srgbClr val="F4F8FC"/>
               </a:solidFill>
               <a:latin typeface="微软雅黑" panose="020B0503020204020204" charset="-122"/>
               <a:ea typeface="微软雅黑" panose="020B0503020204020204" charset="-122"/>
+              <a:cs typeface="微软雅黑" panose="020B0503020204020204" charset="-122"/>
             </a:endParaRPr>
           </a:p>
         </p:txBody>
       </p:sp>
       <p:sp>
         <p:nvSpPr>
-          <p:cNvPr id="81" name="文本框 80"/>
+          <p:cNvPr id="72" name="文本框 71"/>
           <p:cNvSpPr txBox="1"/>
           <p:nvPr/>
         </p:nvSpPr>
         <p:spPr>
           <a:xfrm>
-            <a:off x="7747000" y="2857500"/>
-            <a:ext cx="3175000" cy="322580"/>
+            <a:off x="3835400" y="4622800"/>
+            <a:ext cx="2413000" cy="347980"/>
           </a:xfrm>
           <a:prstGeom prst="rect">
             <a:avLst/>
@@ -11882,13 +12136,21 @@
           <a:noFill/>
         </p:spPr>
         <p:txBody>
-          <a:bodyPr wrap="square" lIns="0" tIns="0" rIns="0" rtlCol="0" anchor="t">
-            <a:normAutofit/>
+          <a:bodyPr wrap="square" lIns="25400" tIns="25400" rIns="25400" rtlCol="0" anchor="t">
+            <a:noAutofit/>
           </a:bodyPr>
           <a:p>
-            <a:pPr algn="l"/>
-            <a:r>
-              <a:rPr lang="en-US" altLang="en-US" sz="900">
+            <a:pPr indent="0" algn="l">
+              <a:spcBef>
+                <a:spcPts val="0"/>
+              </a:spcBef>
+              <a:spcAft>
+                <a:spcPts val="0"/>
+              </a:spcAft>
+              <a:buNone/>
+            </a:pPr>
+            <a:r>
+              <a:rPr lang="zh-CN" altLang="en-US" sz="920">
                 <a:solidFill>
                   <a:srgbClr val="C7D7E8"/>
                 </a:solidFill>
@@ -11896,10 +12158,10 @@
                 <a:ea typeface="微软雅黑" panose="020B0503020204020204" charset="-122"/>
                 <a:cs typeface="微软雅黑" panose="020B0503020204020204" charset="-122"/>
               </a:rPr>
-              <a:t>AI </a:t>
-            </a:r>
-            <a:r>
-              <a:rPr lang="zh-CN" altLang="en-US" sz="900">
+              <a:t>校验窗口、</a:t>
+            </a:r>
+            <a:r>
+              <a:rPr lang="en-US" altLang="zh-CN" sz="920">
                 <a:solidFill>
                   <a:srgbClr val="C7D7E8"/>
                 </a:solidFill>
@@ -11907,10 +12169,10 @@
                 <a:ea typeface="微软雅黑" panose="020B0503020204020204" charset="-122"/>
                 <a:cs typeface="微软雅黑" panose="020B0503020204020204" charset="-122"/>
               </a:rPr>
-              <a:t>提取</a:t>
-            </a:r>
-            <a:r>
-              <a:rPr lang="en-US" altLang="zh-CN" sz="900">
+              <a:t>nonce</a:t>
+            </a:r>
+            <a:r>
+              <a:rPr lang="zh-CN" altLang="en-US" sz="920">
                 <a:solidFill>
                   <a:srgbClr val="C7D7E8"/>
                 </a:solidFill>
@@ -11918,10 +12180,10 @@
                 <a:ea typeface="微软雅黑" panose="020B0503020204020204" charset="-122"/>
                 <a:cs typeface="微软雅黑" panose="020B0503020204020204" charset="-122"/>
               </a:rPr>
-              <a:t> + </a:t>
-            </a:r>
-            <a:r>
-              <a:rPr lang="zh-CN" altLang="en-US" sz="900">
+              <a:t>、收款人；</a:t>
+            </a:r>
+            <a:r>
+              <a:rPr lang="en-US" altLang="zh-CN" sz="920">
                 <a:solidFill>
                   <a:srgbClr val="C7D7E8"/>
                 </a:solidFill>
@@ -11929,9 +12191,42 @@
                 <a:ea typeface="微软雅黑" panose="020B0503020204020204" charset="-122"/>
                 <a:cs typeface="微软雅黑" panose="020B0503020204020204" charset="-122"/>
               </a:rPr>
-              <a:t>人工复核</a:t>
-            </a:r>
-            <a:endParaRPr lang="zh-CN" altLang="en-US" sz="900">
+              <a:t>ReceivableSettlement </a:t>
+            </a:r>
+            <a:r>
+              <a:rPr lang="zh-CN" altLang="en-US" sz="920">
+                <a:solidFill>
+                  <a:srgbClr val="C7D7E8"/>
+                </a:solidFill>
+                <a:latin typeface="微软雅黑" panose="020B0503020204020204" charset="-122"/>
+                <a:ea typeface="微软雅黑" panose="020B0503020204020204" charset="-122"/>
+                <a:cs typeface="微软雅黑" panose="020B0503020204020204" charset="-122"/>
+              </a:rPr>
+              <a:t>防重复结算，</a:t>
+            </a:r>
+            <a:r>
+              <a:rPr lang="en-US" altLang="zh-CN" sz="920">
+                <a:solidFill>
+                  <a:srgbClr val="C7D7E8"/>
+                </a:solidFill>
+                <a:latin typeface="微软雅黑" panose="020B0503020204020204" charset="-122"/>
+                <a:ea typeface="微软雅黑" panose="020B0503020204020204" charset="-122"/>
+                <a:cs typeface="微软雅黑" panose="020B0503020204020204" charset="-122"/>
+              </a:rPr>
+              <a:t>AuditProofRegistry </a:t>
+            </a:r>
+            <a:r>
+              <a:rPr lang="zh-CN" altLang="en-US" sz="920">
+                <a:solidFill>
+                  <a:srgbClr val="C7D7E8"/>
+                </a:solidFill>
+                <a:latin typeface="微软雅黑" panose="020B0503020204020204" charset="-122"/>
+                <a:ea typeface="微软雅黑" panose="020B0503020204020204" charset="-122"/>
+                <a:cs typeface="微软雅黑" panose="020B0503020204020204" charset="-122"/>
+              </a:rPr>
+              <a:t>登记证据哈希。</a:t>
+            </a:r>
+            <a:endParaRPr lang="zh-CN" altLang="en-US" sz="920">
               <a:solidFill>
                 <a:srgbClr val="C7D7E8"/>
               </a:solidFill>
@@ -11944,24 +12239,26 @@
       </p:sp>
       <p:sp>
         <p:nvSpPr>
-          <p:cNvPr id="82" name="椭圆 81"/>
+          <p:cNvPr id="73" name="圆角矩形 72"/>
           <p:cNvSpPr/>
           <p:nvPr/>
         </p:nvSpPr>
         <p:spPr>
           <a:xfrm>
-            <a:off x="7137400" y="3111500"/>
-            <a:ext cx="431800" cy="431800"/>
-          </a:xfrm>
-          <a:prstGeom prst="ellipse">
+            <a:off x="6756400" y="1816100"/>
+            <a:ext cx="4826000" cy="3568700"/>
+          </a:xfrm>
+          <a:prstGeom prst="roundRect">
             <a:avLst/>
           </a:prstGeom>
           <a:solidFill>
-            <a:srgbClr val="FFCB66"/>
+            <a:srgbClr val="0A1D32"/>
           </a:solidFill>
-          <a:ln w="19050">
+          <a:ln w="12700">
             <a:solidFill>
-              <a:srgbClr val="071426"/>
+              <a:srgbClr val="244666">
+                <a:alpha val="85000"/>
+              </a:srgbClr>
             </a:solidFill>
           </a:ln>
         </p:spPr>
@@ -11991,174 +12288,24 @@
       </p:sp>
       <p:sp>
         <p:nvSpPr>
-          <p:cNvPr id="83" name="文本框 82"/>
-          <p:cNvSpPr txBox="1"/>
-          <p:nvPr/>
-        </p:nvSpPr>
-        <p:spPr>
-          <a:xfrm>
-            <a:off x="7137400" y="3238500"/>
-            <a:ext cx="431800" cy="322580"/>
+          <p:cNvPr id="74" name="矩形 73"/>
+          <p:cNvSpPr/>
+          <p:nvPr/>
+        </p:nvSpPr>
+        <p:spPr>
+          <a:xfrm>
+            <a:off x="6756400" y="1816100"/>
+            <a:ext cx="50800" cy="3568700"/>
           </a:xfrm>
           <a:prstGeom prst="rect">
             <a:avLst/>
           </a:prstGeom>
-          <a:noFill/>
-        </p:spPr>
-        <p:txBody>
-          <a:bodyPr wrap="square" lIns="0" tIns="0" rIns="0" rtlCol="0" anchor="t">
-            <a:normAutofit/>
-          </a:bodyPr>
-          <a:p>
-            <a:pPr algn="ctr"/>
-            <a:r>
-              <a:rPr lang="en-US" altLang="en-US" sz="835" b="1">
-                <a:solidFill>
-                  <a:srgbClr val="071426"/>
-                </a:solidFill>
-                <a:latin typeface="Aptos" charset="0"/>
-                <a:cs typeface="Aptos" charset="0"/>
-              </a:rPr>
-              <a:t>02</a:t>
-            </a:r>
-            <a:endParaRPr lang="en-US" altLang="en-US" sz="835" b="1">
-              <a:solidFill>
-                <a:srgbClr val="071426"/>
-              </a:solidFill>
-              <a:latin typeface="Aptos" charset="0"/>
-              <a:cs typeface="Aptos" charset="0"/>
-            </a:endParaRPr>
-          </a:p>
-        </p:txBody>
-      </p:sp>
-      <p:sp>
-        <p:nvSpPr>
-          <p:cNvPr id="84" name="文本框 83"/>
-          <p:cNvSpPr txBox="1"/>
-          <p:nvPr/>
-        </p:nvSpPr>
-        <p:spPr>
-          <a:xfrm>
-            <a:off x="7747000" y="3124200"/>
-            <a:ext cx="3175000" cy="322580"/>
-          </a:xfrm>
-          <a:prstGeom prst="rect">
-            <a:avLst/>
-          </a:prstGeom>
-          <a:noFill/>
-        </p:spPr>
-        <p:txBody>
-          <a:bodyPr wrap="square" lIns="0" tIns="0" rIns="0" rtlCol="0" anchor="t">
-            <a:normAutofit/>
-          </a:bodyPr>
-          <a:p>
-            <a:pPr algn="l"/>
-            <a:r>
-              <a:rPr lang="zh-CN" altLang="en-US" sz="1110" b="1">
-                <a:solidFill>
-                  <a:srgbClr val="F4F8FC"/>
-                </a:solidFill>
-                <a:latin typeface="微软雅黑" panose="020B0503020204020204" charset="-122"/>
-                <a:ea typeface="微软雅黑" panose="020B0503020204020204" charset="-122"/>
-              </a:rPr>
-              <a:t>双签授权</a:t>
-            </a:r>
-            <a:endParaRPr lang="zh-CN" altLang="en-US" sz="1110" b="1">
-              <a:solidFill>
-                <a:srgbClr val="F4F8FC"/>
-              </a:solidFill>
-              <a:latin typeface="微软雅黑" panose="020B0503020204020204" charset="-122"/>
-              <a:ea typeface="微软雅黑" panose="020B0503020204020204" charset="-122"/>
-            </a:endParaRPr>
-          </a:p>
-        </p:txBody>
-      </p:sp>
-      <p:sp>
-        <p:nvSpPr>
-          <p:cNvPr id="85" name="文本框 84"/>
-          <p:cNvSpPr txBox="1"/>
-          <p:nvPr/>
-        </p:nvSpPr>
-        <p:spPr>
-          <a:xfrm>
-            <a:off x="7747000" y="3340100"/>
-            <a:ext cx="3175000" cy="322580"/>
-          </a:xfrm>
-          <a:prstGeom prst="rect">
-            <a:avLst/>
-          </a:prstGeom>
-          <a:noFill/>
-        </p:spPr>
-        <p:txBody>
-          <a:bodyPr wrap="square" lIns="0" tIns="0" rIns="0" rtlCol="0" anchor="t">
-            <a:normAutofit/>
-          </a:bodyPr>
-          <a:p>
-            <a:pPr algn="l"/>
-            <a:r>
-              <a:rPr lang="zh-CN" altLang="en-US" sz="900">
-                <a:solidFill>
-                  <a:srgbClr val="C7D7E8"/>
-                </a:solidFill>
-                <a:latin typeface="微软雅黑" panose="020B0503020204020204" charset="-122"/>
-                <a:ea typeface="微软雅黑" panose="020B0503020204020204" charset="-122"/>
-                <a:cs typeface="微软雅黑" panose="020B0503020204020204" charset="-122"/>
-              </a:rPr>
-              <a:t>独立验签</a:t>
-            </a:r>
-            <a:r>
-              <a:rPr lang="en-US" altLang="zh-CN" sz="900">
-                <a:solidFill>
-                  <a:srgbClr val="C7D7E8"/>
-                </a:solidFill>
-                <a:latin typeface="微软雅黑" panose="020B0503020204020204" charset="-122"/>
-                <a:ea typeface="微软雅黑" panose="020B0503020204020204" charset="-122"/>
-                <a:cs typeface="微软雅黑" panose="020B0503020204020204" charset="-122"/>
-              </a:rPr>
-              <a:t> + </a:t>
-            </a:r>
-            <a:r>
-              <a:rPr lang="zh-CN" altLang="en-US" sz="900">
-                <a:solidFill>
-                  <a:srgbClr val="C7D7E8"/>
-                </a:solidFill>
-                <a:latin typeface="微软雅黑" panose="020B0503020204020204" charset="-122"/>
-                <a:ea typeface="微软雅黑" panose="020B0503020204020204" charset="-122"/>
-                <a:cs typeface="微软雅黑" panose="020B0503020204020204" charset="-122"/>
-              </a:rPr>
-              <a:t>哈希绑定</a:t>
-            </a:r>
-            <a:endParaRPr lang="zh-CN" altLang="en-US" sz="900">
-              <a:solidFill>
-                <a:srgbClr val="C7D7E8"/>
-              </a:solidFill>
-              <a:latin typeface="微软雅黑" panose="020B0503020204020204" charset="-122"/>
-              <a:ea typeface="微软雅黑" panose="020B0503020204020204" charset="-122"/>
-              <a:cs typeface="微软雅黑" panose="020B0503020204020204" charset="-122"/>
-            </a:endParaRPr>
-          </a:p>
-        </p:txBody>
-      </p:sp>
-      <p:sp>
-        <p:nvSpPr>
-          <p:cNvPr id="86" name="椭圆 85"/>
-          <p:cNvSpPr/>
-          <p:nvPr/>
-        </p:nvSpPr>
-        <p:spPr>
-          <a:xfrm>
-            <a:off x="7137400" y="3594100"/>
-            <a:ext cx="431800" cy="431800"/>
-          </a:xfrm>
-          <a:prstGeom prst="ellipse">
-            <a:avLst/>
-          </a:prstGeom>
           <a:solidFill>
-            <a:srgbClr val="45F0C5"/>
+            <a:srgbClr val="24D5FF"/>
           </a:solidFill>
-          <a:ln w="19050">
+          <a:ln w="12700">
             <a:solidFill>
-              <a:srgbClr val="071426"/>
+              <a:srgbClr val="24D5FF"/>
             </a:solidFill>
           </a:ln>
         </p:spPr>
@@ -12188,14 +12335,14 @@
       </p:sp>
       <p:sp>
         <p:nvSpPr>
-          <p:cNvPr id="87" name="文本框 86"/>
+          <p:cNvPr id="75" name="文本框 74"/>
           <p:cNvSpPr txBox="1"/>
           <p:nvPr/>
         </p:nvSpPr>
         <p:spPr>
           <a:xfrm>
-            <a:off x="7137400" y="3721100"/>
-            <a:ext cx="431800" cy="322580"/>
+            <a:off x="7086600" y="2032000"/>
+            <a:ext cx="4064000" cy="360680"/>
           </a:xfrm>
           <a:prstGeom prst="rect">
             <a:avLst/>
@@ -12203,24 +12350,32 @@
           <a:noFill/>
         </p:spPr>
         <p:txBody>
-          <a:bodyPr wrap="square" lIns="0" tIns="0" rIns="0" rtlCol="0" anchor="t">
-            <a:normAutofit/>
+          <a:bodyPr wrap="square" lIns="38100" tIns="38100" rIns="38100" rtlCol="0" anchor="t">
+            <a:noAutofit/>
           </a:bodyPr>
           <a:p>
-            <a:pPr algn="ctr"/>
-            <a:r>
-              <a:rPr lang="en-US" altLang="en-US" sz="835" b="1">
-                <a:solidFill>
-                  <a:srgbClr val="071426"/>
+            <a:pPr indent="0" algn="l">
+              <a:spcBef>
+                <a:spcPts val="0"/>
+              </a:spcBef>
+              <a:spcAft>
+                <a:spcPts val="0"/>
+              </a:spcAft>
+              <a:buNone/>
+            </a:pPr>
+            <a:r>
+              <a:rPr lang="en-US" altLang="en-US" sz="800" b="1" spc="140">
+                <a:solidFill>
+                  <a:srgbClr val="24D5FF"/>
                 </a:solidFill>
                 <a:latin typeface="Aptos" charset="0"/>
                 <a:cs typeface="Aptos" charset="0"/>
               </a:rPr>
-              <a:t>03</a:t>
-            </a:r>
-            <a:endParaRPr lang="en-US" altLang="en-US" sz="835" b="1">
+              <a:t>VERIFIABLE PATH</a:t>
+            </a:r>
+            <a:endParaRPr lang="en-US" altLang="en-US" sz="800" b="1" spc="140">
               <a:solidFill>
-                <a:srgbClr val="071426"/>
+                <a:srgbClr val="24D5FF"/>
               </a:solidFill>
               <a:latin typeface="Aptos" charset="0"/>
               <a:cs typeface="Aptos" charset="0"/>
@@ -12230,14 +12385,14 @@
       </p:sp>
       <p:sp>
         <p:nvSpPr>
-          <p:cNvPr id="88" name="文本框 87"/>
+          <p:cNvPr id="76" name="文本框 75"/>
           <p:cNvSpPr txBox="1"/>
           <p:nvPr/>
         </p:nvSpPr>
         <p:spPr>
           <a:xfrm>
-            <a:off x="7747000" y="3606800"/>
-            <a:ext cx="3175000" cy="322580"/>
+            <a:off x="7086600" y="2286000"/>
+            <a:ext cx="3810000" cy="360680"/>
           </a:xfrm>
           <a:prstGeom prst="rect">
             <a:avLst/>
@@ -12245,102 +12400,130 @@
           <a:noFill/>
         </p:spPr>
         <p:txBody>
-          <a:bodyPr wrap="square" lIns="0" tIns="0" rIns="0" rtlCol="0" anchor="t">
-            <a:normAutofit/>
+          <a:bodyPr wrap="square" lIns="38100" tIns="38100" rIns="38100" rtlCol="0" anchor="t">
+            <a:noAutofit/>
           </a:bodyPr>
           <a:p>
-            <a:pPr algn="l"/>
-            <a:r>
-              <a:rPr lang="en-US" altLang="en-US" sz="1110" b="1">
+            <a:pPr indent="0" algn="l">
+              <a:spcBef>
+                <a:spcPts val="0"/>
+              </a:spcBef>
+              <a:spcAft>
+                <a:spcPts val="0"/>
+              </a:spcAft>
+              <a:buNone/>
+            </a:pPr>
+            <a:r>
+              <a:rPr lang="zh-CN" altLang="en-US" sz="1600" b="1">
                 <a:solidFill>
                   <a:srgbClr val="F4F8FC"/>
                 </a:solidFill>
                 <a:latin typeface="微软雅黑" panose="020B0503020204020204" charset="-122"/>
                 <a:ea typeface="微软雅黑" panose="020B0503020204020204" charset="-122"/>
-                <a:cs typeface="微软雅黑" panose="020B0503020204020204" charset="-122"/>
-              </a:rPr>
-              <a:t>CC3 </a:t>
-            </a:r>
-            <a:r>
-              <a:rPr lang="zh-CN" altLang="en-US" sz="1110" b="1">
-                <a:solidFill>
-                  <a:srgbClr val="F4F8FC"/>
-                </a:solidFill>
-                <a:latin typeface="微软雅黑" panose="020B0503020204020204" charset="-122"/>
-                <a:ea typeface="微软雅黑" panose="020B0503020204020204" charset="-122"/>
-                <a:cs typeface="微软雅黑" panose="020B0503020204020204" charset="-122"/>
-              </a:rPr>
-              <a:t>链上状态</a:t>
-            </a:r>
-            <a:endParaRPr lang="zh-CN" altLang="en-US" sz="1110" b="1">
+              </a:rPr>
+              <a:t>可验证链路</a:t>
+            </a:r>
+            <a:endParaRPr lang="zh-CN" altLang="en-US" sz="1600" b="1">
               <a:solidFill>
                 <a:srgbClr val="F4F8FC"/>
               </a:solidFill>
               <a:latin typeface="微软雅黑" panose="020B0503020204020204" charset="-122"/>
               <a:ea typeface="微软雅黑" panose="020B0503020204020204" charset="-122"/>
-              <a:cs typeface="微软雅黑" panose="020B0503020204020204" charset="-122"/>
             </a:endParaRPr>
           </a:p>
         </p:txBody>
       </p:sp>
-      <p:sp>
-        <p:nvSpPr>
-          <p:cNvPr id="89" name="文本框 88"/>
-          <p:cNvSpPr txBox="1"/>
-          <p:nvPr/>
-        </p:nvSpPr>
-        <p:spPr>
-          <a:xfrm>
-            <a:off x="7747000" y="3822700"/>
-            <a:ext cx="3175000" cy="322580"/>
-          </a:xfrm>
-          <a:prstGeom prst="rect">
-            <a:avLst/>
-          </a:prstGeom>
-          <a:noFill/>
-        </p:spPr>
-        <p:txBody>
-          <a:bodyPr wrap="square" lIns="0" tIns="0" rIns="0" rtlCol="0" anchor="t">
-            <a:normAutofit/>
-          </a:bodyPr>
-          <a:p>
-            <a:pPr algn="l"/>
-            <a:r>
-              <a:rPr lang="en-US" altLang="en-US" sz="900">
-                <a:solidFill>
-                  <a:srgbClr val="C7D7E8"/>
-                </a:solidFill>
-                <a:latin typeface="微软雅黑" panose="020B0503020204020204" charset="-122"/>
-                <a:ea typeface="微软雅黑" panose="020B0503020204020204" charset="-122"/>
-              </a:rPr>
-              <a:t>ReceivableSettlement</a:t>
-            </a:r>
-            <a:endParaRPr lang="en-US" altLang="en-US" sz="900">
-              <a:solidFill>
-                <a:srgbClr val="C7D7E8"/>
-              </a:solidFill>
-              <a:latin typeface="微软雅黑" panose="020B0503020204020204" charset="-122"/>
-              <a:ea typeface="微软雅黑" panose="020B0503020204020204" charset="-122"/>
-            </a:endParaRPr>
-          </a:p>
-        </p:txBody>
-      </p:sp>
-      <p:sp>
-        <p:nvSpPr>
-          <p:cNvPr id="90" name="椭圆 89"/>
+      <p:cxnSp>
+        <p:nvCxnSpPr>
+          <p:cNvPr id="77" name="直接连接符 76"/>
+          <p:cNvCxnSpPr/>
+          <p:nvPr/>
+        </p:nvCxnSpPr>
+        <p:spPr>
+          <a:xfrm>
+            <a:off x="7353300" y="2844800"/>
+            <a:ext cx="635" cy="1676400"/>
+          </a:xfrm>
+          <a:prstGeom prst="line">
+            <a:avLst/>
+          </a:prstGeom>
+          <a:ln w="22860">
+            <a:solidFill>
+              <a:srgbClr val="244666">
+                <a:alpha val="88000"/>
+              </a:srgbClr>
+            </a:solidFill>
+          </a:ln>
+        </p:spPr>
+        <p:style>
+          <a:lnRef idx="2">
+            <a:schemeClr val="accent1"/>
+          </a:lnRef>
+          <a:fillRef idx="0">
+            <a:srgbClr val="FFFFFF"/>
+          </a:fillRef>
+          <a:effectRef idx="0">
+            <a:srgbClr val="FFFFFF"/>
+          </a:effectRef>
+          <a:fontRef idx="minor">
+            <a:schemeClr val="tx1"/>
+          </a:fontRef>
+        </p:style>
+      </p:cxnSp>
+      <p:cxnSp>
+        <p:nvCxnSpPr>
+          <p:cNvPr id="78" name="直接连接符 77"/>
+          <p:cNvCxnSpPr/>
+          <p:nvPr/>
+        </p:nvCxnSpPr>
+        <p:spPr>
+          <a:xfrm>
+            <a:off x="7353300" y="4432300"/>
+            <a:ext cx="635" cy="127000"/>
+          </a:xfrm>
+          <a:prstGeom prst="line">
+            <a:avLst/>
+          </a:prstGeom>
+          <a:ln w="22860">
+            <a:solidFill>
+              <a:srgbClr val="24D5FF">
+                <a:alpha val="92000"/>
+              </a:srgbClr>
+            </a:solidFill>
+            <a:tailEnd type="triangle"/>
+          </a:ln>
+        </p:spPr>
+        <p:style>
+          <a:lnRef idx="2">
+            <a:schemeClr val="accent1"/>
+          </a:lnRef>
+          <a:fillRef idx="0">
+            <a:srgbClr val="FFFFFF"/>
+          </a:fillRef>
+          <a:effectRef idx="0">
+            <a:srgbClr val="FFFFFF"/>
+          </a:effectRef>
+          <a:fontRef idx="minor">
+            <a:schemeClr val="tx1"/>
+          </a:fontRef>
+        </p:style>
+      </p:cxnSp>
+      <p:sp>
+        <p:nvSpPr>
+          <p:cNvPr id="79" name="椭圆 78"/>
           <p:cNvSpPr/>
           <p:nvPr/>
         </p:nvSpPr>
         <p:spPr>
           <a:xfrm>
-            <a:off x="7137400" y="4076700"/>
+            <a:off x="7137400" y="2628900"/>
             <a:ext cx="431800" cy="431800"/>
           </a:xfrm>
           <a:prstGeom prst="ellipse">
             <a:avLst/>
           </a:prstGeom>
           <a:solidFill>
-            <a:srgbClr val="3B82F6"/>
+            <a:srgbClr val="24D5FF"/>
           </a:solidFill>
           <a:ln w="19050">
             <a:solidFill>
@@ -12374,13 +12557,13 @@
       </p:sp>
       <p:sp>
         <p:nvSpPr>
-          <p:cNvPr id="91" name="文本框 90"/>
+          <p:cNvPr id="80" name="文本框 79"/>
           <p:cNvSpPr txBox="1"/>
           <p:nvPr/>
         </p:nvSpPr>
         <p:spPr>
           <a:xfrm>
-            <a:off x="7137400" y="4203700"/>
+            <a:off x="7137400" y="2755900"/>
             <a:ext cx="431800" cy="322580"/>
           </a:xfrm>
           <a:prstGeom prst="rect">
@@ -12389,22 +12572,30 @@
           <a:noFill/>
         </p:spPr>
         <p:txBody>
-          <a:bodyPr wrap="square" lIns="0" tIns="0" rIns="0" rtlCol="0" anchor="t">
-            <a:normAutofit/>
+          <a:bodyPr wrap="square" lIns="0" tIns="0" rIns="0" rtlCol="0" anchor="ctr">
+            <a:noAutofit/>
           </a:bodyPr>
           <a:p>
-            <a:pPr algn="ctr"/>
-            <a:r>
-              <a:rPr lang="en-US" altLang="en-US" sz="835" b="1">
+            <a:pPr indent="0" algn="ctr">
+              <a:spcBef>
+                <a:spcPts val="0"/>
+              </a:spcBef>
+              <a:spcAft>
+                <a:spcPts val="0"/>
+              </a:spcAft>
+              <a:buNone/>
+            </a:pPr>
+            <a:r>
+              <a:rPr lang="en-US" altLang="en-US" sz="750" b="1">
                 <a:solidFill>
                   <a:srgbClr val="071426"/>
                 </a:solidFill>
                 <a:latin typeface="Aptos" charset="0"/>
                 <a:cs typeface="Aptos" charset="0"/>
               </a:rPr>
-              <a:t>04</a:t>
-            </a:r>
-            <a:endParaRPr lang="en-US" altLang="en-US" sz="835" b="1">
+              <a:t>01</a:t>
+            </a:r>
+            <a:endParaRPr lang="en-US" altLang="en-US" sz="750" b="1">
               <a:solidFill>
                 <a:srgbClr val="071426"/>
               </a:solidFill>
@@ -12416,14 +12607,14 @@
       </p:sp>
       <p:sp>
         <p:nvSpPr>
-          <p:cNvPr id="92" name="文本框 91"/>
+          <p:cNvPr id="81" name="文本框 80"/>
           <p:cNvSpPr txBox="1"/>
           <p:nvPr/>
         </p:nvSpPr>
         <p:spPr>
           <a:xfrm>
-            <a:off x="7747000" y="4089400"/>
-            <a:ext cx="3175000" cy="322580"/>
+            <a:off x="7747000" y="2641600"/>
+            <a:ext cx="3175000" cy="347980"/>
           </a:xfrm>
           <a:prstGeom prst="rect">
             <a:avLst/>
@@ -12431,22 +12622,30 @@
           <a:noFill/>
         </p:spPr>
         <p:txBody>
-          <a:bodyPr wrap="square" lIns="0" tIns="0" rIns="0" rtlCol="0" anchor="t">
-            <a:normAutofit/>
+          <a:bodyPr wrap="square" lIns="25400" tIns="25400" rIns="25400" rtlCol="0" anchor="t">
+            <a:noAutofit/>
           </a:bodyPr>
           <a:p>
-            <a:pPr algn="l"/>
-            <a:r>
-              <a:rPr lang="zh-CN" altLang="en-US" sz="1110" b="1">
+            <a:pPr indent="0" algn="l">
+              <a:spcBef>
+                <a:spcPts val="0"/>
+              </a:spcBef>
+              <a:spcAft>
+                <a:spcPts val="0"/>
+              </a:spcAft>
+              <a:buNone/>
+            </a:pPr>
+            <a:r>
+              <a:rPr lang="zh-CN" altLang="en-US" sz="1080" b="1">
                 <a:solidFill>
                   <a:srgbClr val="F4F8FC"/>
                 </a:solidFill>
                 <a:latin typeface="微软雅黑" panose="020B0503020204020204" charset="-122"/>
                 <a:ea typeface="微软雅黑" panose="020B0503020204020204" charset="-122"/>
               </a:rPr>
-              <a:t>异步审计证据</a:t>
-            </a:r>
-            <a:endParaRPr lang="zh-CN" altLang="en-US" sz="1110" b="1">
+              <a:t>贸易资料</a:t>
+            </a:r>
+            <a:endParaRPr lang="zh-CN" altLang="en-US" sz="1080" b="1">
               <a:solidFill>
                 <a:srgbClr val="F4F8FC"/>
               </a:solidFill>
@@ -12458,14 +12657,14 @@
       </p:sp>
       <p:sp>
         <p:nvSpPr>
-          <p:cNvPr id="93" name="文本框 92"/>
+          <p:cNvPr id="82" name="文本框 81"/>
           <p:cNvSpPr txBox="1"/>
           <p:nvPr/>
         </p:nvSpPr>
         <p:spPr>
           <a:xfrm>
-            <a:off x="7747000" y="4305300"/>
-            <a:ext cx="3175000" cy="322580"/>
+            <a:off x="7747000" y="2870200"/>
+            <a:ext cx="3175000" cy="360680"/>
           </a:xfrm>
           <a:prstGeom prst="rect">
             <a:avLst/>
@@ -12473,53 +12672,94 @@
           <a:noFill/>
         </p:spPr>
         <p:txBody>
-          <a:bodyPr wrap="square" lIns="0" tIns="0" rIns="0" rtlCol="0" anchor="t">
-            <a:normAutofit/>
+          <a:bodyPr wrap="square" lIns="38100" tIns="38100" rIns="38100" rtlCol="0" anchor="t">
+            <a:noAutofit/>
           </a:bodyPr>
           <a:p>
-            <a:pPr algn="l"/>
-            <a:r>
-              <a:rPr lang="en-US" altLang="en-US" sz="900">
+            <a:pPr indent="0" algn="l">
+              <a:spcBef>
+                <a:spcPts val="0"/>
+              </a:spcBef>
+              <a:spcAft>
+                <a:spcPts val="0"/>
+              </a:spcAft>
+              <a:buNone/>
+            </a:pPr>
+            <a:r>
+              <a:rPr lang="en-US" altLang="en-US" sz="860">
                 <a:solidFill>
                   <a:srgbClr val="C7D7E8"/>
                 </a:solidFill>
                 <a:latin typeface="微软雅黑" panose="020B0503020204020204" charset="-122"/>
                 <a:ea typeface="微软雅黑" panose="020B0503020204020204" charset="-122"/>
-              </a:rPr>
-              <a:t>AuditProofRegistry</a:t>
-            </a:r>
-            <a:endParaRPr lang="en-US" altLang="en-US" sz="900">
+                <a:cs typeface="微软雅黑" panose="020B0503020204020204" charset="-122"/>
+              </a:rPr>
+              <a:t>AI </a:t>
+            </a:r>
+            <a:r>
+              <a:rPr lang="zh-CN" altLang="en-US" sz="860">
+                <a:solidFill>
+                  <a:srgbClr val="C7D7E8"/>
+                </a:solidFill>
+                <a:latin typeface="微软雅黑" panose="020B0503020204020204" charset="-122"/>
+                <a:ea typeface="微软雅黑" panose="020B0503020204020204" charset="-122"/>
+                <a:cs typeface="微软雅黑" panose="020B0503020204020204" charset="-122"/>
+              </a:rPr>
+              <a:t>提取</a:t>
+            </a:r>
+            <a:r>
+              <a:rPr lang="en-US" altLang="zh-CN" sz="860">
+                <a:solidFill>
+                  <a:srgbClr val="C7D7E8"/>
+                </a:solidFill>
+                <a:latin typeface="微软雅黑" panose="020B0503020204020204" charset="-122"/>
+                <a:ea typeface="微软雅黑" panose="020B0503020204020204" charset="-122"/>
+                <a:cs typeface="微软雅黑" panose="020B0503020204020204" charset="-122"/>
+              </a:rPr>
+              <a:t> + </a:t>
+            </a:r>
+            <a:r>
+              <a:rPr lang="zh-CN" altLang="en-US" sz="860">
+                <a:solidFill>
+                  <a:srgbClr val="C7D7E8"/>
+                </a:solidFill>
+                <a:latin typeface="微软雅黑" panose="020B0503020204020204" charset="-122"/>
+                <a:ea typeface="微软雅黑" panose="020B0503020204020204" charset="-122"/>
+                <a:cs typeface="微软雅黑" panose="020B0503020204020204" charset="-122"/>
+              </a:rPr>
+              <a:t>人工复核</a:t>
+            </a:r>
+            <a:endParaRPr lang="zh-CN" altLang="en-US" sz="860">
               <a:solidFill>
                 <a:srgbClr val="C7D7E8"/>
               </a:solidFill>
               <a:latin typeface="微软雅黑" panose="020B0503020204020204" charset="-122"/>
               <a:ea typeface="微软雅黑" panose="020B0503020204020204" charset="-122"/>
+              <a:cs typeface="微软雅黑" panose="020B0503020204020204" charset="-122"/>
             </a:endParaRPr>
           </a:p>
         </p:txBody>
       </p:sp>
       <p:sp>
         <p:nvSpPr>
-          <p:cNvPr id="94" name="圆角矩形 93"/>
+          <p:cNvPr id="83" name="椭圆 82"/>
           <p:cNvSpPr/>
           <p:nvPr/>
         </p:nvSpPr>
         <p:spPr>
           <a:xfrm>
-            <a:off x="7086600" y="4635500"/>
-            <a:ext cx="1066800" cy="279400"/>
-          </a:xfrm>
-          <a:prstGeom prst="roundRect">
+            <a:off x="7137400" y="3111500"/>
+            <a:ext cx="431800" cy="431800"/>
+          </a:xfrm>
+          <a:prstGeom prst="ellipse">
             <a:avLst/>
           </a:prstGeom>
           <a:solidFill>
-            <a:srgbClr val="102A47"/>
+            <a:srgbClr val="FFCB66"/>
           </a:solidFill>
-          <a:ln w="12700">
+          <a:ln w="19050">
             <a:solidFill>
-              <a:srgbClr val="24D5FF">
-                <a:alpha val="65000"/>
-              </a:srgbClr>
+              <a:srgbClr val="071426"/>
             </a:solidFill>
           </a:ln>
         </p:spPr>
@@ -12549,14 +12789,14 @@
       </p:sp>
       <p:sp>
         <p:nvSpPr>
-          <p:cNvPr id="95" name="文本框 94"/>
+          <p:cNvPr id="84" name="文本框 83"/>
           <p:cNvSpPr txBox="1"/>
           <p:nvPr/>
         </p:nvSpPr>
         <p:spPr>
           <a:xfrm>
-            <a:off x="7150100" y="4699000"/>
-            <a:ext cx="939800" cy="322580"/>
+            <a:off x="7137400" y="3238500"/>
+            <a:ext cx="431800" cy="322580"/>
           </a:xfrm>
           <a:prstGeom prst="rect">
             <a:avLst/>
@@ -12564,24 +12804,32 @@
           <a:noFill/>
         </p:spPr>
         <p:txBody>
-          <a:bodyPr wrap="square" lIns="0" tIns="0" rIns="0" rtlCol="0" anchor="t">
-            <a:normAutofit fontScale="80000"/>
+          <a:bodyPr wrap="square" lIns="0" tIns="0" rIns="0" rtlCol="0" anchor="ctr">
+            <a:noAutofit/>
           </a:bodyPr>
           <a:p>
-            <a:pPr algn="ctr"/>
-            <a:r>
-              <a:rPr lang="en-US" altLang="en-US" sz="1365" b="1">
-                <a:solidFill>
-                  <a:srgbClr val="24D5FF"/>
+            <a:pPr indent="0" algn="ctr">
+              <a:spcBef>
+                <a:spcPts val="0"/>
+              </a:spcBef>
+              <a:spcAft>
+                <a:spcPts val="0"/>
+              </a:spcAft>
+              <a:buNone/>
+            </a:pPr>
+            <a:r>
+              <a:rPr lang="en-US" altLang="en-US" sz="750" b="1">
+                <a:solidFill>
+                  <a:srgbClr val="071426"/>
                 </a:solidFill>
                 <a:latin typeface="Aptos" charset="0"/>
                 <a:cs typeface="Aptos" charset="0"/>
               </a:rPr>
-              <a:t>CC3 TESTNET</a:t>
-            </a:r>
-            <a:endParaRPr lang="en-US" altLang="en-US" sz="1365" b="1">
+              <a:t>02</a:t>
+            </a:r>
+            <a:endParaRPr lang="en-US" altLang="en-US" sz="750" b="1">
               <a:solidFill>
-                <a:srgbClr val="24D5FF"/>
+                <a:srgbClr val="071426"/>
               </a:solidFill>
               <a:latin typeface="Aptos" charset="0"/>
               <a:cs typeface="Aptos" charset="0"/>
@@ -12591,26 +12839,148 @@
       </p:sp>
       <p:sp>
         <p:nvSpPr>
-          <p:cNvPr id="96" name="圆角矩形 95"/>
+          <p:cNvPr id="85" name="文本框 84"/>
+          <p:cNvSpPr txBox="1"/>
+          <p:nvPr/>
+        </p:nvSpPr>
+        <p:spPr>
+          <a:xfrm>
+            <a:off x="7747000" y="3124200"/>
+            <a:ext cx="3175000" cy="347980"/>
+          </a:xfrm>
+          <a:prstGeom prst="rect">
+            <a:avLst/>
+          </a:prstGeom>
+          <a:noFill/>
+        </p:spPr>
+        <p:txBody>
+          <a:bodyPr wrap="square" lIns="25400" tIns="25400" rIns="25400" rtlCol="0" anchor="t">
+            <a:noAutofit/>
+          </a:bodyPr>
+          <a:p>
+            <a:pPr indent="0" algn="l">
+              <a:spcBef>
+                <a:spcPts val="0"/>
+              </a:spcBef>
+              <a:spcAft>
+                <a:spcPts val="0"/>
+              </a:spcAft>
+              <a:buNone/>
+            </a:pPr>
+            <a:r>
+              <a:rPr lang="zh-CN" altLang="en-US" sz="1080" b="1">
+                <a:solidFill>
+                  <a:srgbClr val="F4F8FC"/>
+                </a:solidFill>
+                <a:latin typeface="微软雅黑" panose="020B0503020204020204" charset="-122"/>
+                <a:ea typeface="微软雅黑" panose="020B0503020204020204" charset="-122"/>
+              </a:rPr>
+              <a:t>双签授权</a:t>
+            </a:r>
+            <a:endParaRPr lang="zh-CN" altLang="en-US" sz="1080" b="1">
+              <a:solidFill>
+                <a:srgbClr val="F4F8FC"/>
+              </a:solidFill>
+              <a:latin typeface="微软雅黑" panose="020B0503020204020204" charset="-122"/>
+              <a:ea typeface="微软雅黑" panose="020B0503020204020204" charset="-122"/>
+            </a:endParaRPr>
+          </a:p>
+        </p:txBody>
+      </p:sp>
+      <p:sp>
+        <p:nvSpPr>
+          <p:cNvPr id="86" name="文本框 85"/>
+          <p:cNvSpPr txBox="1"/>
+          <p:nvPr/>
+        </p:nvSpPr>
+        <p:spPr>
+          <a:xfrm>
+            <a:off x="7747000" y="3352800"/>
+            <a:ext cx="3175000" cy="360680"/>
+          </a:xfrm>
+          <a:prstGeom prst="rect">
+            <a:avLst/>
+          </a:prstGeom>
+          <a:noFill/>
+        </p:spPr>
+        <p:txBody>
+          <a:bodyPr wrap="square" lIns="38100" tIns="38100" rIns="38100" rtlCol="0" anchor="t">
+            <a:noAutofit/>
+          </a:bodyPr>
+          <a:p>
+            <a:pPr indent="0" algn="l">
+              <a:spcBef>
+                <a:spcPts val="0"/>
+              </a:spcBef>
+              <a:spcAft>
+                <a:spcPts val="0"/>
+              </a:spcAft>
+              <a:buNone/>
+            </a:pPr>
+            <a:r>
+              <a:rPr lang="zh-CN" altLang="en-US" sz="860">
+                <a:solidFill>
+                  <a:srgbClr val="C7D7E8"/>
+                </a:solidFill>
+                <a:latin typeface="微软雅黑" panose="020B0503020204020204" charset="-122"/>
+                <a:ea typeface="微软雅黑" panose="020B0503020204020204" charset="-122"/>
+                <a:cs typeface="微软雅黑" panose="020B0503020204020204" charset="-122"/>
+              </a:rPr>
+              <a:t>独立验签</a:t>
+            </a:r>
+            <a:r>
+              <a:rPr lang="en-US" altLang="zh-CN" sz="860">
+                <a:solidFill>
+                  <a:srgbClr val="C7D7E8"/>
+                </a:solidFill>
+                <a:latin typeface="微软雅黑" panose="020B0503020204020204" charset="-122"/>
+                <a:ea typeface="微软雅黑" panose="020B0503020204020204" charset="-122"/>
+                <a:cs typeface="微软雅黑" panose="020B0503020204020204" charset="-122"/>
+              </a:rPr>
+              <a:t> + </a:t>
+            </a:r>
+            <a:r>
+              <a:rPr lang="zh-CN" altLang="en-US" sz="860">
+                <a:solidFill>
+                  <a:srgbClr val="C7D7E8"/>
+                </a:solidFill>
+                <a:latin typeface="微软雅黑" panose="020B0503020204020204" charset="-122"/>
+                <a:ea typeface="微软雅黑" panose="020B0503020204020204" charset="-122"/>
+                <a:cs typeface="微软雅黑" panose="020B0503020204020204" charset="-122"/>
+              </a:rPr>
+              <a:t>哈希绑定</a:t>
+            </a:r>
+            <a:endParaRPr lang="zh-CN" altLang="en-US" sz="860">
+              <a:solidFill>
+                <a:srgbClr val="C7D7E8"/>
+              </a:solidFill>
+              <a:latin typeface="微软雅黑" panose="020B0503020204020204" charset="-122"/>
+              <a:ea typeface="微软雅黑" panose="020B0503020204020204" charset="-122"/>
+              <a:cs typeface="微软雅黑" panose="020B0503020204020204" charset="-122"/>
+            </a:endParaRPr>
+          </a:p>
+        </p:txBody>
+      </p:sp>
+      <p:sp>
+        <p:nvSpPr>
+          <p:cNvPr id="87" name="椭圆 86"/>
           <p:cNvSpPr/>
           <p:nvPr/>
         </p:nvSpPr>
         <p:spPr>
           <a:xfrm>
-            <a:off x="8229600" y="4635500"/>
-            <a:ext cx="889000" cy="279400"/>
-          </a:xfrm>
-          <a:prstGeom prst="roundRect">
+            <a:off x="7137400" y="3594100"/>
+            <a:ext cx="431800" cy="431800"/>
+          </a:xfrm>
+          <a:prstGeom prst="ellipse">
             <a:avLst/>
           </a:prstGeom>
           <a:solidFill>
-            <a:srgbClr val="102A47"/>
+            <a:srgbClr val="45F0C5"/>
           </a:solidFill>
-          <a:ln w="12700">
+          <a:ln w="19050">
             <a:solidFill>
-              <a:srgbClr val="FFCB66">
-                <a:alpha val="65000"/>
-              </a:srgbClr>
+              <a:srgbClr val="071426"/>
             </a:solidFill>
           </a:ln>
         </p:spPr>
@@ -12640,14 +13010,14 @@
       </p:sp>
       <p:sp>
         <p:nvSpPr>
-          <p:cNvPr id="97" name="文本框 96"/>
+          <p:cNvPr id="88" name="文本框 87"/>
           <p:cNvSpPr txBox="1"/>
           <p:nvPr/>
         </p:nvSpPr>
         <p:spPr>
           <a:xfrm>
-            <a:off x="8293100" y="4699000"/>
-            <a:ext cx="762000" cy="322580"/>
+            <a:off x="7137400" y="3721100"/>
+            <a:ext cx="431800" cy="322580"/>
           </a:xfrm>
           <a:prstGeom prst="rect">
             <a:avLst/>
@@ -12655,24 +13025,32 @@
           <a:noFill/>
         </p:spPr>
         <p:txBody>
-          <a:bodyPr wrap="square" lIns="0" tIns="0" rIns="0" rtlCol="0" anchor="t">
-            <a:normAutofit fontScale="80000"/>
+          <a:bodyPr wrap="square" lIns="0" tIns="0" rIns="0" rtlCol="0" anchor="ctr">
+            <a:noAutofit/>
           </a:bodyPr>
           <a:p>
-            <a:pPr algn="ctr"/>
-            <a:r>
-              <a:rPr lang="en-US" altLang="en-US" sz="1365" b="1">
-                <a:solidFill>
-                  <a:srgbClr val="FFCB66"/>
+            <a:pPr indent="0" algn="ctr">
+              <a:spcBef>
+                <a:spcPts val="0"/>
+              </a:spcBef>
+              <a:spcAft>
+                <a:spcPts val="0"/>
+              </a:spcAft>
+              <a:buNone/>
+            </a:pPr>
+            <a:r>
+              <a:rPr lang="en-US" altLang="en-US" sz="750" b="1">
+                <a:solidFill>
+                  <a:srgbClr val="071426"/>
                 </a:solidFill>
                 <a:latin typeface="Aptos" charset="0"/>
                 <a:cs typeface="Aptos" charset="0"/>
               </a:rPr>
-              <a:t>MockUSDC</a:t>
-            </a:r>
-            <a:endParaRPr lang="en-US" altLang="en-US" sz="1365" b="1">
+              <a:t>03</a:t>
+            </a:r>
+            <a:endParaRPr lang="en-US" altLang="en-US" sz="750" b="1">
               <a:solidFill>
-                <a:srgbClr val="FFCB66"/>
+                <a:srgbClr val="071426"/>
               </a:solidFill>
               <a:latin typeface="Aptos" charset="0"/>
               <a:cs typeface="Aptos" charset="0"/>
@@ -12682,26 +13060,137 @@
       </p:sp>
       <p:sp>
         <p:nvSpPr>
-          <p:cNvPr id="98" name="圆角矩形 97"/>
+          <p:cNvPr id="89" name="文本框 88"/>
+          <p:cNvSpPr txBox="1"/>
+          <p:nvPr/>
+        </p:nvSpPr>
+        <p:spPr>
+          <a:xfrm>
+            <a:off x="7747000" y="3606800"/>
+            <a:ext cx="3175000" cy="347980"/>
+          </a:xfrm>
+          <a:prstGeom prst="rect">
+            <a:avLst/>
+          </a:prstGeom>
+          <a:noFill/>
+        </p:spPr>
+        <p:txBody>
+          <a:bodyPr wrap="square" lIns="25400" tIns="25400" rIns="25400" rtlCol="0" anchor="t">
+            <a:noAutofit/>
+          </a:bodyPr>
+          <a:p>
+            <a:pPr indent="0" algn="l">
+              <a:spcBef>
+                <a:spcPts val="0"/>
+              </a:spcBef>
+              <a:spcAft>
+                <a:spcPts val="0"/>
+              </a:spcAft>
+              <a:buNone/>
+            </a:pPr>
+            <a:r>
+              <a:rPr lang="en-US" altLang="en-US" sz="1080" b="1">
+                <a:solidFill>
+                  <a:srgbClr val="F4F8FC"/>
+                </a:solidFill>
+                <a:latin typeface="微软雅黑" panose="020B0503020204020204" charset="-122"/>
+                <a:ea typeface="微软雅黑" panose="020B0503020204020204" charset="-122"/>
+                <a:cs typeface="微软雅黑" panose="020B0503020204020204" charset="-122"/>
+              </a:rPr>
+              <a:t>CC3 </a:t>
+            </a:r>
+            <a:r>
+              <a:rPr lang="zh-CN" altLang="en-US" sz="1080" b="1">
+                <a:solidFill>
+                  <a:srgbClr val="F4F8FC"/>
+                </a:solidFill>
+                <a:latin typeface="微软雅黑" panose="020B0503020204020204" charset="-122"/>
+                <a:ea typeface="微软雅黑" panose="020B0503020204020204" charset="-122"/>
+                <a:cs typeface="微软雅黑" panose="020B0503020204020204" charset="-122"/>
+              </a:rPr>
+              <a:t>链上状态</a:t>
+            </a:r>
+            <a:endParaRPr lang="zh-CN" altLang="en-US" sz="1080" b="1">
+              <a:solidFill>
+                <a:srgbClr val="F4F8FC"/>
+              </a:solidFill>
+              <a:latin typeface="微软雅黑" panose="020B0503020204020204" charset="-122"/>
+              <a:ea typeface="微软雅黑" panose="020B0503020204020204" charset="-122"/>
+              <a:cs typeface="微软雅黑" panose="020B0503020204020204" charset="-122"/>
+            </a:endParaRPr>
+          </a:p>
+        </p:txBody>
+      </p:sp>
+      <p:sp>
+        <p:nvSpPr>
+          <p:cNvPr id="90" name="文本框 89"/>
+          <p:cNvSpPr txBox="1"/>
+          <p:nvPr/>
+        </p:nvSpPr>
+        <p:spPr>
+          <a:xfrm>
+            <a:off x="7747000" y="3835400"/>
+            <a:ext cx="3175000" cy="360680"/>
+          </a:xfrm>
+          <a:prstGeom prst="rect">
+            <a:avLst/>
+          </a:prstGeom>
+          <a:noFill/>
+        </p:spPr>
+        <p:txBody>
+          <a:bodyPr wrap="square" lIns="38100" tIns="38100" rIns="38100" rtlCol="0" anchor="t">
+            <a:noAutofit/>
+          </a:bodyPr>
+          <a:p>
+            <a:pPr indent="0" algn="l">
+              <a:spcBef>
+                <a:spcPts val="0"/>
+              </a:spcBef>
+              <a:spcAft>
+                <a:spcPts val="0"/>
+              </a:spcAft>
+              <a:buNone/>
+            </a:pPr>
+            <a:r>
+              <a:rPr lang="en-US" altLang="en-US" sz="860">
+                <a:solidFill>
+                  <a:srgbClr val="C7D7E8"/>
+                </a:solidFill>
+                <a:latin typeface="微软雅黑" panose="020B0503020204020204" charset="-122"/>
+                <a:ea typeface="微软雅黑" panose="020B0503020204020204" charset="-122"/>
+              </a:rPr>
+              <a:t>ReceivableSettlement</a:t>
+            </a:r>
+            <a:endParaRPr lang="en-US" altLang="en-US" sz="860">
+              <a:solidFill>
+                <a:srgbClr val="C7D7E8"/>
+              </a:solidFill>
+              <a:latin typeface="微软雅黑" panose="020B0503020204020204" charset="-122"/>
+              <a:ea typeface="微软雅黑" panose="020B0503020204020204" charset="-122"/>
+            </a:endParaRPr>
+          </a:p>
+        </p:txBody>
+      </p:sp>
+      <p:sp>
+        <p:nvSpPr>
+          <p:cNvPr id="91" name="椭圆 90"/>
           <p:cNvSpPr/>
           <p:nvPr/>
         </p:nvSpPr>
         <p:spPr>
           <a:xfrm>
-            <a:off x="9194800" y="4635500"/>
-            <a:ext cx="990600" cy="279400"/>
-          </a:xfrm>
-          <a:prstGeom prst="roundRect">
+            <a:off x="7137400" y="4076700"/>
+            <a:ext cx="431800" cy="431800"/>
+          </a:xfrm>
+          <a:prstGeom prst="ellipse">
             <a:avLst/>
           </a:prstGeom>
           <a:solidFill>
-            <a:srgbClr val="102A47"/>
+            <a:srgbClr val="3B82F6"/>
           </a:solidFill>
-          <a:ln w="12700">
+          <a:ln w="19050">
             <a:solidFill>
-              <a:srgbClr val="45F0C5">
-                <a:alpha val="65000"/>
-              </a:srgbClr>
+              <a:srgbClr val="071426"/>
             </a:solidFill>
           </a:ln>
         </p:spPr>
@@ -12731,14 +13220,14 @@
       </p:sp>
       <p:sp>
         <p:nvSpPr>
-          <p:cNvPr id="99" name="文本框 98"/>
+          <p:cNvPr id="92" name="文本框 91"/>
           <p:cNvSpPr txBox="1"/>
           <p:nvPr/>
         </p:nvSpPr>
         <p:spPr>
           <a:xfrm>
-            <a:off x="9258300" y="4699000"/>
-            <a:ext cx="863600" cy="322580"/>
+            <a:off x="7137400" y="4203700"/>
+            <a:ext cx="431800" cy="322580"/>
           </a:xfrm>
           <a:prstGeom prst="rect">
             <a:avLst/>
@@ -12746,34 +13235,32 @@
           <a:noFill/>
         </p:spPr>
         <p:txBody>
-          <a:bodyPr wrap="square" lIns="0" tIns="0" rIns="0" rtlCol="0" anchor="t">
-            <a:normAutofit fontScale="90000"/>
+          <a:bodyPr wrap="square" lIns="0" tIns="0" rIns="0" rtlCol="0" anchor="ctr">
+            <a:noAutofit/>
           </a:bodyPr>
           <a:p>
-            <a:pPr algn="ctr"/>
-            <a:r>
-              <a:rPr lang="zh-CN" altLang="en-US" sz="1365" b="1">
-                <a:solidFill>
-                  <a:srgbClr val="45F0C5"/>
+            <a:pPr indent="0" algn="ctr">
+              <a:spcBef>
+                <a:spcPts val="0"/>
+              </a:spcBef>
+              <a:spcAft>
+                <a:spcPts val="0"/>
+              </a:spcAft>
+              <a:buNone/>
+            </a:pPr>
+            <a:r>
+              <a:rPr lang="en-US" altLang="en-US" sz="750" b="1">
+                <a:solidFill>
+                  <a:srgbClr val="071426"/>
                 </a:solidFill>
                 <a:latin typeface="Aptos" charset="0"/>
                 <a:cs typeface="Aptos" charset="0"/>
               </a:rPr>
-              <a:t>许可式</a:t>
-            </a:r>
-            <a:r>
-              <a:rPr lang="en-US" altLang="zh-CN" sz="1365" b="1">
-                <a:solidFill>
-                  <a:srgbClr val="45F0C5"/>
-                </a:solidFill>
-                <a:latin typeface="Aptos" charset="0"/>
-                <a:cs typeface="Aptos" charset="0"/>
-              </a:rPr>
-              <a:t> MVP</a:t>
-            </a:r>
-            <a:endParaRPr lang="en-US" altLang="zh-CN" sz="1365" b="1">
+              <a:t>04</a:t>
+            </a:r>
+            <a:endParaRPr lang="en-US" altLang="en-US" sz="750" b="1">
               <a:solidFill>
-                <a:srgbClr val="45F0C5"/>
+                <a:srgbClr val="071426"/>
               </a:solidFill>
               <a:latin typeface="Aptos" charset="0"/>
               <a:cs typeface="Aptos" charset="0"/>
@@ -12783,14 +13270,114 @@
       </p:sp>
       <p:sp>
         <p:nvSpPr>
-          <p:cNvPr id="100" name="圆角矩形 99"/>
+          <p:cNvPr id="93" name="文本框 92"/>
+          <p:cNvSpPr txBox="1"/>
+          <p:nvPr/>
+        </p:nvSpPr>
+        <p:spPr>
+          <a:xfrm>
+            <a:off x="7747000" y="4089400"/>
+            <a:ext cx="3175000" cy="347980"/>
+          </a:xfrm>
+          <a:prstGeom prst="rect">
+            <a:avLst/>
+          </a:prstGeom>
+          <a:noFill/>
+        </p:spPr>
+        <p:txBody>
+          <a:bodyPr wrap="square" lIns="25400" tIns="25400" rIns="25400" rtlCol="0" anchor="t">
+            <a:noAutofit/>
+          </a:bodyPr>
+          <a:p>
+            <a:pPr indent="0" algn="l">
+              <a:spcBef>
+                <a:spcPts val="0"/>
+              </a:spcBef>
+              <a:spcAft>
+                <a:spcPts val="0"/>
+              </a:spcAft>
+              <a:buNone/>
+            </a:pPr>
+            <a:r>
+              <a:rPr lang="zh-CN" altLang="en-US" sz="1080" b="1">
+                <a:solidFill>
+                  <a:srgbClr val="F4F8FC"/>
+                </a:solidFill>
+                <a:latin typeface="微软雅黑" panose="020B0503020204020204" charset="-122"/>
+                <a:ea typeface="微软雅黑" panose="020B0503020204020204" charset="-122"/>
+              </a:rPr>
+              <a:t>异步审计证据</a:t>
+            </a:r>
+            <a:endParaRPr lang="zh-CN" altLang="en-US" sz="1080" b="1">
+              <a:solidFill>
+                <a:srgbClr val="F4F8FC"/>
+              </a:solidFill>
+              <a:latin typeface="微软雅黑" panose="020B0503020204020204" charset="-122"/>
+              <a:ea typeface="微软雅黑" panose="020B0503020204020204" charset="-122"/>
+            </a:endParaRPr>
+          </a:p>
+        </p:txBody>
+      </p:sp>
+      <p:sp>
+        <p:nvSpPr>
+          <p:cNvPr id="94" name="文本框 93"/>
+          <p:cNvSpPr txBox="1"/>
+          <p:nvPr/>
+        </p:nvSpPr>
+        <p:spPr>
+          <a:xfrm>
+            <a:off x="7747000" y="4318000"/>
+            <a:ext cx="3175000" cy="360680"/>
+          </a:xfrm>
+          <a:prstGeom prst="rect">
+            <a:avLst/>
+          </a:prstGeom>
+          <a:noFill/>
+        </p:spPr>
+        <p:txBody>
+          <a:bodyPr wrap="square" lIns="38100" tIns="38100" rIns="38100" rtlCol="0" anchor="t">
+            <a:noAutofit/>
+          </a:bodyPr>
+          <a:p>
+            <a:pPr indent="0" algn="l">
+              <a:spcBef>
+                <a:spcPts val="0"/>
+              </a:spcBef>
+              <a:spcAft>
+                <a:spcPts val="0"/>
+              </a:spcAft>
+              <a:buNone/>
+            </a:pPr>
+            <a:r>
+              <a:rPr lang="en-US" altLang="en-US" sz="860">
+                <a:solidFill>
+                  <a:srgbClr val="C7D7E8"/>
+                </a:solidFill>
+                <a:latin typeface="微软雅黑" panose="020B0503020204020204" charset="-122"/>
+                <a:ea typeface="微软雅黑" panose="020B0503020204020204" charset="-122"/>
+              </a:rPr>
+              <a:t>AuditProofRegistry</a:t>
+            </a:r>
+            <a:endParaRPr lang="en-US" altLang="en-US" sz="860">
+              <a:solidFill>
+                <a:srgbClr val="C7D7E8"/>
+              </a:solidFill>
+              <a:latin typeface="微软雅黑" panose="020B0503020204020204" charset="-122"/>
+              <a:ea typeface="微软雅黑" panose="020B0503020204020204" charset="-122"/>
+            </a:endParaRPr>
+          </a:p>
+        </p:txBody>
+      </p:sp>
+      <p:sp>
+        <p:nvSpPr>
+          <p:cNvPr id="95" name="圆角矩形 94"/>
           <p:cNvSpPr/>
           <p:nvPr/>
         </p:nvSpPr>
         <p:spPr>
           <a:xfrm>
-            <a:off x="10261600" y="4635500"/>
-            <a:ext cx="1066800" cy="279400"/>
+            <a:off x="7086600" y="4635500"/>
+            <a:ext cx="1066800" cy="304800"/>
           </a:xfrm>
           <a:prstGeom prst="roundRect">
             <a:avLst/>
@@ -12800,8 +13387,8 @@
           </a:solidFill>
           <a:ln w="12700">
             <a:solidFill>
-              <a:srgbClr val="3B82F6">
-                <a:alpha val="65000"/>
+              <a:srgbClr val="24D5FF">
+                <a:alpha val="48000"/>
               </a:srgbClr>
             </a:solidFill>
           </a:ln>
@@ -12832,14 +13419,14 @@
       </p:sp>
       <p:sp>
         <p:nvSpPr>
-          <p:cNvPr id="101" name="文本框 100"/>
+          <p:cNvPr id="96" name="文本框 95"/>
           <p:cNvSpPr txBox="1"/>
           <p:nvPr/>
         </p:nvSpPr>
         <p:spPr>
           <a:xfrm>
-            <a:off x="10325100" y="4699000"/>
-            <a:ext cx="939800" cy="322580"/>
+            <a:off x="7150100" y="4673600"/>
+            <a:ext cx="939800" cy="335280"/>
           </a:xfrm>
           <a:prstGeom prst="rect">
             <a:avLst/>
@@ -12847,34 +13434,32 @@
           <a:noFill/>
         </p:spPr>
         <p:txBody>
-          <a:bodyPr wrap="square" lIns="0" tIns="0" rIns="0" rtlCol="0" anchor="t">
-            <a:normAutofit/>
+          <a:bodyPr wrap="square" lIns="12700" tIns="12700" rIns="12700" rtlCol="0" anchor="ctr">
+            <a:noAutofit/>
           </a:bodyPr>
           <a:p>
-            <a:pPr algn="ctr"/>
-            <a:r>
-              <a:rPr lang="zh-CN" altLang="en-US" sz="1170" b="1">
-                <a:solidFill>
-                  <a:srgbClr val="3B82F6"/>
+            <a:pPr indent="0" algn="ctr">
+              <a:spcBef>
+                <a:spcPts val="0"/>
+              </a:spcBef>
+              <a:spcAft>
+                <a:spcPts val="0"/>
+              </a:spcAft>
+              <a:buNone/>
+            </a:pPr>
+            <a:r>
+              <a:rPr lang="en-US" altLang="en-US" sz="860" b="1">
+                <a:solidFill>
+                  <a:srgbClr val="24D5FF"/>
                 </a:solidFill>
                 <a:latin typeface="Aptos" charset="0"/>
                 <a:cs typeface="Aptos" charset="0"/>
               </a:rPr>
-              <a:t>受限</a:t>
-            </a:r>
-            <a:r>
-              <a:rPr lang="en-US" altLang="zh-CN" sz="1170" b="1">
-                <a:solidFill>
-                  <a:srgbClr val="3B82F6"/>
-                </a:solidFill>
-                <a:latin typeface="Aptos" charset="0"/>
-                <a:cs typeface="Aptos" charset="0"/>
-              </a:rPr>
-              <a:t> Relayer</a:t>
-            </a:r>
-            <a:endParaRPr lang="en-US" altLang="zh-CN" sz="1170" b="1">
+              <a:t>CC3 TESTNET</a:t>
+            </a:r>
+            <a:endParaRPr lang="en-US" altLang="en-US" sz="860" b="1">
               <a:solidFill>
-                <a:srgbClr val="3B82F6"/>
+                <a:srgbClr val="24D5FF"/>
               </a:solidFill>
               <a:latin typeface="Aptos" charset="0"/>
               <a:cs typeface="Aptos" charset="0"/>
@@ -12884,56 +13469,14 @@
       </p:sp>
       <p:sp>
         <p:nvSpPr>
-          <p:cNvPr id="102" name="文本框 101"/>
-          <p:cNvSpPr txBox="1"/>
-          <p:nvPr/>
-        </p:nvSpPr>
-        <p:spPr>
-          <a:xfrm>
-            <a:off x="7086600" y="5041900"/>
-            <a:ext cx="4241800" cy="322580"/>
-          </a:xfrm>
-          <a:prstGeom prst="rect">
-            <a:avLst/>
-          </a:prstGeom>
-          <a:noFill/>
-        </p:spPr>
-        <p:txBody>
-          <a:bodyPr wrap="square" lIns="0" tIns="0" rIns="0" rtlCol="0" anchor="t">
-            <a:normAutofit/>
-          </a:bodyPr>
-          <a:p>
-            <a:pPr algn="l"/>
-            <a:r>
-              <a:rPr lang="zh-CN" altLang="en-US" sz="940">
-                <a:solidFill>
-                  <a:srgbClr val="7894AF"/>
-                </a:solidFill>
-                <a:latin typeface="微软雅黑" panose="020B0503020204020204" charset="-122"/>
-                <a:ea typeface="微软雅黑" panose="020B0503020204020204" charset="-122"/>
-              </a:rPr>
-              <a:t>审计证明交易事实，不等于余额充足或还款保证。</a:t>
-            </a:r>
-            <a:endParaRPr lang="zh-CN" altLang="en-US" sz="940">
-              <a:solidFill>
-                <a:srgbClr val="7894AF"/>
-              </a:solidFill>
-              <a:latin typeface="微软雅黑" panose="020B0503020204020204" charset="-122"/>
-              <a:ea typeface="微软雅黑" panose="020B0503020204020204" charset="-122"/>
-            </a:endParaRPr>
-          </a:p>
-        </p:txBody>
-      </p:sp>
-      <p:sp>
-        <p:nvSpPr>
-          <p:cNvPr id="103" name="圆角矩形 102"/>
+          <p:cNvPr id="97" name="圆角矩形 96"/>
           <p:cNvSpPr/>
           <p:nvPr/>
         </p:nvSpPr>
         <p:spPr>
           <a:xfrm>
-            <a:off x="609600" y="5600700"/>
-            <a:ext cx="10972800" cy="647700"/>
+            <a:off x="8229600" y="4635500"/>
+            <a:ext cx="889000" cy="304800"/>
           </a:xfrm>
           <a:prstGeom prst="roundRect">
             <a:avLst/>
@@ -12943,8 +13486,8 @@
           </a:solidFill>
           <a:ln w="12700">
             <a:solidFill>
-              <a:srgbClr val="244666">
-                <a:alpha val="75000"/>
+              <a:srgbClr val="FFCB66">
+                <a:alpha val="48000"/>
               </a:srgbClr>
             </a:solidFill>
           </a:ln>
@@ -12975,14 +13518,14 @@
       </p:sp>
       <p:sp>
         <p:nvSpPr>
-          <p:cNvPr id="104" name="文本框 103"/>
+          <p:cNvPr id="98" name="文本框 97"/>
           <p:cNvSpPr txBox="1"/>
           <p:nvPr/>
         </p:nvSpPr>
         <p:spPr>
           <a:xfrm>
-            <a:off x="889000" y="5715000"/>
-            <a:ext cx="889000" cy="322580"/>
+            <a:off x="8293100" y="4673600"/>
+            <a:ext cx="762000" cy="335280"/>
           </a:xfrm>
           <a:prstGeom prst="rect">
             <a:avLst/>
@@ -12990,22 +13533,397 @@
           <a:noFill/>
         </p:spPr>
         <p:txBody>
-          <a:bodyPr wrap="square" lIns="0" tIns="0" rIns="0" rtlCol="0" anchor="t">
-            <a:normAutofit/>
+          <a:bodyPr wrap="square" lIns="12700" tIns="12700" rIns="12700" rtlCol="0" anchor="ctr">
+            <a:noAutofit/>
           </a:bodyPr>
           <a:p>
-            <a:pPr algn="l"/>
-            <a:r>
-              <a:rPr lang="zh-CN" altLang="en-US" sz="890" b="1">
-                <a:solidFill>
-                  <a:srgbClr val="24D5FF"/>
+            <a:pPr indent="0" algn="ctr">
+              <a:spcBef>
+                <a:spcPts val="0"/>
+              </a:spcBef>
+              <a:spcAft>
+                <a:spcPts val="0"/>
+              </a:spcAft>
+              <a:buNone/>
+            </a:pPr>
+            <a:r>
+              <a:rPr lang="en-US" altLang="en-US" sz="860" b="1">
+                <a:solidFill>
+                  <a:srgbClr val="FFCB66"/>
+                </a:solidFill>
+                <a:latin typeface="Aptos" charset="0"/>
+                <a:cs typeface="Aptos" charset="0"/>
+              </a:rPr>
+              <a:t>MockUSDC</a:t>
+            </a:r>
+            <a:endParaRPr lang="en-US" altLang="en-US" sz="860" b="1">
+              <a:solidFill>
+                <a:srgbClr val="FFCB66"/>
+              </a:solidFill>
+              <a:latin typeface="Aptos" charset="0"/>
+              <a:cs typeface="Aptos" charset="0"/>
+            </a:endParaRPr>
+          </a:p>
+        </p:txBody>
+      </p:sp>
+      <p:sp>
+        <p:nvSpPr>
+          <p:cNvPr id="99" name="圆角矩形 98"/>
+          <p:cNvSpPr/>
+          <p:nvPr/>
+        </p:nvSpPr>
+        <p:spPr>
+          <a:xfrm>
+            <a:off x="9194800" y="4635500"/>
+            <a:ext cx="990600" cy="304800"/>
+          </a:xfrm>
+          <a:prstGeom prst="roundRect">
+            <a:avLst/>
+          </a:prstGeom>
+          <a:solidFill>
+            <a:srgbClr val="102A47"/>
+          </a:solidFill>
+          <a:ln w="12700">
+            <a:solidFill>
+              <a:srgbClr val="45F0C5">
+                <a:alpha val="48000"/>
+              </a:srgbClr>
+            </a:solidFill>
+          </a:ln>
+        </p:spPr>
+        <p:style>
+          <a:lnRef idx="2">
+            <a:schemeClr val="accent1">
+              <a:lumMod val="75000"/>
+            </a:schemeClr>
+          </a:lnRef>
+          <a:fillRef idx="1">
+            <a:schemeClr val="accent1"/>
+          </a:fillRef>
+          <a:effectRef idx="0">
+            <a:srgbClr val="FFFFFF"/>
+          </a:effectRef>
+          <a:fontRef idx="minor">
+            <a:schemeClr val="lt1"/>
+          </a:fontRef>
+        </p:style>
+        <p:txBody>
+          <a:bodyPr rtlCol="0" anchor="ctr"/>
+          <a:p>
+            <a:pPr algn="ctr"/>
+            <a:endParaRPr lang="zh-CN" altLang="en-US"/>
+          </a:p>
+        </p:txBody>
+      </p:sp>
+      <p:sp>
+        <p:nvSpPr>
+          <p:cNvPr id="100" name="文本框 99"/>
+          <p:cNvSpPr txBox="1"/>
+          <p:nvPr/>
+        </p:nvSpPr>
+        <p:spPr>
+          <a:xfrm>
+            <a:off x="9258300" y="4673600"/>
+            <a:ext cx="863600" cy="335280"/>
+          </a:xfrm>
+          <a:prstGeom prst="rect">
+            <a:avLst/>
+          </a:prstGeom>
+          <a:noFill/>
+        </p:spPr>
+        <p:txBody>
+          <a:bodyPr wrap="square" lIns="12700" tIns="12700" rIns="12700" rtlCol="0" anchor="ctr">
+            <a:noAutofit/>
+          </a:bodyPr>
+          <a:p>
+            <a:pPr indent="0" algn="ctr">
+              <a:spcBef>
+                <a:spcPts val="0"/>
+              </a:spcBef>
+              <a:spcAft>
+                <a:spcPts val="0"/>
+              </a:spcAft>
+              <a:buNone/>
+            </a:pPr>
+            <a:r>
+              <a:rPr lang="zh-CN" altLang="en-US" sz="860" b="1">
+                <a:solidFill>
+                  <a:srgbClr val="45F0C5"/>
+                </a:solidFill>
+                <a:latin typeface="Aptos" charset="0"/>
+                <a:cs typeface="Aptos" charset="0"/>
+              </a:rPr>
+              <a:t>许可式</a:t>
+            </a:r>
+            <a:r>
+              <a:rPr lang="en-US" altLang="zh-CN" sz="860" b="1">
+                <a:solidFill>
+                  <a:srgbClr val="45F0C5"/>
+                </a:solidFill>
+                <a:latin typeface="Aptos" charset="0"/>
+                <a:cs typeface="Aptos" charset="0"/>
+              </a:rPr>
+              <a:t> MVP</a:t>
+            </a:r>
+            <a:endParaRPr lang="en-US" altLang="zh-CN" sz="860" b="1">
+              <a:solidFill>
+                <a:srgbClr val="45F0C5"/>
+              </a:solidFill>
+              <a:latin typeface="Aptos" charset="0"/>
+              <a:cs typeface="Aptos" charset="0"/>
+            </a:endParaRPr>
+          </a:p>
+        </p:txBody>
+      </p:sp>
+      <p:sp>
+        <p:nvSpPr>
+          <p:cNvPr id="101" name="圆角矩形 100"/>
+          <p:cNvSpPr/>
+          <p:nvPr/>
+        </p:nvSpPr>
+        <p:spPr>
+          <a:xfrm>
+            <a:off x="10261600" y="4635500"/>
+            <a:ext cx="1066800" cy="304800"/>
+          </a:xfrm>
+          <a:prstGeom prst="roundRect">
+            <a:avLst/>
+          </a:prstGeom>
+          <a:solidFill>
+            <a:srgbClr val="102A47"/>
+          </a:solidFill>
+          <a:ln w="12700">
+            <a:solidFill>
+              <a:srgbClr val="3B82F6">
+                <a:alpha val="48000"/>
+              </a:srgbClr>
+            </a:solidFill>
+          </a:ln>
+        </p:spPr>
+        <p:style>
+          <a:lnRef idx="2">
+            <a:schemeClr val="accent1">
+              <a:lumMod val="75000"/>
+            </a:schemeClr>
+          </a:lnRef>
+          <a:fillRef idx="1">
+            <a:schemeClr val="accent1"/>
+          </a:fillRef>
+          <a:effectRef idx="0">
+            <a:srgbClr val="FFFFFF"/>
+          </a:effectRef>
+          <a:fontRef idx="minor">
+            <a:schemeClr val="lt1"/>
+          </a:fontRef>
+        </p:style>
+        <p:txBody>
+          <a:bodyPr rtlCol="0" anchor="ctr"/>
+          <a:p>
+            <a:pPr algn="ctr"/>
+            <a:endParaRPr lang="zh-CN" altLang="en-US"/>
+          </a:p>
+        </p:txBody>
+      </p:sp>
+      <p:sp>
+        <p:nvSpPr>
+          <p:cNvPr id="102" name="文本框 101"/>
+          <p:cNvSpPr txBox="1"/>
+          <p:nvPr/>
+        </p:nvSpPr>
+        <p:spPr>
+          <a:xfrm>
+            <a:off x="10325100" y="4673600"/>
+            <a:ext cx="939800" cy="335280"/>
+          </a:xfrm>
+          <a:prstGeom prst="rect">
+            <a:avLst/>
+          </a:prstGeom>
+          <a:noFill/>
+        </p:spPr>
+        <p:txBody>
+          <a:bodyPr wrap="square" lIns="12700" tIns="12700" rIns="12700" rtlCol="0" anchor="ctr">
+            <a:noAutofit/>
+          </a:bodyPr>
+          <a:p>
+            <a:pPr indent="0" algn="ctr">
+              <a:spcBef>
+                <a:spcPts val="0"/>
+              </a:spcBef>
+              <a:spcAft>
+                <a:spcPts val="0"/>
+              </a:spcAft>
+              <a:buNone/>
+            </a:pPr>
+            <a:r>
+              <a:rPr lang="zh-CN" altLang="en-US" sz="860" b="1">
+                <a:solidFill>
+                  <a:srgbClr val="3B82F6"/>
+                </a:solidFill>
+                <a:latin typeface="Aptos" charset="0"/>
+                <a:cs typeface="Aptos" charset="0"/>
+              </a:rPr>
+              <a:t>受限</a:t>
+            </a:r>
+            <a:r>
+              <a:rPr lang="en-US" altLang="zh-CN" sz="860" b="1">
+                <a:solidFill>
+                  <a:srgbClr val="3B82F6"/>
+                </a:solidFill>
+                <a:latin typeface="Aptos" charset="0"/>
+                <a:cs typeface="Aptos" charset="0"/>
+              </a:rPr>
+              <a:t> Relayer</a:t>
+            </a:r>
+            <a:endParaRPr lang="en-US" altLang="zh-CN" sz="860" b="1">
+              <a:solidFill>
+                <a:srgbClr val="3B82F6"/>
+              </a:solidFill>
+              <a:latin typeface="Aptos" charset="0"/>
+              <a:cs typeface="Aptos" charset="0"/>
+            </a:endParaRPr>
+          </a:p>
+        </p:txBody>
+      </p:sp>
+      <p:sp>
+        <p:nvSpPr>
+          <p:cNvPr id="103" name="文本框 102"/>
+          <p:cNvSpPr txBox="1"/>
+          <p:nvPr/>
+        </p:nvSpPr>
+        <p:spPr>
+          <a:xfrm>
+            <a:off x="7086600" y="5041900"/>
+            <a:ext cx="4241800" cy="335280"/>
+          </a:xfrm>
+          <a:prstGeom prst="rect">
+            <a:avLst/>
+          </a:prstGeom>
+          <a:noFill/>
+        </p:spPr>
+        <p:txBody>
+          <a:bodyPr wrap="square" lIns="12700" tIns="12700" rIns="12700" rtlCol="0" anchor="t">
+            <a:noAutofit/>
+          </a:bodyPr>
+          <a:p>
+            <a:pPr indent="0" algn="l">
+              <a:spcBef>
+                <a:spcPts val="0"/>
+              </a:spcBef>
+              <a:spcAft>
+                <a:spcPts val="0"/>
+              </a:spcAft>
+              <a:buNone/>
+            </a:pPr>
+            <a:r>
+              <a:rPr lang="zh-CN" altLang="en-US" sz="750">
+                <a:solidFill>
+                  <a:srgbClr val="7894AF"/>
                 </a:solidFill>
                 <a:latin typeface="微软雅黑" panose="020B0503020204020204" charset="-122"/>
                 <a:ea typeface="微软雅黑" panose="020B0503020204020204" charset="-122"/>
               </a:rPr>
+              <a:t>审计证明交易事实，不等于余额充足或还款保证。</a:t>
+            </a:r>
+            <a:endParaRPr lang="zh-CN" altLang="en-US" sz="750">
+              <a:solidFill>
+                <a:srgbClr val="7894AF"/>
+              </a:solidFill>
+              <a:latin typeface="微软雅黑" panose="020B0503020204020204" charset="-122"/>
+              <a:ea typeface="微软雅黑" panose="020B0503020204020204" charset="-122"/>
+            </a:endParaRPr>
+          </a:p>
+        </p:txBody>
+      </p:sp>
+      <p:sp>
+        <p:nvSpPr>
+          <p:cNvPr id="104" name="圆角矩形 103"/>
+          <p:cNvSpPr/>
+          <p:nvPr/>
+        </p:nvSpPr>
+        <p:spPr>
+          <a:xfrm>
+            <a:off x="609600" y="5600700"/>
+            <a:ext cx="10972800" cy="647700"/>
+          </a:xfrm>
+          <a:prstGeom prst="roundRect">
+            <a:avLst/>
+          </a:prstGeom>
+          <a:solidFill>
+            <a:srgbClr val="102A47"/>
+          </a:solidFill>
+          <a:ln w="12700">
+            <a:solidFill>
+              <a:srgbClr val="244666">
+                <a:alpha val="88000"/>
+              </a:srgbClr>
+            </a:solidFill>
+          </a:ln>
+        </p:spPr>
+        <p:style>
+          <a:lnRef idx="2">
+            <a:schemeClr val="accent1">
+              <a:lumMod val="75000"/>
+            </a:schemeClr>
+          </a:lnRef>
+          <a:fillRef idx="1">
+            <a:schemeClr val="accent1"/>
+          </a:fillRef>
+          <a:effectRef idx="0">
+            <a:srgbClr val="FFFFFF"/>
+          </a:effectRef>
+          <a:fontRef idx="minor">
+            <a:schemeClr val="lt1"/>
+          </a:fontRef>
+        </p:style>
+        <p:txBody>
+          <a:bodyPr rtlCol="0" anchor="ctr"/>
+          <a:p>
+            <a:pPr algn="ctr"/>
+            <a:endParaRPr lang="zh-CN" altLang="en-US"/>
+          </a:p>
+        </p:txBody>
+      </p:sp>
+      <p:sp>
+        <p:nvSpPr>
+          <p:cNvPr id="105" name="文本框 104"/>
+          <p:cNvSpPr txBox="1"/>
+          <p:nvPr/>
+        </p:nvSpPr>
+        <p:spPr>
+          <a:xfrm>
+            <a:off x="889000" y="5702300"/>
+            <a:ext cx="1016000" cy="335280"/>
+          </a:xfrm>
+          <a:prstGeom prst="rect">
+            <a:avLst/>
+          </a:prstGeom>
+          <a:noFill/>
+        </p:spPr>
+        <p:txBody>
+          <a:bodyPr wrap="square" lIns="12700" tIns="12700" rIns="12700" rtlCol="0" anchor="t">
+            <a:noAutofit/>
+          </a:bodyPr>
+          <a:p>
+            <a:pPr indent="0" algn="l">
+              <a:spcBef>
+                <a:spcPts val="0"/>
+              </a:spcBef>
+              <a:spcAft>
+                <a:spcPts val="0"/>
+              </a:spcAft>
+              <a:buNone/>
+            </a:pPr>
+            <a:r>
+              <a:rPr lang="zh-CN" altLang="en-US" sz="860" b="1">
+                <a:solidFill>
+                  <a:srgbClr val="24D5FF"/>
+                </a:solidFill>
+                <a:latin typeface="微软雅黑" panose="020B0503020204020204" charset="-122"/>
+                <a:ea typeface="微软雅黑" panose="020B0503020204020204" charset="-122"/>
+              </a:rPr>
               <a:t>供应商</a:t>
             </a:r>
-            <a:endParaRPr lang="zh-CN" altLang="en-US" sz="890" b="1">
+            <a:endParaRPr lang="zh-CN" altLang="en-US" sz="860" b="1">
               <a:solidFill>
                 <a:srgbClr val="24D5FF"/>
               </a:solidFill>
@@ -13017,14 +13935,14 @@
       </p:sp>
       <p:sp>
         <p:nvSpPr>
-          <p:cNvPr id="105" name="文本框 104"/>
+          <p:cNvPr id="106" name="文本框 105"/>
           <p:cNvSpPr txBox="1"/>
           <p:nvPr/>
         </p:nvSpPr>
         <p:spPr>
           <a:xfrm>
-            <a:off x="889000" y="5930900"/>
-            <a:ext cx="2921000" cy="322580"/>
+            <a:off x="889000" y="5918200"/>
+            <a:ext cx="2921000" cy="347980"/>
           </a:xfrm>
           <a:prstGeom prst="rect">
             <a:avLst/>
@@ -13032,13 +13950,21 @@
           <a:noFill/>
         </p:spPr>
         <p:txBody>
-          <a:bodyPr wrap="square" lIns="0" tIns="0" rIns="0" rtlCol="0" anchor="t">
-            <a:normAutofit/>
+          <a:bodyPr wrap="square" lIns="25400" tIns="25400" rIns="25400" rtlCol="0" anchor="t">
+            <a:noAutofit/>
           </a:bodyPr>
           <a:p>
-            <a:pPr algn="l"/>
-            <a:r>
-              <a:rPr lang="zh-CN" altLang="en-US" sz="1135" b="1">
+            <a:pPr indent="0" algn="l">
+              <a:spcBef>
+                <a:spcPts val="0"/>
+              </a:spcBef>
+              <a:spcAft>
+                <a:spcPts val="0"/>
+              </a:spcAft>
+              <a:buNone/>
+            </a:pPr>
+            <a:r>
+              <a:rPr lang="zh-CN" altLang="en-US" sz="1100" b="1">
                 <a:solidFill>
                   <a:srgbClr val="F4F8FC"/>
                 </a:solidFill>
@@ -13047,7 +13973,7 @@
               </a:rPr>
               <a:t>提前获得流动性</a:t>
             </a:r>
-            <a:endParaRPr lang="zh-CN" altLang="en-US" sz="1135" b="1">
+            <a:endParaRPr lang="zh-CN" altLang="en-US" sz="1100" b="1">
               <a:solidFill>
                 <a:srgbClr val="F4F8FC"/>
               </a:solidFill>
@@ -13059,14 +13985,14 @@
       </p:sp>
       <p:sp>
         <p:nvSpPr>
-          <p:cNvPr id="106" name="文本框 105"/>
+          <p:cNvPr id="107" name="文本框 106"/>
           <p:cNvSpPr txBox="1"/>
           <p:nvPr/>
         </p:nvSpPr>
         <p:spPr>
           <a:xfrm>
-            <a:off x="4572000" y="5715000"/>
-            <a:ext cx="889000" cy="322580"/>
+            <a:off x="4572000" y="5702300"/>
+            <a:ext cx="1016000" cy="335280"/>
           </a:xfrm>
           <a:prstGeom prst="rect">
             <a:avLst/>
@@ -13074,13 +14000,21 @@
           <a:noFill/>
         </p:spPr>
         <p:txBody>
-          <a:bodyPr wrap="square" lIns="0" tIns="0" rIns="0" rtlCol="0" anchor="t">
-            <a:normAutofit/>
+          <a:bodyPr wrap="square" lIns="12700" tIns="12700" rIns="12700" rtlCol="0" anchor="t">
+            <a:noAutofit/>
           </a:bodyPr>
           <a:p>
-            <a:pPr algn="l"/>
-            <a:r>
-              <a:rPr lang="zh-CN" altLang="en-US" sz="890" b="1">
+            <a:pPr indent="0" algn="l">
+              <a:spcBef>
+                <a:spcPts val="0"/>
+              </a:spcBef>
+              <a:spcAft>
+                <a:spcPts val="0"/>
+              </a:spcAft>
+              <a:buNone/>
+            </a:pPr>
+            <a:r>
+              <a:rPr lang="zh-CN" altLang="en-US" sz="860" b="1">
                 <a:solidFill>
                   <a:srgbClr val="FFCB66"/>
                 </a:solidFill>
@@ -13089,7 +14023,7 @@
               </a:rPr>
               <a:t>核心买方</a:t>
             </a:r>
-            <a:endParaRPr lang="zh-CN" altLang="en-US" sz="890" b="1">
+            <a:endParaRPr lang="zh-CN" altLang="en-US" sz="860" b="1">
               <a:solidFill>
                 <a:srgbClr val="FFCB66"/>
               </a:solidFill>
@@ -13101,14 +14035,14 @@
       </p:sp>
       <p:sp>
         <p:nvSpPr>
-          <p:cNvPr id="107" name="文本框 106"/>
+          <p:cNvPr id="108" name="文本框 107"/>
           <p:cNvSpPr txBox="1"/>
           <p:nvPr/>
         </p:nvSpPr>
         <p:spPr>
           <a:xfrm>
-            <a:off x="4572000" y="5930900"/>
-            <a:ext cx="2921000" cy="322580"/>
+            <a:off x="4572000" y="5918200"/>
+            <a:ext cx="2921000" cy="347980"/>
           </a:xfrm>
           <a:prstGeom prst="rect">
             <a:avLst/>
@@ -13116,13 +14050,21 @@
           <a:noFill/>
         </p:spPr>
         <p:txBody>
-          <a:bodyPr wrap="square" lIns="0" tIns="0" rIns="0" rtlCol="0" anchor="t">
-            <a:normAutofit/>
+          <a:bodyPr wrap="square" lIns="25400" tIns="25400" rIns="25400" rtlCol="0" anchor="t">
+            <a:noAutofit/>
           </a:bodyPr>
           <a:p>
-            <a:pPr algn="l"/>
-            <a:r>
-              <a:rPr lang="zh-CN" altLang="en-US" sz="1135" b="1">
+            <a:pPr indent="0" algn="l">
+              <a:spcBef>
+                <a:spcPts val="0"/>
+              </a:spcBef>
+              <a:spcAft>
+                <a:spcPts val="0"/>
+              </a:spcAft>
+              <a:buNone/>
+            </a:pPr>
+            <a:r>
+              <a:rPr lang="zh-CN" altLang="en-US" sz="1100" b="1">
                 <a:solidFill>
                   <a:srgbClr val="F4F8FC"/>
                 </a:solidFill>
@@ -13131,7 +14073,7 @@
               </a:rPr>
               <a:t>确权时不锁款</a:t>
             </a:r>
-            <a:endParaRPr lang="zh-CN" altLang="en-US" sz="1135" b="1">
+            <a:endParaRPr lang="zh-CN" altLang="en-US" sz="1100" b="1">
               <a:solidFill>
                 <a:srgbClr val="F4F8FC"/>
               </a:solidFill>
@@ -13143,14 +14085,14 @@
       </p:sp>
       <p:sp>
         <p:nvSpPr>
-          <p:cNvPr id="108" name="文本框 107"/>
+          <p:cNvPr id="109" name="文本框 108"/>
           <p:cNvSpPr txBox="1"/>
           <p:nvPr/>
         </p:nvSpPr>
         <p:spPr>
           <a:xfrm>
-            <a:off x="8255000" y="5715000"/>
-            <a:ext cx="889000" cy="322580"/>
+            <a:off x="8255000" y="5702300"/>
+            <a:ext cx="1016000" cy="335280"/>
           </a:xfrm>
           <a:prstGeom prst="rect">
             <a:avLst/>
@@ -13158,13 +14100,21 @@
           <a:noFill/>
         </p:spPr>
         <p:txBody>
-          <a:bodyPr wrap="square" lIns="0" tIns="0" rIns="0" rtlCol="0" anchor="t">
-            <a:normAutofit/>
+          <a:bodyPr wrap="square" lIns="12700" tIns="12700" rIns="12700" rtlCol="0" anchor="t">
+            <a:noAutofit/>
           </a:bodyPr>
           <a:p>
-            <a:pPr algn="l"/>
-            <a:r>
-              <a:rPr lang="zh-CN" altLang="en-US" sz="890" b="1">
+            <a:pPr indent="0" algn="l">
+              <a:spcBef>
+                <a:spcPts val="0"/>
+              </a:spcBef>
+              <a:spcAft>
+                <a:spcPts val="0"/>
+              </a:spcAft>
+              <a:buNone/>
+            </a:pPr>
+            <a:r>
+              <a:rPr lang="zh-CN" altLang="en-US" sz="860" b="1">
                 <a:solidFill>
                   <a:srgbClr val="45F0C5"/>
                 </a:solidFill>
@@ -13173,7 +14123,7 @@
               </a:rPr>
               <a:t>资金方</a:t>
             </a:r>
-            <a:endParaRPr lang="zh-CN" altLang="en-US" sz="890" b="1">
+            <a:endParaRPr lang="zh-CN" altLang="en-US" sz="860" b="1">
               <a:solidFill>
                 <a:srgbClr val="45F0C5"/>
               </a:solidFill>
@@ -13185,14 +14135,14 @@
       </p:sp>
       <p:sp>
         <p:nvSpPr>
-          <p:cNvPr id="109" name="文本框 108"/>
+          <p:cNvPr id="110" name="文本框 109"/>
           <p:cNvSpPr txBox="1"/>
           <p:nvPr/>
         </p:nvSpPr>
         <p:spPr>
           <a:xfrm>
-            <a:off x="8255000" y="5930900"/>
-            <a:ext cx="2921000" cy="322580"/>
+            <a:off x="8255000" y="5918200"/>
+            <a:ext cx="2921000" cy="347980"/>
           </a:xfrm>
           <a:prstGeom prst="rect">
             <a:avLst/>
@@ -13200,13 +14150,21 @@
           <a:noFill/>
         </p:spPr>
         <p:txBody>
-          <a:bodyPr wrap="square" lIns="0" tIns="0" rIns="0" rtlCol="0" anchor="t">
-            <a:normAutofit/>
+          <a:bodyPr wrap="square" lIns="25400" tIns="25400" rIns="25400" rtlCol="0" anchor="t">
+            <a:noAutofit/>
           </a:bodyPr>
           <a:p>
-            <a:pPr algn="l"/>
-            <a:r>
-              <a:rPr lang="zh-CN" altLang="en-US" sz="1135" b="1">
+            <a:pPr indent="0" algn="l">
+              <a:spcBef>
+                <a:spcPts val="0"/>
+              </a:spcBef>
+              <a:spcAft>
+                <a:spcPts val="0"/>
+              </a:spcAft>
+              <a:buNone/>
+            </a:pPr>
+            <a:r>
+              <a:rPr lang="zh-CN" altLang="en-US" sz="1100" b="1">
                 <a:solidFill>
                   <a:srgbClr val="F4F8FC"/>
                 </a:solidFill>
@@ -13215,7 +14173,7 @@
               </a:rPr>
               <a:t>可验证权属与到期兑付</a:t>
             </a:r>
-            <a:endParaRPr lang="zh-CN" altLang="en-US" sz="1135" b="1">
+            <a:endParaRPr lang="zh-CN" altLang="en-US" sz="1100" b="1">
               <a:solidFill>
                 <a:srgbClr val="F4F8FC"/>
               </a:solidFill>
@@ -13227,7 +14185,7 @@
       </p:sp>
       <p:cxnSp>
         <p:nvCxnSpPr>
-          <p:cNvPr id="110" name="直接连接符 109"/>
+          <p:cNvPr id="111" name="直接连接符 110"/>
           <p:cNvCxnSpPr/>
           <p:nvPr/>
         </p:nvCxnSpPr>
@@ -13262,7 +14220,7 @@
       </p:cxnSp>
       <p:cxnSp>
         <p:nvCxnSpPr>
-          <p:cNvPr id="111" name="直接连接符 110"/>
+          <p:cNvPr id="112" name="直接连接符 111"/>
           <p:cNvCxnSpPr/>
           <p:nvPr/>
         </p:nvCxnSpPr>
@@ -13297,7 +14255,7 @@
       </p:cxnSp>
       <p:sp>
         <p:nvSpPr>
-          <p:cNvPr id="112" name="文本框 111"/>
+          <p:cNvPr id="113" name="文本框 112"/>
           <p:cNvSpPr txBox="1"/>
           <p:nvPr/>
         </p:nvSpPr>
@@ -13312,13 +14270,21 @@
           <a:noFill/>
         </p:spPr>
         <p:txBody>
-          <a:bodyPr wrap="square" lIns="0" tIns="0" rIns="0" rtlCol="0" anchor="t">
-            <a:normAutofit/>
+          <a:bodyPr wrap="square" lIns="0" tIns="0" rIns="0" rtlCol="0" anchor="ctr">
+            <a:noAutofit/>
           </a:bodyPr>
           <a:p>
-            <a:pPr algn="ctr"/>
-            <a:r>
-              <a:rPr lang="zh-CN" altLang="en-US" sz="835">
+            <a:pPr indent="0" algn="ctr">
+              <a:spcBef>
+                <a:spcPts val="0"/>
+              </a:spcBef>
+              <a:spcAft>
+                <a:spcPts val="0"/>
+              </a:spcAft>
+              <a:buNone/>
+            </a:pPr>
+            <a:r>
+              <a:rPr lang="zh-CN" altLang="en-US" sz="750">
                 <a:solidFill>
                   <a:srgbClr val="7894AF"/>
                 </a:solidFill>
@@ -13329,7 +14295,7 @@
               <a:t>演示边界：</a:t>
             </a:r>
             <a:r>
-              <a:rPr lang="en-US" altLang="zh-CN" sz="835">
+              <a:rPr lang="en-US" altLang="zh-CN" sz="750">
                 <a:solidFill>
                   <a:srgbClr val="7894AF"/>
                 </a:solidFill>
@@ -13340,7 +14306,7 @@
               <a:t>Creditcoin CC3 </a:t>
             </a:r>
             <a:r>
-              <a:rPr lang="zh-CN" altLang="en-US" sz="835">
+              <a:rPr lang="zh-CN" altLang="en-US" sz="750">
                 <a:solidFill>
                   <a:srgbClr val="7894AF"/>
                 </a:solidFill>
@@ -13351,7 +14317,7 @@
               <a:t>测试网</a:t>
             </a:r>
             <a:r>
-              <a:rPr lang="en-US" altLang="zh-CN" sz="835">
+              <a:rPr lang="en-US" altLang="zh-CN" sz="750">
                 <a:solidFill>
                   <a:srgbClr val="7894AF"/>
                 </a:solidFill>
@@ -13362,7 +14328,7 @@
               <a:t> · MockUSDC · </a:t>
             </a:r>
             <a:r>
-              <a:rPr lang="zh-CN" altLang="en-US" sz="835">
+              <a:rPr lang="zh-CN" altLang="en-US" sz="750">
                 <a:solidFill>
                   <a:srgbClr val="7894AF"/>
                 </a:solidFill>
@@ -13372,7 +14338,7 @@
               </a:rPr>
               <a:t>许可式流程</a:t>
             </a:r>
-            <a:endParaRPr lang="zh-CN" altLang="en-US" sz="835">
+            <a:endParaRPr lang="zh-CN" altLang="en-US" sz="750">
               <a:solidFill>
                 <a:srgbClr val="7894AF"/>
               </a:solidFill>
